--- a/docs/Презентация_сервиса.pptx
+++ b/docs/Презентация_сервиса.pptx
@@ -122,7 +122,7 @@
   <p:extLst>
     <p:ext uri="{521415D9-36F7-43E2-AB2F-B90AF26B5E84}">
       <p14:sectionLst xmlns:p14="http://schemas.microsoft.com/office/powerpoint/2010/main">
-        <p14:section name="Проблема" id="{d429754c-f2f7-f935-2dc4-dddec1145c19}">
+        <p14:section name="Проблема" id="{6e83d9b0-5210-30b2-e15e-e5fe11e2f8a3}">
           <p14:sldIdLst>
             <p14:sldId id="256"/>
             <p14:sldId id="257"/>
@@ -130,7 +130,7 @@
             <p14:sldId id="259"/>
           </p14:sldIdLst>
         </p14:section>
-        <p14:section name="Решение" id="{198a0aaa-7034-a876-e3af-36e82c3ba679}">
+        <p14:section name="Решение" id="{e9669532-9f5a-a502-8269-0dc66b1a615c}">
           <p14:sldIdLst>
             <p14:sldId id="260"/>
             <p14:sldId id="261"/>
@@ -142,7 +142,7 @@
             <p14:sldId id="267"/>
           </p14:sldIdLst>
         </p14:section>
-        <p14:section name="Применение" id="{ab0671c2-913c-a92b-d0cd-8251d6fa21b5}">
+        <p14:section name="Применение" id="{7f00ee02-fae6-1fe6-e69a-c9149ac6b307}">
           <p14:sldIdLst>
             <p14:sldId id="268"/>
             <p14:sldId id="269"/>
@@ -2149,7 +2149,7 @@
                   <a:srgbClr val="51606F"/>
                 </a:solidFill>
               </a:rPr>
-              <a:t>https://mmvolkov.github.io/invest-project-eval/</a:t>
+              <a:t>https://scout-argument.ru/invest-project-eval/</a:t>
             </a:r>
             <a:endParaRPr lang="en-US" sz="1000" dirty="0"/>
           </a:p>
@@ -2750,12 +2750,12 @@
         </p:nvSpPr>
         <p:spPr>
           <a:xfrm>
-            <a:off x="8899855" y="640080"/>
-            <a:ext cx="2743200" cy="822960"/>
+            <a:off x="8076895" y="640080"/>
+            <a:ext cx="3566160" cy="548640"/>
           </a:xfrm>
           <a:prstGeom prst="roundRect">
             <a:avLst>
-              <a:gd name="adj" fmla="val 11111"/>
+              <a:gd name="adj" fmla="val 16667"/>
             </a:avLst>
           </a:prstGeom>
           <a:solidFill>
@@ -2777,8 +2777,8 @@
         </p:nvSpPr>
         <p:spPr>
           <a:xfrm>
-            <a:off x="9037015" y="640080"/>
-            <a:ext cx="2468880" cy="822960"/>
+            <a:off x="8214055" y="640080"/>
+            <a:ext cx="3291840" cy="548640"/>
           </a:xfrm>
           <a:prstGeom prst="rect">
             <a:avLst/>
@@ -2835,7 +2835,7 @@
                   <a:srgbClr val="4C8DFF"/>
                 </a:solidFill>
               </a:rPr>
-              <a:t>https://mmvolkov.github.io/invest-project-eval/</a:t>
+              <a:t>https://scout-argument.ru/invest-project-eval/</a:t>
             </a:r>
             <a:endParaRPr lang="en-US" sz="1600" dirty="0"/>
           </a:p>
@@ -6577,7 +6577,7 @@
                   <a:srgbClr val="4C8DFF"/>
                 </a:solidFill>
               </a:rPr>
-              <a:t>https://mmvolkov.github.io/invest-project-eval/</a:t>
+              <a:t>https://scout-argument.ru/invest-project-eval/</a:t>
             </a:r>
             <a:endParaRPr lang="en-US" sz="1800" dirty="0"/>
           </a:p>

--- a/docs/Презентация_сервиса.pptx
+++ b/docs/Презентация_сервиса.pptx
@@ -4,6 +4,9 @@
   <p:sldMasterIdLst>
     <p:sldMasterId id="2147483648" r:id="rId1"/>
   </p:sldMasterIdLst>
+  <p:notesMasterIdLst>
+    <p:notesMasterId r:id="rId18"/>
+  </p:notesMasterIdLst>
   <p:sldIdLst>
     <p:sldId id="256" r:id="rId2"/>
     <p:sldId id="257" r:id="rId3"/>
@@ -22,9 +25,6 @@
     <p:sldId id="270" r:id="rId16"/>
     <p:sldId id="271" r:id="rId17"/>
   </p:sldIdLst>
-  <p:notesMasterIdLst>
-    <p:notesMasterId r:id="rId18"/>
-  </p:notesMasterIdLst>
   <p:sldSz cx="12192000" cy="6858000"/>
   <p:notesSz cx="6858000" cy="12192000"/>
   <p:defaultTextStyle>
@@ -122,7 +122,7 @@
   <p:extLst>
     <p:ext uri="{521415D9-36F7-43E2-AB2F-B90AF26B5E84}">
       <p14:sectionLst xmlns:p14="http://schemas.microsoft.com/office/powerpoint/2010/main">
-        <p14:section name="Проблема" id="{6e83d9b0-5210-30b2-e15e-e5fe11e2f8a3}">
+        <p14:section name="Проблема" id="{6E83D9B0-5210-30B2-E15E-E5FE11E2F8A3}">
           <p14:sldIdLst>
             <p14:sldId id="256"/>
             <p14:sldId id="257"/>
@@ -130,7 +130,7 @@
             <p14:sldId id="259"/>
           </p14:sldIdLst>
         </p14:section>
-        <p14:section name="Решение" id="{e9669532-9f5a-a502-8269-0dc66b1a615c}">
+        <p14:section name="Решение" id="{E9669532-9F5A-A502-8269-0DC66B1A615C}">
           <p14:sldIdLst>
             <p14:sldId id="260"/>
             <p14:sldId id="261"/>
@@ -142,7 +142,7 @@
             <p14:sldId id="267"/>
           </p14:sldIdLst>
         </p14:section>
-        <p14:section name="Применение" id="{7f00ee02-fae6-1fe6-e69a-c9149ac6b307}">
+        <p14:section name="Применение" id="{7F00EE02-FAE6-1FE6-E69A-C9149AC6B307}">
           <p14:sldIdLst>
             <p14:sldId id="268"/>
             <p14:sldId id="269"/>
@@ -181,234 +181,10 @@
           <a:chExt cx="0" cy="0"/>
         </a:xfrm>
       </p:grpSpPr>
-      <p:sp>
-        <p:nvSpPr>
-          <p:cNvPr id="2" name="Header Placeholder 1"/>
-          <p:cNvSpPr>
-            <a:spLocks noGrp="1"/>
-          </p:cNvSpPr>
-          <p:nvPr>
-            <p:ph type="hdr" sz="quarter"/>
-          </p:nvPr>
-        </p:nvSpPr>
-        <p:spPr>
-          <a:xfrm>
-            <a:off x="0" y="0"/>
-            <a:ext cx="2971800" cy="458788"/>
-          </a:xfrm>
-          <a:prstGeom prst="rect">
-            <a:avLst/>
-          </a:prstGeom>
-        </p:spPr>
-        <p:txBody>
-          <a:bodyPr vert="horz" lIns="91440" tIns="45720" rIns="91440" bIns="45720" rtlCol="0"/>
-          <a:lstStyle>
-            <a:lvl1pPr algn="l">
-              <a:defRPr sz="1200"/>
-            </a:lvl1pPr>
-          </a:lstStyle>
-          <a:p>
-            <a:endParaRPr lang="en-US"/>
-          </a:p>
-        </p:txBody>
-      </p:sp>
-      <p:sp>
-        <p:nvSpPr>
-          <p:cNvPr id="3" name="Date Placeholder 2"/>
-          <p:cNvSpPr>
-            <a:spLocks noGrp="1"/>
-          </p:cNvSpPr>
-          <p:nvPr>
-            <p:ph type="dt" idx="1"/>
-          </p:nvPr>
-        </p:nvSpPr>
-        <p:spPr>
-          <a:xfrm>
-            <a:off x="3884613" y="0"/>
-            <a:ext cx="2971800" cy="458788"/>
-          </a:xfrm>
-          <a:prstGeom prst="rect">
-            <a:avLst/>
-          </a:prstGeom>
-        </p:spPr>
-        <p:txBody>
-          <a:bodyPr vert="horz" lIns="91440" tIns="45720" rIns="91440" bIns="45720" rtlCol="0"/>
-          <a:lstStyle>
-            <a:lvl1pPr algn="r">
-              <a:defRPr sz="1200"/>
-            </a:lvl1pPr>
-          </a:lstStyle>
-          <a:p>
-            <a:fld id="{5282F153-3F37-0F45-9E97-73ACFA13230C}" type="datetimeFigureOut">
-              <a:rPr lang="en-US"/>
-              <a:t>7/23/19</a:t>
-            </a:fld>
-            <a:endParaRPr lang="en-US"/>
-          </a:p>
-        </p:txBody>
-      </p:sp>
-      <p:sp>
-        <p:nvSpPr>
-          <p:cNvPr id="4" name="Slide Image Placeholder 3"/>
-          <p:cNvSpPr>
-            <a:spLocks noGrp="1" noRot="1" noChangeAspect="1"/>
-          </p:cNvSpPr>
-          <p:nvPr>
-            <p:ph type="sldImg" idx="2"/>
-          </p:nvPr>
-        </p:nvSpPr>
-        <p:spPr>
-          <a:xfrm>
-            <a:off x="685800" y="1143000"/>
-            <a:ext cx="5486400" cy="3086100"/>
-          </a:xfrm>
-          <a:prstGeom prst="rect">
-            <a:avLst/>
-          </a:prstGeom>
-          <a:noFill/>
-          <a:ln w="12700">
-            <a:solidFill>
-              <a:prstClr val="black"/>
-            </a:solidFill>
-          </a:ln>
-        </p:spPr>
-        <p:txBody>
-          <a:bodyPr vert="horz" lIns="91440" tIns="45720" rIns="91440" bIns="45720" rtlCol="0" anchor="ctr"/>
-          <a:lstStyle/>
-          <a:p>
-            <a:endParaRPr lang="en-US"/>
-          </a:p>
-        </p:txBody>
-      </p:sp>
-      <p:sp>
-        <p:nvSpPr>
-          <p:cNvPr id="5" name="Notes Placeholder 4"/>
-          <p:cNvSpPr>
-            <a:spLocks noGrp="1"/>
-          </p:cNvSpPr>
-          <p:nvPr>
-            <p:ph type="body" sz="quarter" idx="3"/>
-          </p:nvPr>
-        </p:nvSpPr>
-        <p:spPr>
-          <a:xfrm>
-            <a:off x="685800" y="4400550"/>
-            <a:ext cx="5486400" cy="3600450"/>
-          </a:xfrm>
-          <a:prstGeom prst="rect">
-            <a:avLst/>
-          </a:prstGeom>
-        </p:spPr>
-        <p:txBody>
-          <a:bodyPr vert="horz" lIns="91440" tIns="45720" rIns="91440" bIns="45720" rtlCol="0"/>
-          <a:lstStyle/>
-          <a:p>
-            <a:pPr lvl="0"/>
-            <a:r>
-              <a:rPr lang="en-US"/>
-              <a:t>Click to edit Master text styles</a:t>
-            </a:r>
-          </a:p>
-          <a:p>
-            <a:pPr lvl="1"/>
-            <a:r>
-              <a:rPr lang="en-US"/>
-              <a:t>Second level</a:t>
-            </a:r>
-          </a:p>
-          <a:p>
-            <a:pPr lvl="2"/>
-            <a:r>
-              <a:rPr lang="en-US"/>
-              <a:t>Third level</a:t>
-            </a:r>
-          </a:p>
-          <a:p>
-            <a:pPr lvl="3"/>
-            <a:r>
-              <a:rPr lang="en-US"/>
-              <a:t>Fourth level</a:t>
-            </a:r>
-          </a:p>
-          <a:p>
-            <a:pPr lvl="4"/>
-            <a:r>
-              <a:rPr lang="en-US"/>
-              <a:t>Fifth level</a:t>
-            </a:r>
-          </a:p>
-        </p:txBody>
-      </p:sp>
-      <p:sp>
-        <p:nvSpPr>
-          <p:cNvPr id="6" name="Footer Placeholder 5"/>
-          <p:cNvSpPr>
-            <a:spLocks noGrp="1"/>
-          </p:cNvSpPr>
-          <p:nvPr>
-            <p:ph type="ftr" sz="quarter" idx="4"/>
-          </p:nvPr>
-        </p:nvSpPr>
-        <p:spPr>
-          <a:xfrm>
-            <a:off x="0" y="8685213"/>
-            <a:ext cx="2971800" cy="458787"/>
-          </a:xfrm>
-          <a:prstGeom prst="rect">
-            <a:avLst/>
-          </a:prstGeom>
-        </p:spPr>
-        <p:txBody>
-          <a:bodyPr vert="horz" lIns="91440" tIns="45720" rIns="91440" bIns="45720" rtlCol="0" anchor="b"/>
-          <a:lstStyle>
-            <a:lvl1pPr algn="l">
-              <a:defRPr sz="1200"/>
-            </a:lvl1pPr>
-          </a:lstStyle>
-          <a:p>
-            <a:endParaRPr lang="en-US"/>
-          </a:p>
-        </p:txBody>
-      </p:sp>
-      <p:sp>
-        <p:nvSpPr>
-          <p:cNvPr id="7" name="Slide Number Placeholder 6"/>
-          <p:cNvSpPr>
-            <a:spLocks noGrp="1"/>
-          </p:cNvSpPr>
-          <p:nvPr>
-            <p:ph type="sldNum" sz="quarter" idx="5"/>
-          </p:nvPr>
-        </p:nvSpPr>
-        <p:spPr>
-          <a:xfrm>
-            <a:off x="3884613" y="8685213"/>
-            <a:ext cx="2971800" cy="458787"/>
-          </a:xfrm>
-          <a:prstGeom prst="rect">
-            <a:avLst/>
-          </a:prstGeom>
-        </p:spPr>
-        <p:txBody>
-          <a:bodyPr vert="horz" lIns="91440" tIns="45720" rIns="91440" bIns="45720" rtlCol="0" anchor="b"/>
-          <a:lstStyle>
-            <a:lvl1pPr algn="r">
-              <a:defRPr sz="1200"/>
-            </a:lvl1pPr>
-          </a:lstStyle>
-          <a:p>
-            <a:fld id="{CE5E9CC1-C706-0F49-92D6-E571CC5EEA8F}" type="slidenum">
-              <a:rPr lang="en-US"/>
-              <a:t>‹#›</a:t>
-            </a:fld>
-            <a:endParaRPr lang="en-US"/>
-          </a:p>
-        </p:txBody>
-      </p:sp>
     </p:spTree>
     <p:extLst>
       <p:ext uri="{BB962C8B-B14F-4D97-AF65-F5344CB8AC3E}">
-        <p14:creationId xmlns:p14="http://schemas.microsoft.com/office/powerpoint/2010/main" val="1024086991"/>
+        <p14:creationId xmlns:p14="http://schemas.microsoft.com/office/powerpoint/2010/main" val="601503271"/>
       </p:ext>
     </p:extLst>
   </p:cSld>
@@ -556,7 +332,6 @@
               <a:rPr lang="en-US" dirty="0"/>
               <a:t>Титульный слайд. Деск предназначен для самостоятельного чтения.</a:t>
             </a:r>
-            <a:endParaRPr lang="en-US" dirty="0"/>
           </a:p>
         </p:txBody>
       </p:sp>
@@ -640,10 +415,6 @@
           <a:bodyPr/>
           <a:lstStyle/>
           <a:p>
-            <a:r>
-              <a:rPr lang="en-US" dirty="0"/>
-              <a:t/>
-            </a:r>
             <a:endParaRPr lang="en-US" dirty="0"/>
           </a:p>
         </p:txBody>
@@ -728,10 +499,6 @@
           <a:bodyPr/>
           <a:lstStyle/>
           <a:p>
-            <a:r>
-              <a:rPr lang="en-US" dirty="0"/>
-              <a:t/>
-            </a:r>
             <a:endParaRPr lang="en-US" dirty="0"/>
           </a:p>
         </p:txBody>
@@ -816,10 +583,6 @@
           <a:bodyPr/>
           <a:lstStyle/>
           <a:p>
-            <a:r>
-              <a:rPr lang="en-US" dirty="0"/>
-              <a:t/>
-            </a:r>
             <a:endParaRPr lang="en-US" dirty="0"/>
           </a:p>
         </p:txBody>
@@ -904,10 +667,6 @@
           <a:bodyPr/>
           <a:lstStyle/>
           <a:p>
-            <a:r>
-              <a:rPr lang="en-US" dirty="0"/>
-              <a:t/>
-            </a:r>
             <a:endParaRPr lang="en-US" dirty="0"/>
           </a:p>
         </p:txBody>
@@ -992,10 +751,6 @@
           <a:bodyPr/>
           <a:lstStyle/>
           <a:p>
-            <a:r>
-              <a:rPr lang="en-US" dirty="0"/>
-              <a:t/>
-            </a:r>
             <a:endParaRPr lang="en-US" dirty="0"/>
           </a:p>
         </p:txBody>
@@ -1080,10 +835,6 @@
           <a:bodyPr/>
           <a:lstStyle/>
           <a:p>
-            <a:r>
-              <a:rPr lang="en-US" dirty="0"/>
-              <a:t/>
-            </a:r>
             <a:endParaRPr lang="en-US" dirty="0"/>
           </a:p>
         </p:txBody>
@@ -1168,10 +919,6 @@
           <a:bodyPr/>
           <a:lstStyle/>
           <a:p>
-            <a:r>
-              <a:rPr lang="en-US" dirty="0"/>
-              <a:t/>
-            </a:r>
             <a:endParaRPr lang="en-US" dirty="0"/>
           </a:p>
         </p:txBody>
@@ -1256,10 +1003,6 @@
           <a:bodyPr/>
           <a:lstStyle/>
           <a:p>
-            <a:r>
-              <a:rPr lang="en-US" dirty="0"/>
-              <a:t/>
-            </a:r>
             <a:endParaRPr lang="en-US" dirty="0"/>
           </a:p>
         </p:txBody>
@@ -1344,10 +1087,6 @@
           <a:bodyPr/>
           <a:lstStyle/>
           <a:p>
-            <a:r>
-              <a:rPr lang="en-US" dirty="0"/>
-              <a:t/>
-            </a:r>
             <a:endParaRPr lang="en-US" dirty="0"/>
           </a:p>
         </p:txBody>
@@ -1432,10 +1171,6 @@
           <a:bodyPr/>
           <a:lstStyle/>
           <a:p>
-            <a:r>
-              <a:rPr lang="en-US" dirty="0"/>
-              <a:t/>
-            </a:r>
             <a:endParaRPr lang="en-US" dirty="0"/>
           </a:p>
         </p:txBody>
@@ -1520,10 +1255,6 @@
           <a:bodyPr/>
           <a:lstStyle/>
           <a:p>
-            <a:r>
-              <a:rPr lang="en-US" dirty="0"/>
-              <a:t/>
-            </a:r>
             <a:endParaRPr lang="en-US" dirty="0"/>
           </a:p>
         </p:txBody>
@@ -1608,10 +1339,6 @@
           <a:bodyPr/>
           <a:lstStyle/>
           <a:p>
-            <a:r>
-              <a:rPr lang="en-US" dirty="0"/>
-              <a:t/>
-            </a:r>
             <a:endParaRPr lang="en-US" dirty="0"/>
           </a:p>
         </p:txBody>
@@ -1696,10 +1423,6 @@
           <a:bodyPr/>
           <a:lstStyle/>
           <a:p>
-            <a:r>
-              <a:rPr lang="en-US" dirty="0"/>
-              <a:t/>
-            </a:r>
             <a:endParaRPr lang="en-US" dirty="0"/>
           </a:p>
         </p:txBody>
@@ -1784,10 +1507,6 @@
           <a:bodyPr/>
           <a:lstStyle/>
           <a:p>
-            <a:r>
-              <a:rPr lang="en-US" dirty="0"/>
-              <a:t/>
-            </a:r>
             <a:endParaRPr lang="en-US" dirty="0"/>
           </a:p>
         </p:txBody>
@@ -1872,10 +1591,6 @@
           <a:bodyPr/>
           <a:lstStyle/>
           <a:p>
-            <a:r>
-              <a:rPr lang="en-US" dirty="0"/>
-              <a:t/>
-            </a:r>
             <a:endParaRPr lang="en-US" dirty="0"/>
           </a:p>
         </p:txBody>
@@ -1954,6 +1669,7 @@
         <a:solidFill>
           <a:srgbClr val="16202C"/>
         </a:solidFill>
+        <a:effectLst/>
       </p:bgPr>
     </p:bg>
     <p:spTree>
@@ -1973,9 +1689,11 @@
       <p:sp>
         <p:nvSpPr>
           <p:cNvPr id="2" name="Text 0"/>
-          <p:cNvSpPr/>
+          <p:cNvSpPr>
+            <a:spLocks noGrp="1"/>
+          </p:cNvSpPr>
           <p:nvPr>
-            <p:ph idx="100" type="title" hasCustomPrompt="1"/>
+            <p:ph type="title" idx="100" hasCustomPrompt="1"/>
           </p:nvPr>
         </p:nvSpPr>
         <p:spPr>
@@ -1992,7 +1710,7 @@
         <p:txBody>
           <a:bodyPr wrap="square" rtlCol="0"/>
           <a:lstStyle>
-            <a:lvl1pPr algn="l" indent="0" marL="0">
+            <a:lvl1pPr marL="0" indent="0" algn="l">
               <a:buNone/>
               <a:defRPr lang="en-US" sz="4400" b="1" dirty="0">
                 <a:solidFill>
@@ -2002,7 +1720,7 @@
             </a:lvl1pPr>
           </a:lstStyle>
           <a:p>
-            <a:pPr algn="l" indent="0" marL="0">
+            <a:pPr marL="0" indent="0" algn="l">
               <a:buNone/>
             </a:pPr>
             <a:endParaRPr lang="en-US" sz="4400" dirty="0"/>
@@ -2012,9 +1730,11 @@
       <p:sp>
         <p:nvSpPr>
           <p:cNvPr id="3" name="Text 0"/>
-          <p:cNvSpPr/>
+          <p:cNvSpPr>
+            <a:spLocks noGrp="1"/>
+          </p:cNvSpPr>
           <p:nvPr>
-            <p:ph idx="101" type="body" hasCustomPrompt="1"/>
+            <p:ph type="body" idx="101" hasCustomPrompt="1"/>
           </p:nvPr>
         </p:nvSpPr>
         <p:spPr>
@@ -2031,7 +1751,7 @@
         <p:txBody>
           <a:bodyPr wrap="square" rtlCol="0"/>
           <a:lstStyle>
-            <a:lvl1pPr algn="l" indent="0" marL="0">
+            <a:lvl1pPr marL="0" indent="0" algn="l">
               <a:buNone/>
               <a:defRPr lang="en-US" sz="2000" dirty="0">
                 <a:solidFill>
@@ -2041,7 +1761,7 @@
             </a:lvl1pPr>
           </a:lstStyle>
           <a:p>
-            <a:pPr algn="l" indent="0" marL="0">
+            <a:pPr marL="0" indent="0" algn="l">
               <a:buNone/>
             </a:pPr>
             <a:endParaRPr lang="en-US" sz="2000" dirty="0"/>
@@ -2064,6 +1784,7 @@
         <a:solidFill>
           <a:srgbClr val="FFFFFF"/>
         </a:solidFill>
+        <a:effectLst/>
       </p:bgPr>
     </p:bg>
     <p:spTree>
@@ -2083,9 +1804,11 @@
       <p:sp>
         <p:nvSpPr>
           <p:cNvPr id="2" name="Text 0"/>
-          <p:cNvSpPr/>
+          <p:cNvSpPr>
+            <a:spLocks noGrp="1"/>
+          </p:cNvSpPr>
           <p:nvPr>
-            <p:ph idx="100" type="title" hasCustomPrompt="1"/>
+            <p:ph type="title" idx="100" hasCustomPrompt="1"/>
           </p:nvPr>
         </p:nvSpPr>
         <p:spPr>
@@ -2102,7 +1825,7 @@
         <p:txBody>
           <a:bodyPr wrap="square" rtlCol="0"/>
           <a:lstStyle>
-            <a:lvl1pPr algn="l" indent="0" marL="0">
+            <a:lvl1pPr marL="0" indent="0" algn="l">
               <a:buNone/>
               <a:defRPr lang="en-US" sz="2800" b="1" dirty="0">
                 <a:solidFill>
@@ -2112,7 +1835,7 @@
             </a:lvl1pPr>
           </a:lstStyle>
           <a:p>
-            <a:pPr algn="l" indent="0" marL="0">
+            <a:pPr marL="0" indent="0" algn="l">
               <a:buNone/>
             </a:pPr>
             <a:endParaRPr lang="en-US" sz="2800" dirty="0"/>
@@ -2140,7 +1863,7 @@
           <a:bodyPr wrap="square" lIns="0" tIns="0" rIns="0" bIns="0" rtlCol="0" anchor="ctr"/>
           <a:lstStyle/>
           <a:p>
-            <a:pPr indent="0" marL="0">
+            <a:pPr marL="0" indent="0">
               <a:buNone/>
             </a:pPr>
             <a:r>
@@ -2175,7 +1898,7 @@
           </a:prstGeom>
           <a:extLst>
             <a:ext uri="{C572A759-6A51-4108-AA02-DFA0A04FC94B}">
-              <ma14:wrappingTextBoxFlag xmlns:ma14="http://schemas.microsoft.com/office/mac/drawingml/2011/main" val="0"/>
+              <ma14:wrappingTextBoxFlag xmlns:ma14="http://schemas.microsoft.com/office/mac/drawingml/2011/main" xmlns="" val="0"/>
             </a:ext>
           </a:extLst>
         </p:spPr>
@@ -2193,8 +1916,8 @@
           <a:p>
             <a:pPr algn="r"/>
             <a:fld id="{F7021451-1387-4CA6-816F-3879F97B5CBC}" type="slidenum">
-              <a:rPr b="0" lang="en-US"/>
-              <a:t>1003</a:t>
+              <a:rPr lang="en-US" b="0"/>
+              <a:t>‹#›</a:t>
             </a:fld>
             <a:endParaRPr lang="en-US"/>
           </a:p>
@@ -2216,6 +1939,7 @@
         <a:solidFill>
           <a:srgbClr val="16202C"/>
         </a:solidFill>
+        <a:effectLst/>
       </p:bgPr>
     </p:bg>
     <p:spTree>
@@ -2235,9 +1959,11 @@
       <p:sp>
         <p:nvSpPr>
           <p:cNvPr id="2" name="Text 0"/>
-          <p:cNvSpPr/>
+          <p:cNvSpPr>
+            <a:spLocks noGrp="1"/>
+          </p:cNvSpPr>
           <p:nvPr>
-            <p:ph idx="100" type="title" hasCustomPrompt="1"/>
+            <p:ph type="title" idx="100" hasCustomPrompt="1"/>
           </p:nvPr>
         </p:nvSpPr>
         <p:spPr>
@@ -2254,7 +1980,7 @@
         <p:txBody>
           <a:bodyPr wrap="square" rtlCol="0"/>
           <a:lstStyle>
-            <a:lvl1pPr algn="l" indent="0" marL="0">
+            <a:lvl1pPr marL="0" indent="0" algn="l">
               <a:buNone/>
               <a:defRPr lang="en-US" sz="2800" b="1" dirty="0">
                 <a:solidFill>
@@ -2264,7 +1990,7 @@
             </a:lvl1pPr>
           </a:lstStyle>
           <a:p>
-            <a:pPr algn="l" indent="0" marL="0">
+            <a:pPr marL="0" indent="0" algn="l">
               <a:buNone/>
             </a:pPr>
             <a:endParaRPr lang="en-US" sz="2800" dirty="0"/>
@@ -2291,7 +2017,7 @@
           </a:prstGeom>
           <a:extLst>
             <a:ext uri="{C572A759-6A51-4108-AA02-DFA0A04FC94B}">
-              <ma14:wrappingTextBoxFlag xmlns:ma14="http://schemas.microsoft.com/office/mac/drawingml/2011/main" val="0"/>
+              <ma14:wrappingTextBoxFlag xmlns:ma14="http://schemas.microsoft.com/office/mac/drawingml/2011/main" xmlns="" val="0"/>
             </a:ext>
           </a:extLst>
         </p:spPr>
@@ -2309,8 +2035,8 @@
           <a:p>
             <a:pPr algn="r"/>
             <a:fld id="{F7021451-1387-4CA6-816F-3879F97B5CBC}" type="slidenum">
-              <a:rPr b="0" lang="en-US"/>
-              <a:t>1004</a:t>
+              <a:rPr lang="en-US" b="0"/>
+              <a:t>‹#›</a:t>
             </a:fld>
             <a:endParaRPr lang="en-US"/>
           </a:p>
@@ -2327,6 +2053,11 @@
 <file path=ppt/slideMasters/slideMaster1.xml><?xml version="1.0" encoding="utf-8"?>
 <p:sldMaster xmlns:a="http://schemas.openxmlformats.org/drawingml/2006/main" xmlns:r="http://schemas.openxmlformats.org/officeDocument/2006/relationships" xmlns:p="http://schemas.openxmlformats.org/presentationml/2006/main">
   <p:cSld>
+    <p:bg>
+      <p:bgRef idx="1001">
+        <a:schemeClr val="bg1"/>
+      </p:bgRef>
+    </p:bg>
     <p:spTree>
       <p:nvGrpSpPr>
         <p:cNvPr id="1" name=""/>
@@ -2361,7 +2092,7 @@
           </a:prstGeom>
           <a:extLst>
             <a:ext uri="{C572A759-6A51-4108-AA02-DFA0A04FC94B}">
-              <ma14:wrappingTextBoxFlag xmlns:ma14="http://schemas.microsoft.com/office/mac/drawingml/2011/main" val="0"/>
+              <ma14:wrappingTextBoxFlag xmlns:ma14="http://schemas.microsoft.com/office/mac/drawingml/2011/main" xmlns="" val="0"/>
             </a:ext>
           </a:extLst>
         </p:spPr>
@@ -2379,8 +2110,8 @@
           <a:p>
             <a:pPr algn="r"/>
             <a:fld id="{F7021451-1387-4CA6-816F-3879F97B5CBC}" type="slidenum">
-              <a:rPr b="0" lang="en-US"/>
-              <a:t>null</a:t>
+              <a:rPr lang="en-US" b="0"/>
+              <a:t>‹#›</a:t>
             </a:fld>
             <a:endParaRPr lang="en-US"/>
           </a:p>
@@ -2669,9 +2400,11 @@
       <p:sp>
         <p:nvSpPr>
           <p:cNvPr id="2" name="Text 0"/>
-          <p:cNvSpPr/>
+          <p:cNvSpPr>
+            <a:spLocks noGrp="1"/>
+          </p:cNvSpPr>
           <p:nvPr>
-            <p:ph idx="100" type="title" hasCustomPrompt="1"/>
+            <p:ph type="title" idx="100" hasCustomPrompt="1"/>
           </p:nvPr>
         </p:nvSpPr>
         <p:spPr>
@@ -2689,7 +2422,7 @@
           <a:bodyPr wrap="square" lIns="0" tIns="0" rIns="0" bIns="0" rtlCol="0" anchor="b"/>
           <a:lstStyle/>
           <a:p>
-            <a:pPr algn="l" indent="0" marL="0">
+            <a:pPr marL="0" indent="0" algn="l">
               <a:buNone/>
             </a:pPr>
             <a:r>
@@ -2707,9 +2440,11 @@
       <p:sp>
         <p:nvSpPr>
           <p:cNvPr id="3" name="Text 0"/>
-          <p:cNvSpPr/>
+          <p:cNvSpPr>
+            <a:spLocks noGrp="1"/>
+          </p:cNvSpPr>
           <p:nvPr>
-            <p:ph idx="101" type="body" hasCustomPrompt="1"/>
+            <p:ph type="body" idx="101" hasCustomPrompt="1"/>
           </p:nvPr>
         </p:nvSpPr>
         <p:spPr>
@@ -2727,7 +2462,7 @@
           <a:bodyPr wrap="square" lIns="0" tIns="0" rIns="0" bIns="0" rtlCol="0" anchor="t"/>
           <a:lstStyle/>
           <a:p>
-            <a:pPr algn="l" indent="0" marL="0">
+            <a:pPr marL="0" indent="0" algn="l">
               <a:buNone/>
             </a:pPr>
             <a:r>
@@ -2768,6 +2503,13 @@
             <a:prstDash val="solid"/>
           </a:ln>
         </p:spPr>
+        <p:txBody>
+          <a:bodyPr/>
+          <a:lstStyle/>
+          <a:p>
+            <a:endParaRPr lang="ru-RU"/>
+          </a:p>
+        </p:txBody>
       </p:sp>
       <p:sp>
         <p:nvSpPr>
@@ -2790,7 +2532,7 @@
           <a:bodyPr wrap="square" lIns="0" tIns="0" rIns="0" bIns="0" rtlCol="0" anchor="ctr"/>
           <a:lstStyle/>
           <a:p>
-            <a:pPr algn="ctr" indent="0" marL="0">
+            <a:pPr marL="0" indent="0" algn="ctr">
               <a:buNone/>
             </a:pPr>
             <a:r>
@@ -2826,7 +2568,7 @@
           <a:bodyPr wrap="square" lIns="0" tIns="0" rIns="0" bIns="0" rtlCol="0" anchor="t"/>
           <a:lstStyle/>
           <a:p>
-            <a:pPr indent="0" marL="0">
+            <a:pPr marL="0" indent="0">
               <a:buNone/>
             </a:pPr>
             <a:r>
@@ -2862,7 +2604,7 @@
           <a:bodyPr wrap="square" lIns="0" tIns="0" rIns="0" bIns="0" rtlCol="0" anchor="t"/>
           <a:lstStyle/>
           <a:p>
-            <a:pPr indent="0" marL="0">
+            <a:pPr marL="0" indent="0">
               <a:buNone/>
             </a:pPr>
             <a:r>
@@ -2905,9 +2647,11 @@
       <p:sp>
         <p:nvSpPr>
           <p:cNvPr id="2" name="Text 0"/>
-          <p:cNvSpPr/>
+          <p:cNvSpPr>
+            <a:spLocks noGrp="1"/>
+          </p:cNvSpPr>
           <p:nvPr>
-            <p:ph idx="100" type="title" hasCustomPrompt="1"/>
+            <p:ph type="title" idx="100" hasCustomPrompt="1"/>
           </p:nvPr>
         </p:nvSpPr>
         <p:spPr>
@@ -2925,7 +2669,7 @@
           <a:bodyPr wrap="square" lIns="0" tIns="0" rIns="0" bIns="0" rtlCol="0" anchor="ctr"/>
           <a:lstStyle/>
           <a:p>
-            <a:pPr algn="l" indent="0" marL="0">
+            <a:pPr marL="0" indent="0" algn="l">
               <a:buNone/>
             </a:pPr>
             <a:r>
@@ -2942,14 +2686,14 @@
       </p:sp>
       <p:pic>
         <p:nvPicPr>
-          <p:cNvPr id="3" name="Диалог с ассистентом" descr="/tmp/claude-0/-home-user-invest-project-eval/cfb2f9eb-1ed1-598a-ae85-aefec36c7a96/scratchpad/shots/ai.png">    </p:cNvPr>
+          <p:cNvPr id="3" name="Диалог с ассистентом" descr="/tmp/claude-0/-home-user-invest-project-eval/cfb2f9eb-1ed1-598a-ae85-aefec36c7a96/scratchpad/shots/ai.png"/>
           <p:cNvPicPr>
             <a:picLocks noChangeAspect="1"/>
           </p:cNvPicPr>
           <p:nvPr/>
         </p:nvPicPr>
         <p:blipFill>
-          <a:blip r:embed="rId1"/>
+          <a:blip r:embed="rId3"/>
           <a:stretch>
             <a:fillRect/>
           </a:stretch>
@@ -2963,7 +2707,7 @@
             <a:avLst/>
           </a:prstGeom>
           <a:effectLst>
-            <a:outerShdw sx="100000" sy="100000" kx="0" ky="0" algn="bl" rotWithShape="0" blurRad="76200" dist="25400" dir="2700000">
+            <a:outerShdw blurRad="76200" dist="25400" dir="2700000" algn="bl" rotWithShape="0">
               <a:srgbClr val="000000">
                 <a:alpha val="18000"/>
               </a:srgbClr>
@@ -2992,7 +2736,7 @@
           <a:bodyPr wrap="square" lIns="0" tIns="0" rIns="0" bIns="0" rtlCol="0" anchor="t"/>
           <a:lstStyle/>
           <a:p>
-            <a:pPr algn="ctr" indent="0" marL="0">
+            <a:pPr marL="0" indent="0" algn="ctr">
               <a:buNone/>
             </a:pPr>
             <a:r>
@@ -3145,6 +2889,13 @@
             <a:prstDash val="solid"/>
           </a:ln>
         </p:spPr>
+        <p:txBody>
+          <a:bodyPr/>
+          <a:lstStyle/>
+          <a:p>
+            <a:endParaRPr lang="ru-RU"/>
+          </a:p>
+        </p:txBody>
       </p:sp>
       <p:sp>
         <p:nvSpPr>
@@ -3167,7 +2918,7 @@
           <a:bodyPr wrap="square" lIns="0" tIns="0" rIns="0" bIns="0" rtlCol="0" anchor="t"/>
           <a:lstStyle/>
           <a:p>
-            <a:pPr indent="0" marL="0">
+            <a:pPr marL="0" indent="0">
               <a:buNone/>
             </a:pPr>
             <a:r>
@@ -3202,7 +2953,7 @@
           </a:prstGeom>
           <a:extLst>
             <a:ext uri="{C572A759-6A51-4108-AA02-DFA0A04FC94B}">
-              <ma14:wrappingTextBoxFlag xmlns:ma14="http://schemas.microsoft.com/office/mac/drawingml/2011/main" val="0"/>
+              <ma14:wrappingTextBoxFlag xmlns:ma14="http://schemas.microsoft.com/office/mac/drawingml/2011/main" xmlns="" val="0"/>
             </a:ext>
           </a:extLst>
         </p:spPr>
@@ -3220,7 +2971,7 @@
           <a:p>
             <a:pPr algn="r"/>
             <a:fld id="{F7021451-1387-4CA6-816F-3879F97B5CBC}" type="slidenum">
-              <a:rPr b="0" lang="en-US"/>
+              <a:rPr lang="en-US" b="0"/>
               <a:t>10</a:t>
             </a:fld>
             <a:endParaRPr lang="en-US"/>
@@ -3255,9 +3006,11 @@
       <p:sp>
         <p:nvSpPr>
           <p:cNvPr id="2" name="Text 0"/>
-          <p:cNvSpPr/>
+          <p:cNvSpPr>
+            <a:spLocks noGrp="1"/>
+          </p:cNvSpPr>
           <p:nvPr>
-            <p:ph idx="100" type="title" hasCustomPrompt="1"/>
+            <p:ph type="title" idx="100" hasCustomPrompt="1"/>
           </p:nvPr>
         </p:nvSpPr>
         <p:spPr>
@@ -3275,7 +3028,7 @@
           <a:bodyPr wrap="square" lIns="0" tIns="0" rIns="0" bIns="0" rtlCol="0" anchor="ctr"/>
           <a:lstStyle/>
           <a:p>
-            <a:pPr algn="l" indent="0" marL="0">
+            <a:pPr marL="0" indent="0" algn="l">
               <a:buNone/>
             </a:pPr>
             <a:r>
@@ -3292,14 +3045,14 @@
       </p:sp>
       <p:pic>
         <p:nvPicPr>
-          <p:cNvPr id="3" name="Схема библиотеки шаблонов" descr="/home/user/invest-project-eval/docs/img/b5-library.png">    </p:cNvPr>
+          <p:cNvPr id="3" name="Схема библиотеки шаблонов" descr="/home/user/invest-project-eval/docs/img/b5-library.png"/>
           <p:cNvPicPr>
             <a:picLocks noChangeAspect="1"/>
           </p:cNvPicPr>
           <p:nvPr/>
         </p:nvPicPr>
         <p:blipFill>
-          <a:blip r:embed="rId1"/>
+          <a:blip r:embed="rId3"/>
           <a:stretch>
             <a:fillRect/>
           </a:stretch>
@@ -3340,6 +3093,13 @@
             <a:prstDash val="solid"/>
           </a:ln>
         </p:spPr>
+        <p:txBody>
+          <a:bodyPr/>
+          <a:lstStyle/>
+          <a:p>
+            <a:endParaRPr lang="ru-RU"/>
+          </a:p>
+        </p:txBody>
       </p:sp>
       <p:sp>
         <p:nvSpPr>
@@ -3349,7 +3109,7 @@
         </p:nvSpPr>
         <p:spPr>
           <a:xfrm>
-            <a:off x="7178040" y="1572768"/>
+            <a:off x="7178040" y="1394637"/>
             <a:ext cx="4236415" cy="502920"/>
           </a:xfrm>
           <a:prstGeom prst="rect">
@@ -3362,7 +3122,7 @@
           <a:bodyPr wrap="square" lIns="0" tIns="0" rIns="0" bIns="0" rtlCol="0" anchor="ctr"/>
           <a:lstStyle/>
           <a:p>
-            <a:pPr indent="0" marL="0">
+            <a:pPr marL="0" indent="0">
               <a:buNone/>
             </a:pPr>
             <a:r>
@@ -3385,7 +3145,7 @@
         </p:nvSpPr>
         <p:spPr>
           <a:xfrm>
-            <a:off x="7178040" y="2148840"/>
+            <a:off x="7178040" y="1970709"/>
             <a:ext cx="4236415" cy="182880"/>
           </a:xfrm>
           <a:prstGeom prst="rect">
@@ -3398,7 +3158,7 @@
           <a:bodyPr wrap="square" lIns="0" tIns="0" rIns="0" bIns="0" rtlCol="0" anchor="t"/>
           <a:lstStyle/>
           <a:p>
-            <a:pPr indent="0" marL="0">
+            <a:pPr marL="0" indent="0">
               <a:buNone/>
             </a:pPr>
             <a:r>
@@ -3439,6 +3199,13 @@
             <a:prstDash val="solid"/>
           </a:ln>
         </p:spPr>
+        <p:txBody>
+          <a:bodyPr/>
+          <a:lstStyle/>
+          <a:p>
+            <a:endParaRPr lang="ru-RU"/>
+          </a:p>
+        </p:txBody>
       </p:sp>
       <p:sp>
         <p:nvSpPr>
@@ -3448,7 +3215,7 @@
         </p:nvSpPr>
         <p:spPr>
           <a:xfrm>
-            <a:off x="7178040" y="2788920"/>
+            <a:off x="7178040" y="2610789"/>
             <a:ext cx="4236415" cy="502920"/>
           </a:xfrm>
           <a:prstGeom prst="rect">
@@ -3461,7 +3228,7 @@
           <a:bodyPr wrap="square" lIns="0" tIns="0" rIns="0" bIns="0" rtlCol="0" anchor="ctr"/>
           <a:lstStyle/>
           <a:p>
-            <a:pPr indent="0" marL="0">
+            <a:pPr marL="0" indent="0">
               <a:buNone/>
             </a:pPr>
             <a:r>
@@ -3484,7 +3251,7 @@
         </p:nvSpPr>
         <p:spPr>
           <a:xfrm>
-            <a:off x="7178040" y="3364992"/>
+            <a:off x="7178040" y="3186861"/>
             <a:ext cx="4236415" cy="182880"/>
           </a:xfrm>
           <a:prstGeom prst="rect">
@@ -3497,7 +3264,7 @@
           <a:bodyPr wrap="square" lIns="0" tIns="0" rIns="0" bIns="0" rtlCol="0" anchor="t"/>
           <a:lstStyle/>
           <a:p>
-            <a:pPr indent="0" marL="0">
+            <a:pPr marL="0" indent="0">
               <a:buNone/>
             </a:pPr>
             <a:r>
@@ -3538,6 +3305,13 @@
             <a:prstDash val="solid"/>
           </a:ln>
         </p:spPr>
+        <p:txBody>
+          <a:bodyPr/>
+          <a:lstStyle/>
+          <a:p>
+            <a:endParaRPr lang="ru-RU"/>
+          </a:p>
+        </p:txBody>
       </p:sp>
       <p:sp>
         <p:nvSpPr>
@@ -3547,7 +3321,7 @@
         </p:nvSpPr>
         <p:spPr>
           <a:xfrm>
-            <a:off x="7178040" y="4005072"/>
+            <a:off x="7178040" y="3826941"/>
             <a:ext cx="4236415" cy="502920"/>
           </a:xfrm>
           <a:prstGeom prst="rect">
@@ -3560,7 +3334,7 @@
           <a:bodyPr wrap="square" lIns="0" tIns="0" rIns="0" bIns="0" rtlCol="0" anchor="ctr"/>
           <a:lstStyle/>
           <a:p>
-            <a:pPr indent="0" marL="0">
+            <a:pPr marL="0" indent="0">
               <a:buNone/>
             </a:pPr>
             <a:r>
@@ -3583,7 +3357,7 @@
         </p:nvSpPr>
         <p:spPr>
           <a:xfrm>
-            <a:off x="7178040" y="4581144"/>
+            <a:off x="7178040" y="4403013"/>
             <a:ext cx="4236415" cy="182880"/>
           </a:xfrm>
           <a:prstGeom prst="rect">
@@ -3596,7 +3370,7 @@
           <a:bodyPr wrap="square" lIns="0" tIns="0" rIns="0" bIns="0" rtlCol="0" anchor="t"/>
           <a:lstStyle/>
           <a:p>
-            <a:pPr indent="0" marL="0">
+            <a:pPr marL="0" indent="0">
               <a:buNone/>
             </a:pPr>
             <a:r>
@@ -3637,6 +3411,13 @@
             <a:prstDash val="solid"/>
           </a:ln>
         </p:spPr>
+        <p:txBody>
+          <a:bodyPr/>
+          <a:lstStyle/>
+          <a:p>
+            <a:endParaRPr lang="ru-RU"/>
+          </a:p>
+        </p:txBody>
       </p:sp>
       <p:sp>
         <p:nvSpPr>
@@ -3646,7 +3427,7 @@
         </p:nvSpPr>
         <p:spPr>
           <a:xfrm>
-            <a:off x="7178040" y="5221224"/>
+            <a:off x="7178040" y="5043093"/>
             <a:ext cx="4236415" cy="502920"/>
           </a:xfrm>
           <a:prstGeom prst="rect">
@@ -3659,7 +3440,7 @@
           <a:bodyPr wrap="square" lIns="0" tIns="0" rIns="0" bIns="0" rtlCol="0" anchor="ctr"/>
           <a:lstStyle/>
           <a:p>
-            <a:pPr indent="0" marL="0">
+            <a:pPr marL="0" indent="0">
               <a:buNone/>
             </a:pPr>
             <a:r>
@@ -3682,7 +3463,7 @@
         </p:nvSpPr>
         <p:spPr>
           <a:xfrm>
-            <a:off x="7178040" y="5797296"/>
+            <a:off x="7178040" y="5619165"/>
             <a:ext cx="4236415" cy="182880"/>
           </a:xfrm>
           <a:prstGeom prst="rect">
@@ -3695,7 +3476,7 @@
           <a:bodyPr wrap="square" lIns="0" tIns="0" rIns="0" bIns="0" rtlCol="0" anchor="t"/>
           <a:lstStyle/>
           <a:p>
-            <a:pPr indent="0" marL="0">
+            <a:pPr marL="0" indent="0">
               <a:buNone/>
             </a:pPr>
             <a:r>
@@ -3730,7 +3511,7 @@
           </a:prstGeom>
           <a:extLst>
             <a:ext uri="{C572A759-6A51-4108-AA02-DFA0A04FC94B}">
-              <ma14:wrappingTextBoxFlag xmlns:ma14="http://schemas.microsoft.com/office/mac/drawingml/2011/main" val="0"/>
+              <ma14:wrappingTextBoxFlag xmlns:ma14="http://schemas.microsoft.com/office/mac/drawingml/2011/main" xmlns="" val="0"/>
             </a:ext>
           </a:extLst>
         </p:spPr>
@@ -3748,7 +3529,7 @@
           <a:p>
             <a:pPr algn="r"/>
             <a:fld id="{F7021451-1387-4CA6-816F-3879F97B5CBC}" type="slidenum">
-              <a:rPr b="0" lang="en-US"/>
+              <a:rPr lang="en-US" b="0"/>
               <a:t>11</a:t>
             </a:fld>
             <a:endParaRPr lang="en-US"/>
@@ -3783,9 +3564,11 @@
       <p:sp>
         <p:nvSpPr>
           <p:cNvPr id="2" name="Text 0"/>
-          <p:cNvSpPr/>
+          <p:cNvSpPr>
+            <a:spLocks noGrp="1"/>
+          </p:cNvSpPr>
           <p:nvPr>
-            <p:ph idx="100" type="title" hasCustomPrompt="1"/>
+            <p:ph type="title" idx="100" hasCustomPrompt="1"/>
           </p:nvPr>
         </p:nvSpPr>
         <p:spPr>
@@ -3803,7 +3586,7 @@
           <a:bodyPr wrap="square" lIns="0" tIns="0" rIns="0" bIns="0" rtlCol="0" anchor="ctr"/>
           <a:lstStyle/>
           <a:p>
-            <a:pPr algn="l" indent="0" marL="0">
+            <a:pPr marL="0" indent="0" algn="l">
               <a:buNone/>
             </a:pPr>
             <a:r>
@@ -3820,14 +3603,14 @@
       </p:sp>
       <p:pic>
         <p:nvPicPr>
-          <p:cNvPr id="3" name="Вкладка экспорта" descr="/tmp/claude-0/-home-user-invest-project-eval/cfb2f9eb-1ed1-598a-ae85-aefec36c7a96/scratchpad/shots/export.png">    </p:cNvPr>
+          <p:cNvPr id="3" name="Вкладка экспорта" descr="/tmp/claude-0/-home-user-invest-project-eval/cfb2f9eb-1ed1-598a-ae85-aefec36c7a96/scratchpad/shots/export.png"/>
           <p:cNvPicPr>
             <a:picLocks noChangeAspect="1"/>
           </p:cNvPicPr>
           <p:nvPr/>
         </p:nvPicPr>
         <p:blipFill>
-          <a:blip r:embed="rId1"/>
+          <a:blip r:embed="rId3"/>
           <a:stretch>
             <a:fillRect/>
           </a:stretch>
@@ -3841,7 +3624,7 @@
             <a:avLst/>
           </a:prstGeom>
           <a:effectLst>
-            <a:outerShdw sx="100000" sy="100000" kx="0" ky="0" algn="bl" rotWithShape="0" blurRad="76200" dist="25400" dir="2700000">
+            <a:outerShdw blurRad="76200" dist="25400" dir="2700000" algn="bl" rotWithShape="0">
               <a:srgbClr val="000000">
                 <a:alpha val="18000"/>
               </a:srgbClr>
@@ -3851,14 +3634,14 @@
       </p:pic>
       <p:pic>
         <p:nvPicPr>
-          <p:cNvPr id="4" name="Графики модели" descr="/tmp/claude-0/-home-user-invest-project-eval/cfb2f9eb-1ed1-598a-ae85-aefec36c7a96/scratchpad/shots/charts.png">    </p:cNvPr>
+          <p:cNvPr id="4" name="Графики модели" descr="/tmp/claude-0/-home-user-invest-project-eval/cfb2f9eb-1ed1-598a-ae85-aefec36c7a96/scratchpad/shots/charts.png"/>
           <p:cNvPicPr>
             <a:picLocks noChangeAspect="1"/>
           </p:cNvPicPr>
           <p:nvPr/>
         </p:nvPicPr>
         <p:blipFill>
-          <a:blip r:embed="rId2"/>
+          <a:blip r:embed="rId4"/>
           <a:stretch>
             <a:fillRect/>
           </a:stretch>
@@ -3872,7 +3655,7 @@
             <a:avLst/>
           </a:prstGeom>
           <a:effectLst>
-            <a:outerShdw sx="100000" sy="100000" kx="0" ky="0" algn="bl" rotWithShape="0" blurRad="76200" dist="25400" dir="2700000">
+            <a:outerShdw blurRad="76200" dist="25400" dir="2700000" algn="bl" rotWithShape="0">
               <a:srgbClr val="000000">
                 <a:alpha val="18000"/>
               </a:srgbClr>
@@ -3901,7 +3684,7 @@
           <a:bodyPr wrap="square" lIns="0" tIns="0" rIns="0" bIns="0" rtlCol="0" anchor="t"/>
           <a:lstStyle/>
           <a:p>
-            <a:pPr algn="ctr" indent="0" marL="0">
+            <a:pPr marL="0" indent="0" algn="ctr">
               <a:buNone/>
             </a:pPr>
             <a:r>
@@ -3942,6 +3725,13 @@
             <a:prstDash val="solid"/>
           </a:ln>
         </p:spPr>
+        <p:txBody>
+          <a:bodyPr/>
+          <a:lstStyle/>
+          <a:p>
+            <a:endParaRPr lang="ru-RU"/>
+          </a:p>
+        </p:txBody>
       </p:sp>
       <p:sp>
         <p:nvSpPr>
@@ -3951,7 +3741,7 @@
         </p:nvSpPr>
         <p:spPr>
           <a:xfrm>
-            <a:off x="7909560" y="1572768"/>
+            <a:off x="7909560" y="1388697"/>
             <a:ext cx="3504895" cy="502920"/>
           </a:xfrm>
           <a:prstGeom prst="rect">
@@ -3964,7 +3754,7 @@
           <a:bodyPr wrap="square" lIns="0" tIns="0" rIns="0" bIns="0" rtlCol="0" anchor="ctr"/>
           <a:lstStyle/>
           <a:p>
-            <a:pPr indent="0" marL="0">
+            <a:pPr marL="0" indent="0">
               <a:buNone/>
             </a:pPr>
             <a:r>
@@ -3987,7 +3777,7 @@
         </p:nvSpPr>
         <p:spPr>
           <a:xfrm>
-            <a:off x="7909560" y="2148840"/>
+            <a:off x="7909560" y="1875703"/>
             <a:ext cx="3504895" cy="182880"/>
           </a:xfrm>
           <a:prstGeom prst="rect">
@@ -4000,7 +3790,7 @@
           <a:bodyPr wrap="square" lIns="0" tIns="0" rIns="0" bIns="0" rtlCol="0" anchor="t"/>
           <a:lstStyle/>
           <a:p>
-            <a:pPr indent="0" marL="0">
+            <a:pPr marL="0" indent="0">
               <a:buNone/>
             </a:pPr>
             <a:r>
@@ -4041,6 +3831,13 @@
             <a:prstDash val="solid"/>
           </a:ln>
         </p:spPr>
+        <p:txBody>
+          <a:bodyPr/>
+          <a:lstStyle/>
+          <a:p>
+            <a:endParaRPr lang="ru-RU"/>
+          </a:p>
+        </p:txBody>
       </p:sp>
       <p:sp>
         <p:nvSpPr>
@@ -4050,7 +3847,7 @@
         </p:nvSpPr>
         <p:spPr>
           <a:xfrm>
-            <a:off x="7909560" y="2788920"/>
+            <a:off x="7909560" y="2604849"/>
             <a:ext cx="3504895" cy="502920"/>
           </a:xfrm>
           <a:prstGeom prst="rect">
@@ -4063,7 +3860,7 @@
           <a:bodyPr wrap="square" lIns="0" tIns="0" rIns="0" bIns="0" rtlCol="0" anchor="ctr"/>
           <a:lstStyle/>
           <a:p>
-            <a:pPr indent="0" marL="0">
+            <a:pPr marL="0" indent="0">
               <a:buNone/>
             </a:pPr>
             <a:r>
@@ -4086,7 +3883,7 @@
         </p:nvSpPr>
         <p:spPr>
           <a:xfrm>
-            <a:off x="7909560" y="3364992"/>
+            <a:off x="7909560" y="3091855"/>
             <a:ext cx="3504895" cy="182880"/>
           </a:xfrm>
           <a:prstGeom prst="rect">
@@ -4099,7 +3896,7 @@
           <a:bodyPr wrap="square" lIns="0" tIns="0" rIns="0" bIns="0" rtlCol="0" anchor="t"/>
           <a:lstStyle/>
           <a:p>
-            <a:pPr indent="0" marL="0">
+            <a:pPr marL="0" indent="0">
               <a:buNone/>
             </a:pPr>
             <a:r>
@@ -4140,6 +3937,13 @@
             <a:prstDash val="solid"/>
           </a:ln>
         </p:spPr>
+        <p:txBody>
+          <a:bodyPr/>
+          <a:lstStyle/>
+          <a:p>
+            <a:endParaRPr lang="ru-RU"/>
+          </a:p>
+        </p:txBody>
       </p:sp>
       <p:sp>
         <p:nvSpPr>
@@ -4149,7 +3953,7 @@
         </p:nvSpPr>
         <p:spPr>
           <a:xfrm>
-            <a:off x="7909560" y="4005072"/>
+            <a:off x="7909560" y="3821001"/>
             <a:ext cx="3504895" cy="502920"/>
           </a:xfrm>
           <a:prstGeom prst="rect">
@@ -4162,7 +3966,7 @@
           <a:bodyPr wrap="square" lIns="0" tIns="0" rIns="0" bIns="0" rtlCol="0" anchor="ctr"/>
           <a:lstStyle/>
           <a:p>
-            <a:pPr indent="0" marL="0">
+            <a:pPr marL="0" indent="0">
               <a:buNone/>
             </a:pPr>
             <a:r>
@@ -4185,7 +3989,7 @@
         </p:nvSpPr>
         <p:spPr>
           <a:xfrm>
-            <a:off x="7909560" y="4581144"/>
+            <a:off x="7909560" y="4308007"/>
             <a:ext cx="3504895" cy="182880"/>
           </a:xfrm>
           <a:prstGeom prst="rect">
@@ -4198,7 +4002,7 @@
           <a:bodyPr wrap="square" lIns="0" tIns="0" rIns="0" bIns="0" rtlCol="0" anchor="t"/>
           <a:lstStyle/>
           <a:p>
-            <a:pPr indent="0" marL="0">
+            <a:pPr marL="0" indent="0">
               <a:buNone/>
             </a:pPr>
             <a:r>
@@ -4239,6 +4043,13 @@
             <a:prstDash val="solid"/>
           </a:ln>
         </p:spPr>
+        <p:txBody>
+          <a:bodyPr/>
+          <a:lstStyle/>
+          <a:p>
+            <a:endParaRPr lang="ru-RU"/>
+          </a:p>
+        </p:txBody>
       </p:sp>
       <p:sp>
         <p:nvSpPr>
@@ -4248,7 +4059,7 @@
         </p:nvSpPr>
         <p:spPr>
           <a:xfrm>
-            <a:off x="7909560" y="5221224"/>
+            <a:off x="7909560" y="5037153"/>
             <a:ext cx="3504895" cy="502920"/>
           </a:xfrm>
           <a:prstGeom prst="rect">
@@ -4261,7 +4072,7 @@
           <a:bodyPr wrap="square" lIns="0" tIns="0" rIns="0" bIns="0" rtlCol="0" anchor="ctr"/>
           <a:lstStyle/>
           <a:p>
-            <a:pPr indent="0" marL="0">
+            <a:pPr marL="0" indent="0">
               <a:buNone/>
             </a:pPr>
             <a:r>
@@ -4284,7 +4095,7 @@
         </p:nvSpPr>
         <p:spPr>
           <a:xfrm>
-            <a:off x="7909560" y="5797296"/>
+            <a:off x="7909560" y="5524159"/>
             <a:ext cx="3504895" cy="182880"/>
           </a:xfrm>
           <a:prstGeom prst="rect">
@@ -4297,7 +4108,7 @@
           <a:bodyPr wrap="square" lIns="0" tIns="0" rIns="0" bIns="0" rtlCol="0" anchor="t"/>
           <a:lstStyle/>
           <a:p>
-            <a:pPr indent="0" marL="0">
+            <a:pPr marL="0" indent="0">
               <a:buNone/>
             </a:pPr>
             <a:r>
@@ -4332,7 +4143,7 @@
           </a:prstGeom>
           <a:extLst>
             <a:ext uri="{C572A759-6A51-4108-AA02-DFA0A04FC94B}">
-              <ma14:wrappingTextBoxFlag xmlns:ma14="http://schemas.microsoft.com/office/mac/drawingml/2011/main" val="0"/>
+              <ma14:wrappingTextBoxFlag xmlns:ma14="http://schemas.microsoft.com/office/mac/drawingml/2011/main" xmlns="" val="0"/>
             </a:ext>
           </a:extLst>
         </p:spPr>
@@ -4350,7 +4161,7 @@
           <a:p>
             <a:pPr algn="r"/>
             <a:fld id="{F7021451-1387-4CA6-816F-3879F97B5CBC}" type="slidenum">
-              <a:rPr b="0" lang="en-US"/>
+              <a:rPr lang="en-US" b="0"/>
               <a:t>12</a:t>
             </a:fld>
             <a:endParaRPr lang="en-US"/>
@@ -4385,9 +4196,11 @@
       <p:sp>
         <p:nvSpPr>
           <p:cNvPr id="2" name="Text 0"/>
-          <p:cNvSpPr/>
+          <p:cNvSpPr>
+            <a:spLocks noGrp="1"/>
+          </p:cNvSpPr>
           <p:nvPr>
-            <p:ph idx="100" type="title" hasCustomPrompt="1"/>
+            <p:ph type="title" idx="100" hasCustomPrompt="1"/>
           </p:nvPr>
         </p:nvSpPr>
         <p:spPr>
@@ -4405,7 +4218,7 @@
           <a:bodyPr wrap="square" lIns="0" tIns="0" rIns="0" bIns="0" rtlCol="0" anchor="ctr"/>
           <a:lstStyle/>
           <a:p>
-            <a:pPr algn="l" indent="0" marL="0">
+            <a:pPr marL="0" indent="0" algn="l">
               <a:buNone/>
             </a:pPr>
             <a:r>
@@ -4446,6 +4259,13 @@
             <a:prstDash val="solid"/>
           </a:ln>
         </p:spPr>
+        <p:txBody>
+          <a:bodyPr/>
+          <a:lstStyle/>
+          <a:p>
+            <a:endParaRPr lang="ru-RU"/>
+          </a:p>
+        </p:txBody>
       </p:sp>
       <p:sp>
         <p:nvSpPr>
@@ -4468,7 +4288,7 @@
           <a:bodyPr wrap="square" lIns="0" tIns="0" rIns="0" bIns="0" rtlCol="0" anchor="ctr"/>
           <a:lstStyle/>
           <a:p>
-            <a:pPr indent="0" marL="0">
+            <a:pPr marL="0" indent="0">
               <a:buNone/>
             </a:pPr>
             <a:r>
@@ -4504,7 +4324,7 @@
           <a:bodyPr wrap="square" lIns="0" tIns="0" rIns="0" bIns="0" rtlCol="0" anchor="t"/>
           <a:lstStyle/>
           <a:p>
-            <a:pPr indent="0" marL="0">
+            <a:pPr marL="0" indent="0">
               <a:buNone/>
             </a:pPr>
             <a:r>
@@ -4545,6 +4365,13 @@
             <a:prstDash val="solid"/>
           </a:ln>
         </p:spPr>
+        <p:txBody>
+          <a:bodyPr/>
+          <a:lstStyle/>
+          <a:p>
+            <a:endParaRPr lang="ru-RU"/>
+          </a:p>
+        </p:txBody>
       </p:sp>
       <p:sp>
         <p:nvSpPr>
@@ -4567,7 +4394,7 @@
           <a:bodyPr wrap="square" lIns="0" tIns="0" rIns="0" bIns="0" rtlCol="0" anchor="ctr"/>
           <a:lstStyle/>
           <a:p>
-            <a:pPr indent="0" marL="0">
+            <a:pPr marL="0" indent="0">
               <a:buNone/>
             </a:pPr>
             <a:r>
@@ -4603,7 +4430,7 @@
           <a:bodyPr wrap="square" lIns="0" tIns="0" rIns="0" bIns="0" rtlCol="0" anchor="t"/>
           <a:lstStyle/>
           <a:p>
-            <a:pPr indent="0" marL="0">
+            <a:pPr marL="0" indent="0">
               <a:buNone/>
             </a:pPr>
             <a:r>
@@ -4644,6 +4471,13 @@
             <a:prstDash val="solid"/>
           </a:ln>
         </p:spPr>
+        <p:txBody>
+          <a:bodyPr/>
+          <a:lstStyle/>
+          <a:p>
+            <a:endParaRPr lang="ru-RU"/>
+          </a:p>
+        </p:txBody>
       </p:sp>
       <p:sp>
         <p:nvSpPr>
@@ -4666,7 +4500,7 @@
           <a:bodyPr wrap="square" lIns="0" tIns="0" rIns="0" bIns="0" rtlCol="0" anchor="ctr"/>
           <a:lstStyle/>
           <a:p>
-            <a:pPr indent="0" marL="0">
+            <a:pPr marL="0" indent="0">
               <a:buNone/>
             </a:pPr>
             <a:r>
@@ -4702,7 +4536,7 @@
           <a:bodyPr wrap="square" lIns="0" tIns="0" rIns="0" bIns="0" rtlCol="0" anchor="t"/>
           <a:lstStyle/>
           <a:p>
-            <a:pPr indent="0" marL="0">
+            <a:pPr marL="0" indent="0">
               <a:buNone/>
             </a:pPr>
             <a:r>
@@ -4743,6 +4577,13 @@
             <a:prstDash val="solid"/>
           </a:ln>
         </p:spPr>
+        <p:txBody>
+          <a:bodyPr/>
+          <a:lstStyle/>
+          <a:p>
+            <a:endParaRPr lang="ru-RU"/>
+          </a:p>
+        </p:txBody>
       </p:sp>
       <p:sp>
         <p:nvSpPr>
@@ -4765,7 +4606,7 @@
           <a:bodyPr wrap="square" lIns="0" tIns="0" rIns="0" bIns="0" rtlCol="0" anchor="ctr"/>
           <a:lstStyle/>
           <a:p>
-            <a:pPr indent="0" marL="0">
+            <a:pPr marL="0" indent="0">
               <a:buNone/>
             </a:pPr>
             <a:r>
@@ -4801,7 +4642,7 @@
           <a:bodyPr wrap="square" lIns="0" tIns="0" rIns="0" bIns="0" rtlCol="0" anchor="t"/>
           <a:lstStyle/>
           <a:p>
-            <a:pPr indent="0" marL="0">
+            <a:pPr marL="0" indent="0">
               <a:buNone/>
             </a:pPr>
             <a:r>
@@ -4824,7 +4665,7 @@
         </p:nvSpPr>
         <p:spPr>
           <a:xfrm>
-            <a:off x="548640" y="5989320"/>
+            <a:off x="548640" y="6301641"/>
             <a:ext cx="11094415" cy="274320"/>
           </a:xfrm>
           <a:prstGeom prst="rect">
@@ -4837,7 +4678,7 @@
           <a:bodyPr wrap="square" lIns="0" tIns="0" rIns="0" bIns="0" rtlCol="0" anchor="t"/>
           <a:lstStyle/>
           <a:p>
-            <a:pPr indent="0" marL="0">
+            <a:pPr marL="0" indent="0">
               <a:buNone/>
             </a:pPr>
             <a:r>
@@ -4872,7 +4713,7 @@
           </a:prstGeom>
           <a:extLst>
             <a:ext uri="{C572A759-6A51-4108-AA02-DFA0A04FC94B}">
-              <ma14:wrappingTextBoxFlag xmlns:ma14="http://schemas.microsoft.com/office/mac/drawingml/2011/main" val="0"/>
+              <ma14:wrappingTextBoxFlag xmlns:ma14="http://schemas.microsoft.com/office/mac/drawingml/2011/main" xmlns="" val="0"/>
             </a:ext>
           </a:extLst>
         </p:spPr>
@@ -4890,7 +4731,7 @@
           <a:p>
             <a:pPr algn="r"/>
             <a:fld id="{F7021451-1387-4CA6-816F-3879F97B5CBC}" type="slidenum">
-              <a:rPr b="0" lang="en-US"/>
+              <a:rPr lang="en-US" b="0"/>
               <a:t>13</a:t>
             </a:fld>
             <a:endParaRPr lang="en-US"/>
@@ -4925,9 +4766,11 @@
       <p:sp>
         <p:nvSpPr>
           <p:cNvPr id="2" name="Text 0"/>
-          <p:cNvSpPr/>
+          <p:cNvSpPr>
+            <a:spLocks noGrp="1"/>
+          </p:cNvSpPr>
           <p:nvPr>
-            <p:ph idx="100" type="title" hasCustomPrompt="1"/>
+            <p:ph type="title" idx="100" hasCustomPrompt="1"/>
           </p:nvPr>
         </p:nvSpPr>
         <p:spPr>
@@ -4945,7 +4788,7 @@
           <a:bodyPr wrap="square" lIns="0" tIns="0" rIns="0" bIns="0" rtlCol="0" anchor="ctr"/>
           <a:lstStyle/>
           <a:p>
-            <a:pPr algn="l" indent="0" marL="0">
+            <a:pPr marL="0" indent="0" algn="l">
               <a:buNone/>
             </a:pPr>
             <a:r>
@@ -4986,6 +4829,13 @@
             <a:prstDash val="solid"/>
           </a:ln>
         </p:spPr>
+        <p:txBody>
+          <a:bodyPr/>
+          <a:lstStyle/>
+          <a:p>
+            <a:endParaRPr lang="ru-RU"/>
+          </a:p>
+        </p:txBody>
       </p:sp>
       <p:sp>
         <p:nvSpPr>
@@ -5008,7 +4858,7 @@
           <a:bodyPr wrap="square" lIns="0" tIns="0" rIns="0" bIns="0" rtlCol="0" anchor="ctr"/>
           <a:lstStyle/>
           <a:p>
-            <a:pPr indent="0" marL="0">
+            <a:pPr marL="0" indent="0">
               <a:buNone/>
             </a:pPr>
             <a:r>
@@ -5044,7 +4894,7 @@
           <a:bodyPr wrap="square" lIns="0" tIns="0" rIns="0" bIns="0" rtlCol="0" anchor="t"/>
           <a:lstStyle/>
           <a:p>
-            <a:pPr indent="0" marL="0">
+            <a:pPr marL="0" indent="0">
               <a:buNone/>
             </a:pPr>
             <a:r>
@@ -5085,6 +4935,13 @@
             <a:prstDash val="solid"/>
           </a:ln>
         </p:spPr>
+        <p:txBody>
+          <a:bodyPr/>
+          <a:lstStyle/>
+          <a:p>
+            <a:endParaRPr lang="ru-RU"/>
+          </a:p>
+        </p:txBody>
       </p:sp>
       <p:sp>
         <p:nvSpPr>
@@ -5107,7 +4964,7 @@
           <a:bodyPr wrap="square" lIns="0" tIns="0" rIns="0" bIns="0" rtlCol="0" anchor="ctr"/>
           <a:lstStyle/>
           <a:p>
-            <a:pPr indent="0" marL="0">
+            <a:pPr marL="0" indent="0">
               <a:buNone/>
             </a:pPr>
             <a:r>
@@ -5143,7 +5000,7 @@
           <a:bodyPr wrap="square" lIns="0" tIns="0" rIns="0" bIns="0" rtlCol="0" anchor="t"/>
           <a:lstStyle/>
           <a:p>
-            <a:pPr indent="0" marL="0">
+            <a:pPr marL="0" indent="0">
               <a:buNone/>
             </a:pPr>
             <a:r>
@@ -5184,6 +5041,13 @@
             <a:prstDash val="solid"/>
           </a:ln>
         </p:spPr>
+        <p:txBody>
+          <a:bodyPr/>
+          <a:lstStyle/>
+          <a:p>
+            <a:endParaRPr lang="ru-RU"/>
+          </a:p>
+        </p:txBody>
       </p:sp>
       <p:sp>
         <p:nvSpPr>
@@ -5206,7 +5070,7 @@
           <a:bodyPr wrap="square" lIns="0" tIns="0" rIns="0" bIns="0" rtlCol="0" anchor="ctr"/>
           <a:lstStyle/>
           <a:p>
-            <a:pPr indent="0" marL="0">
+            <a:pPr marL="0" indent="0">
               <a:buNone/>
             </a:pPr>
             <a:r>
@@ -5242,7 +5106,7 @@
           <a:bodyPr wrap="square" lIns="0" tIns="0" rIns="0" bIns="0" rtlCol="0" anchor="t"/>
           <a:lstStyle/>
           <a:p>
-            <a:pPr indent="0" marL="0">
+            <a:pPr marL="0" indent="0">
               <a:buNone/>
             </a:pPr>
             <a:r>
@@ -5283,6 +5147,13 @@
             <a:prstDash val="solid"/>
           </a:ln>
         </p:spPr>
+        <p:txBody>
+          <a:bodyPr/>
+          <a:lstStyle/>
+          <a:p>
+            <a:endParaRPr lang="ru-RU"/>
+          </a:p>
+        </p:txBody>
       </p:sp>
       <p:sp>
         <p:nvSpPr>
@@ -5305,7 +5176,7 @@
           <a:bodyPr wrap="square" lIns="0" tIns="0" rIns="0" bIns="0" rtlCol="0" anchor="ctr"/>
           <a:lstStyle/>
           <a:p>
-            <a:pPr indent="0" marL="0">
+            <a:pPr marL="0" indent="0">
               <a:buNone/>
             </a:pPr>
             <a:r>
@@ -5341,7 +5212,7 @@
           <a:bodyPr wrap="square" lIns="0" tIns="0" rIns="0" bIns="0" rtlCol="0" anchor="t"/>
           <a:lstStyle/>
           <a:p>
-            <a:pPr indent="0" marL="0">
+            <a:pPr marL="0" indent="0">
               <a:buNone/>
             </a:pPr>
             <a:r>
@@ -5376,7 +5247,7 @@
           </a:prstGeom>
           <a:extLst>
             <a:ext uri="{C572A759-6A51-4108-AA02-DFA0A04FC94B}">
-              <ma14:wrappingTextBoxFlag xmlns:ma14="http://schemas.microsoft.com/office/mac/drawingml/2011/main" val="0"/>
+              <ma14:wrappingTextBoxFlag xmlns:ma14="http://schemas.microsoft.com/office/mac/drawingml/2011/main" xmlns="" val="0"/>
             </a:ext>
           </a:extLst>
         </p:spPr>
@@ -5394,7 +5265,7 @@
           <a:p>
             <a:pPr algn="r"/>
             <a:fld id="{F7021451-1387-4CA6-816F-3879F97B5CBC}" type="slidenum">
-              <a:rPr b="0" lang="en-US"/>
+              <a:rPr lang="en-US" b="0"/>
               <a:t>14</a:t>
             </a:fld>
             <a:endParaRPr lang="en-US"/>
@@ -5429,9 +5300,11 @@
       <p:sp>
         <p:nvSpPr>
           <p:cNvPr id="2" name="Text 0"/>
-          <p:cNvSpPr/>
+          <p:cNvSpPr>
+            <a:spLocks noGrp="1"/>
+          </p:cNvSpPr>
           <p:nvPr>
-            <p:ph idx="100" type="title" hasCustomPrompt="1"/>
+            <p:ph type="title" idx="100" hasCustomPrompt="1"/>
           </p:nvPr>
         </p:nvSpPr>
         <p:spPr>
@@ -5449,7 +5322,7 @@
           <a:bodyPr wrap="square" lIns="0" tIns="0" rIns="0" bIns="0" rtlCol="0" anchor="ctr"/>
           <a:lstStyle/>
           <a:p>
-            <a:pPr algn="l" indent="0" marL="0">
+            <a:pPr marL="0" indent="0" algn="l">
               <a:buNone/>
             </a:pPr>
             <a:r>
@@ -5490,6 +5363,13 @@
             <a:prstDash val="solid"/>
           </a:ln>
         </p:spPr>
+        <p:txBody>
+          <a:bodyPr/>
+          <a:lstStyle/>
+          <a:p>
+            <a:endParaRPr lang="ru-RU"/>
+          </a:p>
+        </p:txBody>
       </p:sp>
       <p:sp>
         <p:nvSpPr>
@@ -5512,7 +5392,7 @@
           <a:bodyPr wrap="square" lIns="0" tIns="0" rIns="0" bIns="0" rtlCol="0" anchor="ctr"/>
           <a:lstStyle/>
           <a:p>
-            <a:pPr indent="0" marL="0">
+            <a:pPr marL="0" indent="0">
               <a:buNone/>
             </a:pPr>
             <a:r>
@@ -5548,7 +5428,7 @@
           <a:bodyPr wrap="square" lIns="0" tIns="0" rIns="0" bIns="0" rtlCol="0" anchor="t"/>
           <a:lstStyle/>
           <a:p>
-            <a:pPr indent="0" marL="0">
+            <a:pPr marL="0" indent="0">
               <a:buNone/>
             </a:pPr>
             <a:r>
@@ -5584,7 +5464,7 @@
           <a:bodyPr wrap="square" lIns="0" tIns="0" rIns="0" bIns="0" rtlCol="0" anchor="t"/>
           <a:lstStyle/>
           <a:p>
-            <a:pPr indent="0" marL="0">
+            <a:pPr marL="0" indent="0">
               <a:buNone/>
             </a:pPr>
             <a:r>
@@ -5625,6 +5505,13 @@
             <a:prstDash val="solid"/>
           </a:ln>
         </p:spPr>
+        <p:txBody>
+          <a:bodyPr/>
+          <a:lstStyle/>
+          <a:p>
+            <a:endParaRPr lang="ru-RU"/>
+          </a:p>
+        </p:txBody>
       </p:sp>
       <p:sp>
         <p:nvSpPr>
@@ -5647,7 +5534,7 @@
           <a:bodyPr wrap="square" lIns="0" tIns="0" rIns="0" bIns="0" rtlCol="0" anchor="ctr"/>
           <a:lstStyle/>
           <a:p>
-            <a:pPr indent="0" marL="0">
+            <a:pPr marL="0" indent="0">
               <a:buNone/>
             </a:pPr>
             <a:r>
@@ -5683,7 +5570,7 @@
           <a:bodyPr wrap="square" lIns="0" tIns="0" rIns="0" bIns="0" rtlCol="0" anchor="t"/>
           <a:lstStyle/>
           <a:p>
-            <a:pPr indent="0" marL="0">
+            <a:pPr marL="0" indent="0">
               <a:buNone/>
             </a:pPr>
             <a:r>
@@ -5719,7 +5606,7 @@
           <a:bodyPr wrap="square" lIns="0" tIns="0" rIns="0" bIns="0" rtlCol="0" anchor="t"/>
           <a:lstStyle/>
           <a:p>
-            <a:pPr indent="0" marL="0">
+            <a:pPr marL="0" indent="0">
               <a:buNone/>
             </a:pPr>
             <a:r>
@@ -5760,6 +5647,13 @@
             <a:prstDash val="solid"/>
           </a:ln>
         </p:spPr>
+        <p:txBody>
+          <a:bodyPr/>
+          <a:lstStyle/>
+          <a:p>
+            <a:endParaRPr lang="ru-RU"/>
+          </a:p>
+        </p:txBody>
       </p:sp>
       <p:sp>
         <p:nvSpPr>
@@ -5782,7 +5676,7 @@
           <a:bodyPr wrap="square" lIns="0" tIns="0" rIns="0" bIns="0" rtlCol="0" anchor="ctr"/>
           <a:lstStyle/>
           <a:p>
-            <a:pPr indent="0" marL="0">
+            <a:pPr marL="0" indent="0">
               <a:buNone/>
             </a:pPr>
             <a:r>
@@ -5818,7 +5712,7 @@
           <a:bodyPr wrap="square" lIns="0" tIns="0" rIns="0" bIns="0" rtlCol="0" anchor="t"/>
           <a:lstStyle/>
           <a:p>
-            <a:pPr indent="0" marL="0">
+            <a:pPr marL="0" indent="0">
               <a:buNone/>
             </a:pPr>
             <a:r>
@@ -5854,7 +5748,7 @@
           <a:bodyPr wrap="square" lIns="0" tIns="0" rIns="0" bIns="0" rtlCol="0" anchor="t"/>
           <a:lstStyle/>
           <a:p>
-            <a:pPr indent="0" marL="0">
+            <a:pPr marL="0" indent="0">
               <a:buNone/>
             </a:pPr>
             <a:r>
@@ -5895,6 +5789,13 @@
             <a:prstDash val="solid"/>
           </a:ln>
         </p:spPr>
+        <p:txBody>
+          <a:bodyPr/>
+          <a:lstStyle/>
+          <a:p>
+            <a:endParaRPr lang="ru-RU"/>
+          </a:p>
+        </p:txBody>
       </p:sp>
       <p:sp>
         <p:nvSpPr>
@@ -5917,7 +5818,7 @@
           <a:bodyPr wrap="square" lIns="0" tIns="0" rIns="0" bIns="0" rtlCol="0" anchor="ctr"/>
           <a:lstStyle/>
           <a:p>
-            <a:pPr indent="0" marL="0">
+            <a:pPr marL="0" indent="0">
               <a:buNone/>
             </a:pPr>
             <a:r>
@@ -5953,7 +5854,7 @@
           <a:bodyPr wrap="square" lIns="0" tIns="0" rIns="0" bIns="0" rtlCol="0" anchor="t"/>
           <a:lstStyle/>
           <a:p>
-            <a:pPr indent="0" marL="0">
+            <a:pPr marL="0" indent="0">
               <a:buNone/>
             </a:pPr>
             <a:r>
@@ -5989,7 +5890,7 @@
           <a:bodyPr wrap="square" lIns="0" tIns="0" rIns="0" bIns="0" rtlCol="0" anchor="t"/>
           <a:lstStyle/>
           <a:p>
-            <a:pPr indent="0" marL="0">
+            <a:pPr marL="0" indent="0">
               <a:buNone/>
             </a:pPr>
             <a:r>
@@ -6025,7 +5926,7 @@
           <a:bodyPr wrap="square" lIns="0" tIns="0" rIns="0" bIns="0" rtlCol="0" anchor="t"/>
           <a:lstStyle/>
           <a:p>
-            <a:pPr indent="0" marL="0">
+            <a:pPr marL="0" indent="0">
               <a:buNone/>
             </a:pPr>
             <a:r>
@@ -6060,7 +5961,7 @@
           </a:prstGeom>
           <a:extLst>
             <a:ext uri="{C572A759-6A51-4108-AA02-DFA0A04FC94B}">
-              <ma14:wrappingTextBoxFlag xmlns:ma14="http://schemas.microsoft.com/office/mac/drawingml/2011/main" val="0"/>
+              <ma14:wrappingTextBoxFlag xmlns:ma14="http://schemas.microsoft.com/office/mac/drawingml/2011/main" xmlns="" val="0"/>
             </a:ext>
           </a:extLst>
         </p:spPr>
@@ -6078,7 +5979,7 @@
           <a:p>
             <a:pPr algn="r"/>
             <a:fld id="{F7021451-1387-4CA6-816F-3879F97B5CBC}" type="slidenum">
-              <a:rPr b="0" lang="en-US"/>
+              <a:rPr lang="en-US" b="0"/>
               <a:t>15</a:t>
             </a:fld>
             <a:endParaRPr lang="en-US"/>
@@ -6113,9 +6014,11 @@
       <p:sp>
         <p:nvSpPr>
           <p:cNvPr id="2" name="Text 0"/>
-          <p:cNvSpPr/>
+          <p:cNvSpPr>
+            <a:spLocks noGrp="1"/>
+          </p:cNvSpPr>
           <p:nvPr>
-            <p:ph idx="100" type="title" hasCustomPrompt="1"/>
+            <p:ph type="title" idx="100" hasCustomPrompt="1"/>
           </p:nvPr>
         </p:nvSpPr>
         <p:spPr>
@@ -6133,7 +6036,7 @@
           <a:bodyPr wrap="square" lIns="0" tIns="0" rIns="0" bIns="0" rtlCol="0" anchor="ctr"/>
           <a:lstStyle/>
           <a:p>
-            <a:pPr algn="l" indent="0" marL="0">
+            <a:pPr marL="0" indent="0" algn="l">
               <a:buNone/>
             </a:pPr>
             <a:r>
@@ -6172,6 +6075,13 @@
             <a:prstDash val="solid"/>
           </a:ln>
         </p:spPr>
+        <p:txBody>
+          <a:bodyPr/>
+          <a:lstStyle/>
+          <a:p>
+            <a:endParaRPr lang="ru-RU"/>
+          </a:p>
+        </p:txBody>
       </p:sp>
       <p:sp>
         <p:nvSpPr>
@@ -6194,7 +6104,7 @@
           <a:bodyPr wrap="square" lIns="0" tIns="0" rIns="0" bIns="0" rtlCol="0" anchor="ctr"/>
           <a:lstStyle/>
           <a:p>
-            <a:pPr algn="ctr" indent="0" marL="0">
+            <a:pPr marL="0" indent="0" algn="ctr">
               <a:buNone/>
             </a:pPr>
             <a:r>
@@ -6230,7 +6140,7 @@
           <a:bodyPr wrap="square" lIns="0" tIns="0" rIns="0" bIns="0" rtlCol="0" anchor="t"/>
           <a:lstStyle/>
           <a:p>
-            <a:pPr indent="0" marL="0">
+            <a:pPr marL="0" indent="0">
               <a:buNone/>
             </a:pPr>
             <a:r>
@@ -6266,7 +6176,7 @@
           <a:bodyPr wrap="square" lIns="0" tIns="0" rIns="0" bIns="0" rtlCol="0" anchor="t"/>
           <a:lstStyle/>
           <a:p>
-            <a:pPr indent="0" marL="0">
+            <a:pPr marL="0" indent="0">
               <a:buNone/>
             </a:pPr>
             <a:r>
@@ -6305,6 +6215,13 @@
             <a:prstDash val="solid"/>
           </a:ln>
         </p:spPr>
+        <p:txBody>
+          <a:bodyPr/>
+          <a:lstStyle/>
+          <a:p>
+            <a:endParaRPr lang="ru-RU"/>
+          </a:p>
+        </p:txBody>
       </p:sp>
       <p:sp>
         <p:nvSpPr>
@@ -6327,7 +6244,7 @@
           <a:bodyPr wrap="square" lIns="0" tIns="0" rIns="0" bIns="0" rtlCol="0" anchor="ctr"/>
           <a:lstStyle/>
           <a:p>
-            <a:pPr algn="ctr" indent="0" marL="0">
+            <a:pPr marL="0" indent="0" algn="ctr">
               <a:buNone/>
             </a:pPr>
             <a:r>
@@ -6363,7 +6280,7 @@
           <a:bodyPr wrap="square" lIns="0" tIns="0" rIns="0" bIns="0" rtlCol="0" anchor="t"/>
           <a:lstStyle/>
           <a:p>
-            <a:pPr indent="0" marL="0">
+            <a:pPr marL="0" indent="0">
               <a:buNone/>
             </a:pPr>
             <a:r>
@@ -6399,7 +6316,7 @@
           <a:bodyPr wrap="square" lIns="0" tIns="0" rIns="0" bIns="0" rtlCol="0" anchor="t"/>
           <a:lstStyle/>
           <a:p>
-            <a:pPr indent="0" marL="0">
+            <a:pPr marL="0" indent="0">
               <a:buNone/>
             </a:pPr>
             <a:r>
@@ -6438,6 +6355,13 @@
             <a:prstDash val="solid"/>
           </a:ln>
         </p:spPr>
+        <p:txBody>
+          <a:bodyPr/>
+          <a:lstStyle/>
+          <a:p>
+            <a:endParaRPr lang="ru-RU"/>
+          </a:p>
+        </p:txBody>
       </p:sp>
       <p:sp>
         <p:nvSpPr>
@@ -6460,7 +6384,7 @@
           <a:bodyPr wrap="square" lIns="0" tIns="0" rIns="0" bIns="0" rtlCol="0" anchor="ctr"/>
           <a:lstStyle/>
           <a:p>
-            <a:pPr algn="ctr" indent="0" marL="0">
+            <a:pPr marL="0" indent="0" algn="ctr">
               <a:buNone/>
             </a:pPr>
             <a:r>
@@ -6496,7 +6420,7 @@
           <a:bodyPr wrap="square" lIns="0" tIns="0" rIns="0" bIns="0" rtlCol="0" anchor="t"/>
           <a:lstStyle/>
           <a:p>
-            <a:pPr indent="0" marL="0">
+            <a:pPr marL="0" indent="0">
               <a:buNone/>
             </a:pPr>
             <a:r>
@@ -6532,7 +6456,7 @@
           <a:bodyPr wrap="square" lIns="0" tIns="0" rIns="0" bIns="0" rtlCol="0" anchor="t"/>
           <a:lstStyle/>
           <a:p>
-            <a:pPr indent="0" marL="0">
+            <a:pPr marL="0" indent="0">
               <a:buNone/>
             </a:pPr>
             <a:r>
@@ -6568,7 +6492,7 @@
           <a:bodyPr wrap="square" lIns="0" tIns="0" rIns="0" bIns="0" rtlCol="0" anchor="t"/>
           <a:lstStyle/>
           <a:p>
-            <a:pPr indent="0" marL="0">
+            <a:pPr marL="0" indent="0">
               <a:buNone/>
             </a:pPr>
             <a:r>
@@ -6604,7 +6528,7 @@
           <a:bodyPr wrap="square" lIns="0" tIns="0" rIns="0" bIns="0" rtlCol="0" anchor="t"/>
           <a:lstStyle/>
           <a:p>
-            <a:pPr indent="0" marL="0">
+            <a:pPr marL="0" indent="0">
               <a:buNone/>
             </a:pPr>
             <a:r>
@@ -6645,17 +6569,24 @@
             <a:prstDash val="solid"/>
           </a:ln>
         </p:spPr>
+        <p:txBody>
+          <a:bodyPr/>
+          <a:lstStyle/>
+          <a:p>
+            <a:endParaRPr lang="ru-RU"/>
+          </a:p>
+        </p:txBody>
       </p:sp>
       <p:pic>
         <p:nvPicPr>
-          <p:cNvPr id="18" name="QR-код сайта" descr="/tmp/ipe-qr.png">    </p:cNvPr>
+          <p:cNvPr id="18" name="QR-код сайта" descr="/tmp/ipe-qr.png"/>
           <p:cNvPicPr>
             <a:picLocks noChangeAspect="1"/>
           </p:cNvPicPr>
           <p:nvPr/>
         </p:nvPicPr>
         <p:blipFill>
-          <a:blip r:embed="rId1"/>
+          <a:blip r:embed="rId3"/>
           <a:stretch>
             <a:fillRect/>
           </a:stretch>
@@ -6691,7 +6622,7 @@
           <a:bodyPr wrap="square" lIns="0" tIns="0" rIns="0" bIns="0" rtlCol="0" anchor="t"/>
           <a:lstStyle/>
           <a:p>
-            <a:pPr algn="ctr" indent="0" marL="0">
+            <a:pPr marL="0" indent="0" algn="ctr">
               <a:buNone/>
             </a:pPr>
             <a:r>
@@ -6727,7 +6658,7 @@
           <a:bodyPr wrap="square" lIns="0" tIns="0" rIns="0" bIns="0" rtlCol="0" anchor="t"/>
           <a:lstStyle/>
           <a:p>
-            <a:pPr algn="ctr" indent="0" marL="0">
+            <a:pPr marL="0" indent="0" algn="ctr">
               <a:buNone/>
             </a:pPr>
             <a:r>
@@ -6762,7 +6693,7 @@
           </a:prstGeom>
           <a:extLst>
             <a:ext uri="{C572A759-6A51-4108-AA02-DFA0A04FC94B}">
-              <ma14:wrappingTextBoxFlag xmlns:ma14="http://schemas.microsoft.com/office/mac/drawingml/2011/main" val="0"/>
+              <ma14:wrappingTextBoxFlag xmlns:ma14="http://schemas.microsoft.com/office/mac/drawingml/2011/main" xmlns="" val="0"/>
             </a:ext>
           </a:extLst>
         </p:spPr>
@@ -6780,7 +6711,7 @@
           <a:p>
             <a:pPr algn="r"/>
             <a:fld id="{F7021451-1387-4CA6-816F-3879F97B5CBC}" type="slidenum">
-              <a:rPr b="0" lang="en-US"/>
+              <a:rPr lang="en-US" b="0"/>
               <a:t>16</a:t>
             </a:fld>
             <a:endParaRPr lang="en-US"/>
@@ -6815,9 +6746,11 @@
       <p:sp>
         <p:nvSpPr>
           <p:cNvPr id="2" name="Text 0"/>
-          <p:cNvSpPr/>
+          <p:cNvSpPr>
+            <a:spLocks noGrp="1"/>
+          </p:cNvSpPr>
           <p:nvPr>
-            <p:ph idx="100" type="title" hasCustomPrompt="1"/>
+            <p:ph type="title" idx="100" hasCustomPrompt="1"/>
           </p:nvPr>
         </p:nvSpPr>
         <p:spPr>
@@ -6835,7 +6768,7 @@
           <a:bodyPr wrap="square" lIns="0" tIns="0" rIns="0" bIns="0" rtlCol="0" anchor="ctr"/>
           <a:lstStyle/>
           <a:p>
-            <a:pPr algn="l" indent="0" marL="0">
+            <a:pPr marL="0" indent="0" algn="l">
               <a:buNone/>
             </a:pPr>
             <a:r>
@@ -6871,7 +6804,7 @@
           <a:bodyPr wrap="square" lIns="0" tIns="0" rIns="0" bIns="0" rtlCol="0" anchor="t"/>
           <a:lstStyle/>
           <a:p>
-            <a:pPr indent="0" marL="0">
+            <a:pPr marL="0" indent="0">
               <a:buNone/>
             </a:pPr>
             <a:r>
@@ -6912,6 +6845,13 @@
             <a:prstDash val="solid"/>
           </a:ln>
         </p:spPr>
+        <p:txBody>
+          <a:bodyPr/>
+          <a:lstStyle/>
+          <a:p>
+            <a:endParaRPr lang="ru-RU"/>
+          </a:p>
+        </p:txBody>
       </p:sp>
       <p:sp>
         <p:nvSpPr>
@@ -6934,7 +6874,7 @@
           <a:bodyPr wrap="square" lIns="0" tIns="0" rIns="0" bIns="0" rtlCol="0" anchor="ctr"/>
           <a:lstStyle/>
           <a:p>
-            <a:pPr indent="0" marL="0">
+            <a:pPr marL="0" indent="0">
               <a:buNone/>
             </a:pPr>
             <a:r>
@@ -6970,7 +6910,7 @@
           <a:bodyPr wrap="square" lIns="0" tIns="0" rIns="0" bIns="0" rtlCol="0" anchor="t"/>
           <a:lstStyle/>
           <a:p>
-            <a:pPr indent="0" marL="0">
+            <a:pPr marL="0" indent="0">
               <a:buNone/>
             </a:pPr>
             <a:r>
@@ -7011,6 +6951,13 @@
             <a:prstDash val="solid"/>
           </a:ln>
         </p:spPr>
+        <p:txBody>
+          <a:bodyPr/>
+          <a:lstStyle/>
+          <a:p>
+            <a:endParaRPr lang="ru-RU"/>
+          </a:p>
+        </p:txBody>
       </p:sp>
       <p:sp>
         <p:nvSpPr>
@@ -7033,7 +6980,7 @@
           <a:bodyPr wrap="square" lIns="0" tIns="0" rIns="0" bIns="0" rtlCol="0" anchor="ctr"/>
           <a:lstStyle/>
           <a:p>
-            <a:pPr indent="0" marL="0">
+            <a:pPr marL="0" indent="0">
               <a:buNone/>
             </a:pPr>
             <a:r>
@@ -7069,7 +7016,7 @@
           <a:bodyPr wrap="square" lIns="0" tIns="0" rIns="0" bIns="0" rtlCol="0" anchor="t"/>
           <a:lstStyle/>
           <a:p>
-            <a:pPr indent="0" marL="0">
+            <a:pPr marL="0" indent="0">
               <a:buNone/>
             </a:pPr>
             <a:r>
@@ -7110,6 +7057,13 @@
             <a:prstDash val="solid"/>
           </a:ln>
         </p:spPr>
+        <p:txBody>
+          <a:bodyPr/>
+          <a:lstStyle/>
+          <a:p>
+            <a:endParaRPr lang="ru-RU"/>
+          </a:p>
+        </p:txBody>
       </p:sp>
       <p:sp>
         <p:nvSpPr>
@@ -7132,7 +7086,7 @@
           <a:bodyPr wrap="square" lIns="0" tIns="0" rIns="0" bIns="0" rtlCol="0" anchor="ctr"/>
           <a:lstStyle/>
           <a:p>
-            <a:pPr indent="0" marL="0">
+            <a:pPr marL="0" indent="0">
               <a:buNone/>
             </a:pPr>
             <a:r>
@@ -7168,7 +7122,7 @@
           <a:bodyPr wrap="square" lIns="0" tIns="0" rIns="0" bIns="0" rtlCol="0" anchor="t"/>
           <a:lstStyle/>
           <a:p>
-            <a:pPr indent="0" marL="0">
+            <a:pPr marL="0" indent="0">
               <a:buNone/>
             </a:pPr>
             <a:r>
@@ -7204,7 +7158,7 @@
           <a:bodyPr wrap="square" lIns="0" tIns="0" rIns="0" bIns="0" rtlCol="0" anchor="t"/>
           <a:lstStyle/>
           <a:p>
-            <a:pPr indent="0" marL="0">
+            <a:pPr marL="0" indent="0">
               <a:buNone/>
             </a:pPr>
             <a:r>
@@ -7239,7 +7193,7 @@
           </a:prstGeom>
           <a:extLst>
             <a:ext uri="{C572A759-6A51-4108-AA02-DFA0A04FC94B}">
-              <ma14:wrappingTextBoxFlag xmlns:ma14="http://schemas.microsoft.com/office/mac/drawingml/2011/main" val="0"/>
+              <ma14:wrappingTextBoxFlag xmlns:ma14="http://schemas.microsoft.com/office/mac/drawingml/2011/main" xmlns="" val="0"/>
             </a:ext>
           </a:extLst>
         </p:spPr>
@@ -7257,7 +7211,7 @@
           <a:p>
             <a:pPr algn="r"/>
             <a:fld id="{F7021451-1387-4CA6-816F-3879F97B5CBC}" type="slidenum">
-              <a:rPr b="0" lang="en-US"/>
+              <a:rPr lang="en-US" b="0"/>
               <a:t>2</a:t>
             </a:fld>
             <a:endParaRPr lang="en-US"/>
@@ -7292,9 +7246,11 @@
       <p:sp>
         <p:nvSpPr>
           <p:cNvPr id="2" name="Text 0"/>
-          <p:cNvSpPr/>
+          <p:cNvSpPr>
+            <a:spLocks noGrp="1"/>
+          </p:cNvSpPr>
           <p:nvPr>
-            <p:ph idx="100" type="title" hasCustomPrompt="1"/>
+            <p:ph type="title" idx="100" hasCustomPrompt="1"/>
           </p:nvPr>
         </p:nvSpPr>
         <p:spPr>
@@ -7312,7 +7268,7 @@
           <a:bodyPr wrap="square" lIns="0" tIns="0" rIns="0" bIns="0" rtlCol="0" anchor="ctr"/>
           <a:lstStyle/>
           <a:p>
-            <a:pPr algn="l" indent="0" marL="0">
+            <a:pPr marL="0" indent="0" algn="l">
               <a:buNone/>
             </a:pPr>
             <a:r>
@@ -7353,6 +7309,13 @@
             <a:prstDash val="solid"/>
           </a:ln>
         </p:spPr>
+        <p:txBody>
+          <a:bodyPr/>
+          <a:lstStyle/>
+          <a:p>
+            <a:endParaRPr lang="ru-RU"/>
+          </a:p>
+        </p:txBody>
       </p:sp>
       <p:sp>
         <p:nvSpPr>
@@ -7375,7 +7338,7 @@
           <a:bodyPr wrap="square" lIns="0" tIns="0" rIns="0" bIns="0" rtlCol="0" anchor="t"/>
           <a:lstStyle/>
           <a:p>
-            <a:pPr indent="0" marL="0">
+            <a:pPr marL="0" indent="0">
               <a:buNone/>
             </a:pPr>
             <a:r>
@@ -7411,7 +7374,7 @@
           <a:bodyPr wrap="square" lIns="0" tIns="0" rIns="0" bIns="0" rtlCol="0" anchor="t"/>
           <a:lstStyle/>
           <a:p>
-            <a:pPr indent="0" marL="0">
+            <a:pPr marL="0" indent="0">
               <a:buNone/>
             </a:pPr>
             <a:r>
@@ -7447,7 +7410,7 @@
           <a:bodyPr wrap="square" lIns="0" tIns="0" rIns="0" bIns="0" rtlCol="0" anchor="t"/>
           <a:lstStyle/>
           <a:p>
-            <a:pPr indent="0" marL="0">
+            <a:pPr marL="0" indent="0">
               <a:buNone/>
             </a:pPr>
             <a:r>
@@ -7488,6 +7451,13 @@
             <a:prstDash val="solid"/>
           </a:ln>
         </p:spPr>
+        <p:txBody>
+          <a:bodyPr/>
+          <a:lstStyle/>
+          <a:p>
+            <a:endParaRPr lang="ru-RU"/>
+          </a:p>
+        </p:txBody>
       </p:sp>
       <p:sp>
         <p:nvSpPr>
@@ -7510,7 +7480,7 @@
           <a:bodyPr wrap="square" lIns="0" tIns="0" rIns="0" bIns="0" rtlCol="0" anchor="t"/>
           <a:lstStyle/>
           <a:p>
-            <a:pPr indent="0" marL="0">
+            <a:pPr marL="0" indent="0">
               <a:buNone/>
             </a:pPr>
             <a:r>
@@ -7546,7 +7516,7 @@
           <a:bodyPr wrap="square" lIns="0" tIns="0" rIns="0" bIns="0" rtlCol="0" anchor="t"/>
           <a:lstStyle/>
           <a:p>
-            <a:pPr indent="0" marL="0">
+            <a:pPr marL="0" indent="0">
               <a:buNone/>
             </a:pPr>
             <a:r>
@@ -7582,7 +7552,7 @@
           <a:bodyPr wrap="square" lIns="0" tIns="0" rIns="0" bIns="0" rtlCol="0" anchor="t"/>
           <a:lstStyle/>
           <a:p>
-            <a:pPr indent="0" marL="0">
+            <a:pPr marL="0" indent="0">
               <a:buNone/>
             </a:pPr>
             <a:r>
@@ -7623,6 +7593,13 @@
             <a:prstDash val="solid"/>
           </a:ln>
         </p:spPr>
+        <p:txBody>
+          <a:bodyPr/>
+          <a:lstStyle/>
+          <a:p>
+            <a:endParaRPr lang="ru-RU"/>
+          </a:p>
+        </p:txBody>
       </p:sp>
       <p:sp>
         <p:nvSpPr>
@@ -7645,7 +7622,7 @@
           <a:bodyPr wrap="square" lIns="0" tIns="0" rIns="0" bIns="0" rtlCol="0" anchor="t"/>
           <a:lstStyle/>
           <a:p>
-            <a:pPr indent="0" marL="0">
+            <a:pPr marL="0" indent="0">
               <a:buNone/>
             </a:pPr>
             <a:r>
@@ -7681,7 +7658,7 @@
           <a:bodyPr wrap="square" lIns="0" tIns="0" rIns="0" bIns="0" rtlCol="0" anchor="t"/>
           <a:lstStyle/>
           <a:p>
-            <a:pPr indent="0" marL="0">
+            <a:pPr marL="0" indent="0">
               <a:buNone/>
             </a:pPr>
             <a:r>
@@ -7717,7 +7694,7 @@
           <a:bodyPr wrap="square" lIns="0" tIns="0" rIns="0" bIns="0" rtlCol="0" anchor="t"/>
           <a:lstStyle/>
           <a:p>
-            <a:pPr indent="0" marL="0">
+            <a:pPr marL="0" indent="0">
               <a:buNone/>
             </a:pPr>
             <a:r>
@@ -7753,7 +7730,7 @@
           <a:bodyPr wrap="square" lIns="0" tIns="0" rIns="0" bIns="0" rtlCol="0" anchor="t"/>
           <a:lstStyle/>
           <a:p>
-            <a:pPr indent="0" marL="0">
+            <a:pPr marL="0" indent="0">
               <a:buNone/>
             </a:pPr>
             <a:r>
@@ -7788,7 +7765,7 @@
           </a:prstGeom>
           <a:extLst>
             <a:ext uri="{C572A759-6A51-4108-AA02-DFA0A04FC94B}">
-              <ma14:wrappingTextBoxFlag xmlns:ma14="http://schemas.microsoft.com/office/mac/drawingml/2011/main" val="0"/>
+              <ma14:wrappingTextBoxFlag xmlns:ma14="http://schemas.microsoft.com/office/mac/drawingml/2011/main" xmlns="" val="0"/>
             </a:ext>
           </a:extLst>
         </p:spPr>
@@ -7806,7 +7783,7 @@
           <a:p>
             <a:pPr algn="r"/>
             <a:fld id="{F7021451-1387-4CA6-816F-3879F97B5CBC}" type="slidenum">
-              <a:rPr b="0" lang="en-US"/>
+              <a:rPr lang="en-US" b="0"/>
               <a:t>3</a:t>
             </a:fld>
             <a:endParaRPr lang="en-US"/>
@@ -7841,9 +7818,11 @@
       <p:sp>
         <p:nvSpPr>
           <p:cNvPr id="2" name="Text 0"/>
-          <p:cNvSpPr/>
+          <p:cNvSpPr>
+            <a:spLocks noGrp="1"/>
+          </p:cNvSpPr>
           <p:nvPr>
-            <p:ph idx="100" type="title" hasCustomPrompt="1"/>
+            <p:ph type="title" idx="100" hasCustomPrompt="1"/>
           </p:nvPr>
         </p:nvSpPr>
         <p:spPr>
@@ -7861,7 +7840,7 @@
           <a:bodyPr wrap="square" lIns="0" tIns="0" rIns="0" bIns="0" rtlCol="0" anchor="ctr"/>
           <a:lstStyle/>
           <a:p>
-            <a:pPr algn="l" indent="0" marL="0">
+            <a:pPr marL="0" indent="0" algn="l">
               <a:buNone/>
             </a:pPr>
             <a:r>
@@ -7899,11 +7878,41 @@
             <a:tbl>
               <a:tblPr/>
               <a:tblGrid>
-                <a:gridCol w="3017520"/>
-                <a:gridCol w="2011680"/>
-                <a:gridCol w="2011680"/>
-                <a:gridCol w="2011680"/>
-                <a:gridCol w="2039112"/>
+                <a:gridCol w="3017520">
+                  <a:extLst>
+                    <a:ext uri="{9D8B030D-6E8A-4147-A177-3AD203B41FA5}">
+                      <a16:colId xmlns:a16="http://schemas.microsoft.com/office/drawing/2014/main" val="20000"/>
+                    </a:ext>
+                  </a:extLst>
+                </a:gridCol>
+                <a:gridCol w="2011680">
+                  <a:extLst>
+                    <a:ext uri="{9D8B030D-6E8A-4147-A177-3AD203B41FA5}">
+                      <a16:colId xmlns:a16="http://schemas.microsoft.com/office/drawing/2014/main" val="20001"/>
+                    </a:ext>
+                  </a:extLst>
+                </a:gridCol>
+                <a:gridCol w="2011680">
+                  <a:extLst>
+                    <a:ext uri="{9D8B030D-6E8A-4147-A177-3AD203B41FA5}">
+                      <a16:colId xmlns:a16="http://schemas.microsoft.com/office/drawing/2014/main" val="20002"/>
+                    </a:ext>
+                  </a:extLst>
+                </a:gridCol>
+                <a:gridCol w="2011680">
+                  <a:extLst>
+                    <a:ext uri="{9D8B030D-6E8A-4147-A177-3AD203B41FA5}">
+                      <a16:colId xmlns:a16="http://schemas.microsoft.com/office/drawing/2014/main" val="20003"/>
+                    </a:ext>
+                  </a:extLst>
+                </a:gridCol>
+                <a:gridCol w="2039112">
+                  <a:extLst>
+                    <a:ext uri="{9D8B030D-6E8A-4147-A177-3AD203B41FA5}">
+                      <a16:colId xmlns:a16="http://schemas.microsoft.com/office/drawing/2014/main" val="20004"/>
+                    </a:ext>
+                  </a:extLst>
+                </a:gridCol>
               </a:tblGrid>
               <a:tr h="475488">
                 <a:tc>
@@ -7911,7 +7920,7 @@
                     <a:bodyPr/>
                     <a:lstStyle/>
                     <a:p>
-                      <a:pPr algn="ctr" indent="0" marL="0">
+                      <a:pPr marL="0" indent="0" algn="ctr">
                         <a:buNone/>
                       </a:pPr>
                       <a:r>
@@ -7979,7 +7988,7 @@
                     <a:bodyPr/>
                     <a:lstStyle/>
                     <a:p>
-                      <a:pPr algn="ctr" indent="0" marL="0">
+                      <a:pPr marL="0" indent="0" algn="ctr">
                         <a:buNone/>
                       </a:pPr>
                       <a:r>
@@ -8047,7 +8056,7 @@
                     <a:bodyPr/>
                     <a:lstStyle/>
                     <a:p>
-                      <a:pPr algn="ctr" indent="0" marL="0">
+                      <a:pPr marL="0" indent="0" algn="ctr">
                         <a:buNone/>
                       </a:pPr>
                       <a:r>
@@ -8115,7 +8124,7 @@
                     <a:bodyPr/>
                     <a:lstStyle/>
                     <a:p>
-                      <a:pPr algn="ctr" indent="0" marL="0">
+                      <a:pPr marL="0" indent="0" algn="ctr">
                         <a:buNone/>
                       </a:pPr>
                       <a:r>
@@ -8183,7 +8192,7 @@
                     <a:bodyPr/>
                     <a:lstStyle/>
                     <a:p>
-                      <a:pPr algn="ctr" indent="0" marL="0">
+                      <a:pPr marL="0" indent="0" algn="ctr">
                         <a:buNone/>
                       </a:pPr>
                       <a:r>
@@ -8246,6 +8255,11 @@
                     </a:solidFill>
                   </a:tcPr>
                 </a:tc>
+                <a:extLst>
+                  <a:ext uri="{0D108BD9-81ED-4DB2-BD59-A6C34878D82A}">
+                    <a16:rowId xmlns:a16="http://schemas.microsoft.com/office/drawing/2014/main" val="10000"/>
+                  </a:ext>
+                </a:extLst>
               </a:tr>
               <a:tr h="475488">
                 <a:tc>
@@ -8253,7 +8267,7 @@
                     <a:bodyPr/>
                     <a:lstStyle/>
                     <a:p>
-                      <a:pPr indent="0" marL="0">
+                      <a:pPr marL="0" indent="0">
                         <a:buNone/>
                       </a:pPr>
                       <a:r>
@@ -8321,7 +8335,7 @@
                     <a:bodyPr/>
                     <a:lstStyle/>
                     <a:p>
-                      <a:pPr algn="ctr" indent="0" marL="0">
+                      <a:pPr marL="0" indent="0" algn="ctr">
                         <a:buNone/>
                       </a:pPr>
                       <a:r>
@@ -8386,7 +8400,7 @@
                     <a:bodyPr/>
                     <a:lstStyle/>
                     <a:p>
-                      <a:pPr algn="ctr" indent="0" marL="0">
+                      <a:pPr marL="0" indent="0" algn="ctr">
                         <a:buNone/>
                       </a:pPr>
                       <a:r>
@@ -8451,7 +8465,7 @@
                     <a:bodyPr/>
                     <a:lstStyle/>
                     <a:p>
-                      <a:pPr algn="ctr" indent="0" marL="0">
+                      <a:pPr marL="0" indent="0" algn="ctr">
                         <a:buNone/>
                       </a:pPr>
                       <a:r>
@@ -8516,7 +8530,7 @@
                     <a:bodyPr/>
                     <a:lstStyle/>
                     <a:p>
-                      <a:pPr algn="ctr" indent="0" marL="0">
+                      <a:pPr marL="0" indent="0" algn="ctr">
                         <a:buNone/>
                       </a:pPr>
                       <a:r>
@@ -8576,6 +8590,11 @@
                     </a:lnB>
                   </a:tcPr>
                 </a:tc>
+                <a:extLst>
+                  <a:ext uri="{0D108BD9-81ED-4DB2-BD59-A6C34878D82A}">
+                    <a16:rowId xmlns:a16="http://schemas.microsoft.com/office/drawing/2014/main" val="10001"/>
+                  </a:ext>
+                </a:extLst>
               </a:tr>
               <a:tr h="475488">
                 <a:tc>
@@ -8583,7 +8602,7 @@
                     <a:bodyPr/>
                     <a:lstStyle/>
                     <a:p>
-                      <a:pPr indent="0" marL="0">
+                      <a:pPr marL="0" indent="0">
                         <a:buNone/>
                       </a:pPr>
                       <a:r>
@@ -8651,7 +8670,7 @@
                     <a:bodyPr/>
                     <a:lstStyle/>
                     <a:p>
-                      <a:pPr algn="ctr" indent="0" marL="0">
+                      <a:pPr marL="0" indent="0" algn="ctr">
                         <a:buNone/>
                       </a:pPr>
                       <a:r>
@@ -8716,7 +8735,7 @@
                     <a:bodyPr/>
                     <a:lstStyle/>
                     <a:p>
-                      <a:pPr algn="ctr" indent="0" marL="0">
+                      <a:pPr marL="0" indent="0" algn="ctr">
                         <a:buNone/>
                       </a:pPr>
                       <a:r>
@@ -8781,7 +8800,7 @@
                     <a:bodyPr/>
                     <a:lstStyle/>
                     <a:p>
-                      <a:pPr algn="ctr" indent="0" marL="0">
+                      <a:pPr marL="0" indent="0" algn="ctr">
                         <a:buNone/>
                       </a:pPr>
                       <a:r>
@@ -8846,7 +8865,7 @@
                     <a:bodyPr/>
                     <a:lstStyle/>
                     <a:p>
-                      <a:pPr algn="ctr" indent="0" marL="0">
+                      <a:pPr marL="0" indent="0" algn="ctr">
                         <a:buNone/>
                       </a:pPr>
                       <a:r>
@@ -8906,6 +8925,11 @@
                     </a:lnB>
                   </a:tcPr>
                 </a:tc>
+                <a:extLst>
+                  <a:ext uri="{0D108BD9-81ED-4DB2-BD59-A6C34878D82A}">
+                    <a16:rowId xmlns:a16="http://schemas.microsoft.com/office/drawing/2014/main" val="10002"/>
+                  </a:ext>
+                </a:extLst>
               </a:tr>
               <a:tr h="475488">
                 <a:tc>
@@ -8913,7 +8937,7 @@
                     <a:bodyPr/>
                     <a:lstStyle/>
                     <a:p>
-                      <a:pPr indent="0" marL="0">
+                      <a:pPr marL="0" indent="0">
                         <a:buNone/>
                       </a:pPr>
                       <a:r>
@@ -8981,7 +9005,7 @@
                     <a:bodyPr/>
                     <a:lstStyle/>
                     <a:p>
-                      <a:pPr algn="ctr" indent="0" marL="0">
+                      <a:pPr marL="0" indent="0" algn="ctr">
                         <a:buNone/>
                       </a:pPr>
                       <a:r>
@@ -9046,7 +9070,7 @@
                     <a:bodyPr/>
                     <a:lstStyle/>
                     <a:p>
-                      <a:pPr algn="ctr" indent="0" marL="0">
+                      <a:pPr marL="0" indent="0" algn="ctr">
                         <a:buNone/>
                       </a:pPr>
                       <a:r>
@@ -9111,7 +9135,7 @@
                     <a:bodyPr/>
                     <a:lstStyle/>
                     <a:p>
-                      <a:pPr algn="ctr" indent="0" marL="0">
+                      <a:pPr marL="0" indent="0" algn="ctr">
                         <a:buNone/>
                       </a:pPr>
                       <a:r>
@@ -9176,7 +9200,7 @@
                     <a:bodyPr/>
                     <a:lstStyle/>
                     <a:p>
-                      <a:pPr algn="ctr" indent="0" marL="0">
+                      <a:pPr marL="0" indent="0" algn="ctr">
                         <a:buNone/>
                       </a:pPr>
                       <a:r>
@@ -9236,6 +9260,11 @@
                     </a:lnB>
                   </a:tcPr>
                 </a:tc>
+                <a:extLst>
+                  <a:ext uri="{0D108BD9-81ED-4DB2-BD59-A6C34878D82A}">
+                    <a16:rowId xmlns:a16="http://schemas.microsoft.com/office/drawing/2014/main" val="10003"/>
+                  </a:ext>
+                </a:extLst>
               </a:tr>
               <a:tr h="475488">
                 <a:tc>
@@ -9243,7 +9272,7 @@
                     <a:bodyPr/>
                     <a:lstStyle/>
                     <a:p>
-                      <a:pPr indent="0" marL="0">
+                      <a:pPr marL="0" indent="0">
                         <a:buNone/>
                       </a:pPr>
                       <a:r>
@@ -9311,7 +9340,7 @@
                     <a:bodyPr/>
                     <a:lstStyle/>
                     <a:p>
-                      <a:pPr algn="ctr" indent="0" marL="0">
+                      <a:pPr marL="0" indent="0" algn="ctr">
                         <a:buNone/>
                       </a:pPr>
                       <a:r>
@@ -9376,7 +9405,7 @@
                     <a:bodyPr/>
                     <a:lstStyle/>
                     <a:p>
-                      <a:pPr algn="ctr" indent="0" marL="0">
+                      <a:pPr marL="0" indent="0" algn="ctr">
                         <a:buNone/>
                       </a:pPr>
                       <a:r>
@@ -9441,7 +9470,7 @@
                     <a:bodyPr/>
                     <a:lstStyle/>
                     <a:p>
-                      <a:pPr algn="ctr" indent="0" marL="0">
+                      <a:pPr marL="0" indent="0" algn="ctr">
                         <a:buNone/>
                       </a:pPr>
                       <a:r>
@@ -9506,7 +9535,7 @@
                     <a:bodyPr/>
                     <a:lstStyle/>
                     <a:p>
-                      <a:pPr algn="ctr" indent="0" marL="0">
+                      <a:pPr marL="0" indent="0" algn="ctr">
                         <a:buNone/>
                       </a:pPr>
                       <a:r>
@@ -9566,6 +9595,11 @@
                     </a:lnB>
                   </a:tcPr>
                 </a:tc>
+                <a:extLst>
+                  <a:ext uri="{0D108BD9-81ED-4DB2-BD59-A6C34878D82A}">
+                    <a16:rowId xmlns:a16="http://schemas.microsoft.com/office/drawing/2014/main" val="10004"/>
+                  </a:ext>
+                </a:extLst>
               </a:tr>
               <a:tr h="475488">
                 <a:tc>
@@ -9573,7 +9607,7 @@
                     <a:bodyPr/>
                     <a:lstStyle/>
                     <a:p>
-                      <a:pPr indent="0" marL="0">
+                      <a:pPr marL="0" indent="0">
                         <a:buNone/>
                       </a:pPr>
                       <a:r>
@@ -9641,7 +9675,7 @@
                     <a:bodyPr/>
                     <a:lstStyle/>
                     <a:p>
-                      <a:pPr algn="ctr" indent="0" marL="0">
+                      <a:pPr marL="0" indent="0" algn="ctr">
                         <a:buNone/>
                       </a:pPr>
                       <a:r>
@@ -9706,7 +9740,7 @@
                     <a:bodyPr/>
                     <a:lstStyle/>
                     <a:p>
-                      <a:pPr algn="ctr" indent="0" marL="0">
+                      <a:pPr marL="0" indent="0" algn="ctr">
                         <a:buNone/>
                       </a:pPr>
                       <a:r>
@@ -9771,7 +9805,7 @@
                     <a:bodyPr/>
                     <a:lstStyle/>
                     <a:p>
-                      <a:pPr algn="ctr" indent="0" marL="0">
+                      <a:pPr marL="0" indent="0" algn="ctr">
                         <a:buNone/>
                       </a:pPr>
                       <a:r>
@@ -9836,7 +9870,7 @@
                     <a:bodyPr/>
                     <a:lstStyle/>
                     <a:p>
-                      <a:pPr algn="ctr" indent="0" marL="0">
+                      <a:pPr marL="0" indent="0" algn="ctr">
                         <a:buNone/>
                       </a:pPr>
                       <a:r>
@@ -9896,6 +9930,11 @@
                     </a:lnB>
                   </a:tcPr>
                 </a:tc>
+                <a:extLst>
+                  <a:ext uri="{0D108BD9-81ED-4DB2-BD59-A6C34878D82A}">
+                    <a16:rowId xmlns:a16="http://schemas.microsoft.com/office/drawing/2014/main" val="10005"/>
+                  </a:ext>
+                </a:extLst>
               </a:tr>
               <a:tr h="475488">
                 <a:tc>
@@ -9903,7 +9942,7 @@
                     <a:bodyPr/>
                     <a:lstStyle/>
                     <a:p>
-                      <a:pPr indent="0" marL="0">
+                      <a:pPr marL="0" indent="0">
                         <a:buNone/>
                       </a:pPr>
                       <a:r>
@@ -9971,7 +10010,7 @@
                     <a:bodyPr/>
                     <a:lstStyle/>
                     <a:p>
-                      <a:pPr algn="ctr" indent="0" marL="0">
+                      <a:pPr marL="0" indent="0" algn="ctr">
                         <a:buNone/>
                       </a:pPr>
                       <a:r>
@@ -10036,7 +10075,7 @@
                     <a:bodyPr/>
                     <a:lstStyle/>
                     <a:p>
-                      <a:pPr algn="ctr" indent="0" marL="0">
+                      <a:pPr marL="0" indent="0" algn="ctr">
                         <a:buNone/>
                       </a:pPr>
                       <a:r>
@@ -10101,7 +10140,7 @@
                     <a:bodyPr/>
                     <a:lstStyle/>
                     <a:p>
-                      <a:pPr algn="ctr" indent="0" marL="0">
+                      <a:pPr marL="0" indent="0" algn="ctr">
                         <a:buNone/>
                       </a:pPr>
                       <a:r>
@@ -10166,7 +10205,7 @@
                     <a:bodyPr/>
                     <a:lstStyle/>
                     <a:p>
-                      <a:pPr algn="ctr" indent="0" marL="0">
+                      <a:pPr marL="0" indent="0" algn="ctr">
                         <a:buNone/>
                       </a:pPr>
                       <a:r>
@@ -10226,6 +10265,11 @@
                     </a:lnB>
                   </a:tcPr>
                 </a:tc>
+                <a:extLst>
+                  <a:ext uri="{0D108BD9-81ED-4DB2-BD59-A6C34878D82A}">
+                    <a16:rowId xmlns:a16="http://schemas.microsoft.com/office/drawing/2014/main" val="10006"/>
+                  </a:ext>
+                </a:extLst>
               </a:tr>
               <a:tr h="475488">
                 <a:tc>
@@ -10233,7 +10277,7 @@
                     <a:bodyPr/>
                     <a:lstStyle/>
                     <a:p>
-                      <a:pPr indent="0" marL="0">
+                      <a:pPr marL="0" indent="0">
                         <a:buNone/>
                       </a:pPr>
                       <a:r>
@@ -10301,7 +10345,7 @@
                     <a:bodyPr/>
                     <a:lstStyle/>
                     <a:p>
-                      <a:pPr algn="ctr" indent="0" marL="0">
+                      <a:pPr marL="0" indent="0" algn="ctr">
                         <a:buNone/>
                       </a:pPr>
                       <a:r>
@@ -10366,7 +10410,7 @@
                     <a:bodyPr/>
                     <a:lstStyle/>
                     <a:p>
-                      <a:pPr algn="ctr" indent="0" marL="0">
+                      <a:pPr marL="0" indent="0" algn="ctr">
                         <a:buNone/>
                       </a:pPr>
                       <a:r>
@@ -10431,7 +10475,7 @@
                     <a:bodyPr/>
                     <a:lstStyle/>
                     <a:p>
-                      <a:pPr algn="ctr" indent="0" marL="0">
+                      <a:pPr marL="0" indent="0" algn="ctr">
                         <a:buNone/>
                       </a:pPr>
                       <a:r>
@@ -10496,7 +10540,7 @@
                     <a:bodyPr/>
                     <a:lstStyle/>
                     <a:p>
-                      <a:pPr algn="ctr" indent="0" marL="0">
+                      <a:pPr marL="0" indent="0" algn="ctr">
                         <a:buNone/>
                       </a:pPr>
                       <a:r>
@@ -10556,6 +10600,11 @@
                     </a:lnB>
                   </a:tcPr>
                 </a:tc>
+                <a:extLst>
+                  <a:ext uri="{0D108BD9-81ED-4DB2-BD59-A6C34878D82A}">
+                    <a16:rowId xmlns:a16="http://schemas.microsoft.com/office/drawing/2014/main" val="10007"/>
+                  </a:ext>
+                </a:extLst>
               </a:tr>
             </a:tbl>
           </a:graphicData>
@@ -10582,7 +10631,7 @@
           <a:bodyPr wrap="square" lIns="0" tIns="0" rIns="0" bIns="0" rtlCol="0" anchor="t"/>
           <a:lstStyle/>
           <a:p>
-            <a:pPr indent="0" marL="0">
+            <a:pPr marL="0" indent="0">
               <a:buNone/>
             </a:pPr>
             <a:r>
@@ -10617,7 +10666,7 @@
           </a:prstGeom>
           <a:extLst>
             <a:ext uri="{C572A759-6A51-4108-AA02-DFA0A04FC94B}">
-              <ma14:wrappingTextBoxFlag xmlns:ma14="http://schemas.microsoft.com/office/mac/drawingml/2011/main" val="0"/>
+              <ma14:wrappingTextBoxFlag xmlns:ma14="http://schemas.microsoft.com/office/mac/drawingml/2011/main" xmlns="" val="0"/>
             </a:ext>
           </a:extLst>
         </p:spPr>
@@ -10635,7 +10684,7 @@
           <a:p>
             <a:pPr algn="r"/>
             <a:fld id="{F7021451-1387-4CA6-816F-3879F97B5CBC}" type="slidenum">
-              <a:rPr b="0" lang="en-US"/>
+              <a:rPr lang="en-US" b="0"/>
               <a:t>4</a:t>
             </a:fld>
             <a:endParaRPr lang="en-US"/>
@@ -10670,9 +10719,11 @@
       <p:sp>
         <p:nvSpPr>
           <p:cNvPr id="2" name="Text 0"/>
-          <p:cNvSpPr/>
+          <p:cNvSpPr>
+            <a:spLocks noGrp="1"/>
+          </p:cNvSpPr>
           <p:nvPr>
-            <p:ph idx="100" type="title" hasCustomPrompt="1"/>
+            <p:ph type="title" idx="100" hasCustomPrompt="1"/>
           </p:nvPr>
         </p:nvSpPr>
         <p:spPr>
@@ -10690,7 +10741,7 @@
           <a:bodyPr wrap="square" lIns="0" tIns="0" rIns="0" bIns="0" rtlCol="0" anchor="ctr"/>
           <a:lstStyle/>
           <a:p>
-            <a:pPr algn="l" indent="0" marL="0">
+            <a:pPr marL="0" indent="0" algn="l">
               <a:buNone/>
             </a:pPr>
             <a:r>
@@ -10707,14 +10758,14 @@
       </p:sp>
       <p:pic>
         <p:nvPicPr>
-          <p:cNvPr id="3" name="Главная страница сервиса" descr="/tmp/claude-0/-home-user-invest-project-eval/cfb2f9eb-1ed1-598a-ae85-aefec36c7a96/scratchpad/shots/home.png">    </p:cNvPr>
+          <p:cNvPr id="3" name="Главная страница сервиса" descr="/tmp/claude-0/-home-user-invest-project-eval/cfb2f9eb-1ed1-598a-ae85-aefec36c7a96/scratchpad/shots/home.png"/>
           <p:cNvPicPr>
             <a:picLocks noChangeAspect="1"/>
           </p:cNvPicPr>
           <p:nvPr/>
         </p:nvPicPr>
         <p:blipFill>
-          <a:blip r:embed="rId1"/>
+          <a:blip r:embed="rId3"/>
           <a:stretch>
             <a:fillRect/>
           </a:stretch>
@@ -10728,7 +10779,7 @@
             <a:avLst/>
           </a:prstGeom>
           <a:effectLst>
-            <a:outerShdw sx="100000" sy="100000" kx="0" ky="0" algn="bl" rotWithShape="0" blurRad="76200" dist="25400" dir="2700000">
+            <a:outerShdw blurRad="76200" dist="25400" dir="2700000" algn="bl" rotWithShape="0">
               <a:srgbClr val="000000">
                 <a:alpha val="18000"/>
               </a:srgbClr>
@@ -10757,7 +10808,7 @@
           <a:bodyPr wrap="square" lIns="0" tIns="0" rIns="0" bIns="0" rtlCol="0" anchor="t"/>
           <a:lstStyle/>
           <a:p>
-            <a:pPr algn="ctr" indent="0" marL="0">
+            <a:pPr marL="0" indent="0" algn="ctr">
               <a:buNone/>
             </a:pPr>
             <a:r>
@@ -10922,7 +10973,7 @@
           </a:prstGeom>
           <a:extLst>
             <a:ext uri="{C572A759-6A51-4108-AA02-DFA0A04FC94B}">
-              <ma14:wrappingTextBoxFlag xmlns:ma14="http://schemas.microsoft.com/office/mac/drawingml/2011/main" val="0"/>
+              <ma14:wrappingTextBoxFlag xmlns:ma14="http://schemas.microsoft.com/office/mac/drawingml/2011/main" xmlns="" val="0"/>
             </a:ext>
           </a:extLst>
         </p:spPr>
@@ -10940,7 +10991,7 @@
           <a:p>
             <a:pPr algn="r"/>
             <a:fld id="{F7021451-1387-4CA6-816F-3879F97B5CBC}" type="slidenum">
-              <a:rPr b="0" lang="en-US"/>
+              <a:rPr lang="en-US" b="0"/>
               <a:t>5</a:t>
             </a:fld>
             <a:endParaRPr lang="en-US"/>
@@ -10975,9 +11026,11 @@
       <p:sp>
         <p:nvSpPr>
           <p:cNvPr id="2" name="Text 0"/>
-          <p:cNvSpPr/>
+          <p:cNvSpPr>
+            <a:spLocks noGrp="1"/>
+          </p:cNvSpPr>
           <p:nvPr>
-            <p:ph idx="100" type="title" hasCustomPrompt="1"/>
+            <p:ph type="title" idx="100" hasCustomPrompt="1"/>
           </p:nvPr>
         </p:nvSpPr>
         <p:spPr>
@@ -10995,7 +11048,7 @@
           <a:bodyPr wrap="square" lIns="0" tIns="0" rIns="0" bIns="0" rtlCol="0" anchor="ctr"/>
           <a:lstStyle/>
           <a:p>
-            <a:pPr algn="l" indent="0" marL="0">
+            <a:pPr marL="0" indent="0" algn="l">
               <a:buNone/>
             </a:pPr>
             <a:r>
@@ -11012,14 +11065,14 @@
       </p:sp>
       <p:pic>
         <p:nvPicPr>
-          <p:cNvPr id="3" name="Схема пяти шагов" descr="/home/user/invest-project-eval/docs/img/b1-how-it-works.png">    </p:cNvPr>
+          <p:cNvPr id="3" name="Схема пяти шагов" descr="/home/user/invest-project-eval/docs/img/b1-how-it-works.png"/>
           <p:cNvPicPr>
             <a:picLocks noChangeAspect="1"/>
           </p:cNvPicPr>
           <p:nvPr/>
         </p:nvPicPr>
         <p:blipFill>
-          <a:blip r:embed="rId1"/>
+          <a:blip r:embed="rId3"/>
           <a:stretch>
             <a:fillRect/>
           </a:stretch>
@@ -11060,6 +11113,13 @@
             <a:prstDash val="solid"/>
           </a:ln>
         </p:spPr>
+        <p:txBody>
+          <a:bodyPr/>
+          <a:lstStyle/>
+          <a:p>
+            <a:endParaRPr lang="ru-RU"/>
+          </a:p>
+        </p:txBody>
       </p:sp>
       <p:sp>
         <p:nvSpPr>
@@ -11085,6 +11145,13 @@
             <a:prstDash val="solid"/>
           </a:ln>
         </p:spPr>
+        <p:txBody>
+          <a:bodyPr/>
+          <a:lstStyle/>
+          <a:p>
+            <a:endParaRPr lang="ru-RU"/>
+          </a:p>
+        </p:txBody>
       </p:sp>
       <p:sp>
         <p:nvSpPr>
@@ -11107,7 +11174,7 @@
           <a:bodyPr wrap="square" lIns="0" tIns="0" rIns="0" bIns="0" rtlCol="0" anchor="ctr"/>
           <a:lstStyle/>
           <a:p>
-            <a:pPr algn="ctr" indent="0" marL="0">
+            <a:pPr marL="0" indent="0" algn="ctr">
               <a:buNone/>
             </a:pPr>
             <a:r>
@@ -11143,7 +11210,7 @@
           <a:bodyPr wrap="square" lIns="0" tIns="0" rIns="0" bIns="0" rtlCol="0" anchor="ctr"/>
           <a:lstStyle/>
           <a:p>
-            <a:pPr indent="0" marL="0">
+            <a:pPr marL="0" indent="0">
               <a:buNone/>
             </a:pPr>
             <a:r>
@@ -11179,7 +11246,7 @@
           <a:bodyPr wrap="square" lIns="0" tIns="0" rIns="0" bIns="0" rtlCol="0" anchor="t"/>
           <a:lstStyle/>
           <a:p>
-            <a:pPr indent="0" marL="0">
+            <a:pPr marL="0" indent="0">
               <a:buNone/>
             </a:pPr>
             <a:r>
@@ -11215,7 +11282,7 @@
           <a:bodyPr wrap="square" lIns="0" tIns="0" rIns="0" bIns="0" rtlCol="0" anchor="t"/>
           <a:lstStyle/>
           <a:p>
-            <a:pPr indent="0" marL="0">
+            <a:pPr marL="0" indent="0">
               <a:buNone/>
             </a:pPr>
             <a:r>
@@ -11256,6 +11323,13 @@
             <a:prstDash val="solid"/>
           </a:ln>
         </p:spPr>
+        <p:txBody>
+          <a:bodyPr/>
+          <a:lstStyle/>
+          <a:p>
+            <a:endParaRPr lang="ru-RU"/>
+          </a:p>
+        </p:txBody>
       </p:sp>
       <p:sp>
         <p:nvSpPr>
@@ -11281,6 +11355,13 @@
             <a:prstDash val="solid"/>
           </a:ln>
         </p:spPr>
+        <p:txBody>
+          <a:bodyPr/>
+          <a:lstStyle/>
+          <a:p>
+            <a:endParaRPr lang="ru-RU"/>
+          </a:p>
+        </p:txBody>
       </p:sp>
       <p:sp>
         <p:nvSpPr>
@@ -11303,7 +11384,7 @@
           <a:bodyPr wrap="square" lIns="0" tIns="0" rIns="0" bIns="0" rtlCol="0" anchor="ctr"/>
           <a:lstStyle/>
           <a:p>
-            <a:pPr algn="ctr" indent="0" marL="0">
+            <a:pPr marL="0" indent="0" algn="ctr">
               <a:buNone/>
             </a:pPr>
             <a:r>
@@ -11339,7 +11420,7 @@
           <a:bodyPr wrap="square" lIns="0" tIns="0" rIns="0" bIns="0" rtlCol="0" anchor="ctr"/>
           <a:lstStyle/>
           <a:p>
-            <a:pPr indent="0" marL="0">
+            <a:pPr marL="0" indent="0">
               <a:buNone/>
             </a:pPr>
             <a:r>
@@ -11375,7 +11456,7 @@
           <a:bodyPr wrap="square" lIns="0" tIns="0" rIns="0" bIns="0" rtlCol="0" anchor="t"/>
           <a:lstStyle/>
           <a:p>
-            <a:pPr indent="0" marL="0">
+            <a:pPr marL="0" indent="0">
               <a:buNone/>
             </a:pPr>
             <a:r>
@@ -11411,7 +11492,7 @@
           <a:bodyPr wrap="square" lIns="0" tIns="0" rIns="0" bIns="0" rtlCol="0" anchor="t"/>
           <a:lstStyle/>
           <a:p>
-            <a:pPr indent="0" marL="0">
+            <a:pPr marL="0" indent="0">
               <a:buNone/>
             </a:pPr>
             <a:r>
@@ -11452,6 +11533,13 @@
             <a:prstDash val="solid"/>
           </a:ln>
         </p:spPr>
+        <p:txBody>
+          <a:bodyPr/>
+          <a:lstStyle/>
+          <a:p>
+            <a:endParaRPr lang="ru-RU"/>
+          </a:p>
+        </p:txBody>
       </p:sp>
       <p:sp>
         <p:nvSpPr>
@@ -11477,6 +11565,13 @@
             <a:prstDash val="solid"/>
           </a:ln>
         </p:spPr>
+        <p:txBody>
+          <a:bodyPr/>
+          <a:lstStyle/>
+          <a:p>
+            <a:endParaRPr lang="ru-RU"/>
+          </a:p>
+        </p:txBody>
       </p:sp>
       <p:sp>
         <p:nvSpPr>
@@ -11499,7 +11594,7 @@
           <a:bodyPr wrap="square" lIns="0" tIns="0" rIns="0" bIns="0" rtlCol="0" anchor="ctr"/>
           <a:lstStyle/>
           <a:p>
-            <a:pPr algn="ctr" indent="0" marL="0">
+            <a:pPr marL="0" indent="0" algn="ctr">
               <a:buNone/>
             </a:pPr>
             <a:r>
@@ -11535,7 +11630,7 @@
           <a:bodyPr wrap="square" lIns="0" tIns="0" rIns="0" bIns="0" rtlCol="0" anchor="ctr"/>
           <a:lstStyle/>
           <a:p>
-            <a:pPr indent="0" marL="0">
+            <a:pPr marL="0" indent="0">
               <a:buNone/>
             </a:pPr>
             <a:r>
@@ -11571,7 +11666,7 @@
           <a:bodyPr wrap="square" lIns="0" tIns="0" rIns="0" bIns="0" rtlCol="0" anchor="t"/>
           <a:lstStyle/>
           <a:p>
-            <a:pPr indent="0" marL="0">
+            <a:pPr marL="0" indent="0">
               <a:buNone/>
             </a:pPr>
             <a:r>
@@ -11607,7 +11702,7 @@
           <a:bodyPr wrap="square" lIns="0" tIns="0" rIns="0" bIns="0" rtlCol="0" anchor="t"/>
           <a:lstStyle/>
           <a:p>
-            <a:pPr indent="0" marL="0">
+            <a:pPr marL="0" indent="0">
               <a:buNone/>
             </a:pPr>
             <a:r>
@@ -11648,6 +11743,13 @@
             <a:prstDash val="solid"/>
           </a:ln>
         </p:spPr>
+        <p:txBody>
+          <a:bodyPr/>
+          <a:lstStyle/>
+          <a:p>
+            <a:endParaRPr lang="ru-RU"/>
+          </a:p>
+        </p:txBody>
       </p:sp>
       <p:sp>
         <p:nvSpPr>
@@ -11673,6 +11775,13 @@
             <a:prstDash val="solid"/>
           </a:ln>
         </p:spPr>
+        <p:txBody>
+          <a:bodyPr/>
+          <a:lstStyle/>
+          <a:p>
+            <a:endParaRPr lang="ru-RU"/>
+          </a:p>
+        </p:txBody>
       </p:sp>
       <p:sp>
         <p:nvSpPr>
@@ -11695,7 +11804,7 @@
           <a:bodyPr wrap="square" lIns="0" tIns="0" rIns="0" bIns="0" rtlCol="0" anchor="ctr"/>
           <a:lstStyle/>
           <a:p>
-            <a:pPr algn="ctr" indent="0" marL="0">
+            <a:pPr marL="0" indent="0" algn="ctr">
               <a:buNone/>
             </a:pPr>
             <a:r>
@@ -11731,7 +11840,7 @@
           <a:bodyPr wrap="square" lIns="0" tIns="0" rIns="0" bIns="0" rtlCol="0" anchor="ctr"/>
           <a:lstStyle/>
           <a:p>
-            <a:pPr indent="0" marL="0">
+            <a:pPr marL="0" indent="0">
               <a:buNone/>
             </a:pPr>
             <a:r>
@@ -11767,7 +11876,7 @@
           <a:bodyPr wrap="square" lIns="0" tIns="0" rIns="0" bIns="0" rtlCol="0" anchor="t"/>
           <a:lstStyle/>
           <a:p>
-            <a:pPr indent="0" marL="0">
+            <a:pPr marL="0" indent="0">
               <a:buNone/>
             </a:pPr>
             <a:r>
@@ -11803,7 +11912,7 @@
           <a:bodyPr wrap="square" lIns="0" tIns="0" rIns="0" bIns="0" rtlCol="0" anchor="t"/>
           <a:lstStyle/>
           <a:p>
-            <a:pPr indent="0" marL="0">
+            <a:pPr marL="0" indent="0">
               <a:buNone/>
             </a:pPr>
             <a:r>
@@ -11844,6 +11953,13 @@
             <a:prstDash val="solid"/>
           </a:ln>
         </p:spPr>
+        <p:txBody>
+          <a:bodyPr/>
+          <a:lstStyle/>
+          <a:p>
+            <a:endParaRPr lang="ru-RU"/>
+          </a:p>
+        </p:txBody>
       </p:sp>
       <p:sp>
         <p:nvSpPr>
@@ -11869,6 +11985,13 @@
             <a:prstDash val="solid"/>
           </a:ln>
         </p:spPr>
+        <p:txBody>
+          <a:bodyPr/>
+          <a:lstStyle/>
+          <a:p>
+            <a:endParaRPr lang="ru-RU"/>
+          </a:p>
+        </p:txBody>
       </p:sp>
       <p:sp>
         <p:nvSpPr>
@@ -11891,7 +12014,7 @@
           <a:bodyPr wrap="square" lIns="0" tIns="0" rIns="0" bIns="0" rtlCol="0" anchor="ctr"/>
           <a:lstStyle/>
           <a:p>
-            <a:pPr algn="ctr" indent="0" marL="0">
+            <a:pPr marL="0" indent="0" algn="ctr">
               <a:buNone/>
             </a:pPr>
             <a:r>
@@ -11927,7 +12050,7 @@
           <a:bodyPr wrap="square" lIns="0" tIns="0" rIns="0" bIns="0" rtlCol="0" anchor="ctr"/>
           <a:lstStyle/>
           <a:p>
-            <a:pPr indent="0" marL="0">
+            <a:pPr marL="0" indent="0">
               <a:buNone/>
             </a:pPr>
             <a:r>
@@ -11963,7 +12086,7 @@
           <a:bodyPr wrap="square" lIns="0" tIns="0" rIns="0" bIns="0" rtlCol="0" anchor="t"/>
           <a:lstStyle/>
           <a:p>
-            <a:pPr indent="0" marL="0">
+            <a:pPr marL="0" indent="0">
               <a:buNone/>
             </a:pPr>
             <a:r>
@@ -11999,7 +12122,7 @@
           <a:bodyPr wrap="square" lIns="0" tIns="0" rIns="0" bIns="0" rtlCol="0" anchor="t"/>
           <a:lstStyle/>
           <a:p>
-            <a:pPr indent="0" marL="0">
+            <a:pPr marL="0" indent="0">
               <a:buNone/>
             </a:pPr>
             <a:r>
@@ -12016,7 +12139,7 @@
       </p:sp>
       <p:sp>
         <p:nvSpPr>
-          <p:cNvPr id="25" name="Slide Number Placeholder 0"/>
+          <p:cNvPr id="34" name="Slide Number Placeholder 0"/>
           <p:cNvSpPr>
             <a:spLocks noGrp="1"/>
           </p:cNvSpPr>
@@ -12034,7 +12157,7 @@
           </a:prstGeom>
           <a:extLst>
             <a:ext uri="{C572A759-6A51-4108-AA02-DFA0A04FC94B}">
-              <ma14:wrappingTextBoxFlag xmlns:ma14="http://schemas.microsoft.com/office/mac/drawingml/2011/main" val="0"/>
+              <ma14:wrappingTextBoxFlag xmlns:ma14="http://schemas.microsoft.com/office/mac/drawingml/2011/main" xmlns="" val="0"/>
             </a:ext>
           </a:extLst>
         </p:spPr>
@@ -12052,7 +12175,7 @@
           <a:p>
             <a:pPr algn="r"/>
             <a:fld id="{F7021451-1387-4CA6-816F-3879F97B5CBC}" type="slidenum">
-              <a:rPr b="0" lang="en-US"/>
+              <a:rPr lang="en-US" b="0"/>
               <a:t>6</a:t>
             </a:fld>
             <a:endParaRPr lang="en-US"/>
@@ -12087,9 +12210,11 @@
       <p:sp>
         <p:nvSpPr>
           <p:cNvPr id="2" name="Text 0"/>
-          <p:cNvSpPr/>
+          <p:cNvSpPr>
+            <a:spLocks noGrp="1"/>
+          </p:cNvSpPr>
           <p:nvPr>
-            <p:ph idx="100" type="title" hasCustomPrompt="1"/>
+            <p:ph type="title" idx="100" hasCustomPrompt="1"/>
           </p:nvPr>
         </p:nvSpPr>
         <p:spPr>
@@ -12107,7 +12232,7 @@
           <a:bodyPr wrap="square" lIns="0" tIns="0" rIns="0" bIns="0" rtlCol="0" anchor="ctr"/>
           <a:lstStyle/>
           <a:p>
-            <a:pPr algn="l" indent="0" marL="0">
+            <a:pPr marL="0" indent="0" algn="l">
               <a:buNone/>
             </a:pPr>
             <a:r>
@@ -12143,7 +12268,7 @@
           <a:bodyPr wrap="square" lIns="0" tIns="0" rIns="0" bIns="0" rtlCol="0" anchor="t"/>
           <a:lstStyle/>
           <a:p>
-            <a:pPr indent="0" marL="0">
+            <a:pPr marL="0" indent="0">
               <a:buNone/>
             </a:pPr>
             <a:r>
@@ -12160,14 +12285,14 @@
       </p:sp>
       <p:pic>
         <p:nvPicPr>
-          <p:cNvPr id="4" name="Схема трёх уровней" descr="/home/user/invest-project-eval/docs/img/b2-levels.png">    </p:cNvPr>
+          <p:cNvPr id="4" name="Схема трёх уровней" descr="/home/user/invest-project-eval/docs/img/b2-levels.png"/>
           <p:cNvPicPr>
             <a:picLocks noChangeAspect="1"/>
           </p:cNvPicPr>
           <p:nvPr/>
         </p:nvPicPr>
         <p:blipFill>
-          <a:blip r:embed="rId1"/>
+          <a:blip r:embed="rId3"/>
           <a:stretch>
             <a:fillRect/>
           </a:stretch>
@@ -12208,6 +12333,13 @@
             <a:prstDash val="solid"/>
           </a:ln>
         </p:spPr>
+        <p:txBody>
+          <a:bodyPr/>
+          <a:lstStyle/>
+          <a:p>
+            <a:endParaRPr lang="ru-RU"/>
+          </a:p>
+        </p:txBody>
       </p:sp>
       <p:sp>
         <p:nvSpPr>
@@ -12230,7 +12362,7 @@
           <a:bodyPr wrap="square" lIns="0" tIns="0" rIns="0" bIns="0" rtlCol="0" anchor="ctr"/>
           <a:lstStyle/>
           <a:p>
-            <a:pPr indent="0" marL="0">
+            <a:pPr marL="0" indent="0">
               <a:buNone/>
             </a:pPr>
             <a:r>
@@ -12266,7 +12398,7 @@
           <a:bodyPr wrap="square" lIns="0" tIns="0" rIns="0" bIns="0" rtlCol="0" anchor="t"/>
           <a:lstStyle/>
           <a:p>
-            <a:pPr indent="0" marL="0">
+            <a:pPr marL="0" indent="0">
               <a:buNone/>
             </a:pPr>
             <a:r>
@@ -12302,7 +12434,7 @@
           <a:bodyPr wrap="square" lIns="0" tIns="0" rIns="0" bIns="0" rtlCol="0" anchor="t"/>
           <a:lstStyle/>
           <a:p>
-            <a:pPr indent="0" marL="0">
+            <a:pPr marL="0" indent="0">
               <a:buNone/>
             </a:pPr>
             <a:r>
@@ -12343,6 +12475,13 @@
             <a:prstDash val="solid"/>
           </a:ln>
         </p:spPr>
+        <p:txBody>
+          <a:bodyPr/>
+          <a:lstStyle/>
+          <a:p>
+            <a:endParaRPr lang="ru-RU"/>
+          </a:p>
+        </p:txBody>
       </p:sp>
       <p:sp>
         <p:nvSpPr>
@@ -12365,7 +12504,7 @@
           <a:bodyPr wrap="square" lIns="0" tIns="0" rIns="0" bIns="0" rtlCol="0" anchor="ctr"/>
           <a:lstStyle/>
           <a:p>
-            <a:pPr indent="0" marL="0">
+            <a:pPr marL="0" indent="0">
               <a:buNone/>
             </a:pPr>
             <a:r>
@@ -12401,7 +12540,7 @@
           <a:bodyPr wrap="square" lIns="0" tIns="0" rIns="0" bIns="0" rtlCol="0" anchor="t"/>
           <a:lstStyle/>
           <a:p>
-            <a:pPr indent="0" marL="0">
+            <a:pPr marL="0" indent="0">
               <a:buNone/>
             </a:pPr>
             <a:r>
@@ -12437,7 +12576,7 @@
           <a:bodyPr wrap="square" lIns="0" tIns="0" rIns="0" bIns="0" rtlCol="0" anchor="t"/>
           <a:lstStyle/>
           <a:p>
-            <a:pPr indent="0" marL="0">
+            <a:pPr marL="0" indent="0">
               <a:buNone/>
             </a:pPr>
             <a:r>
@@ -12478,6 +12617,13 @@
             <a:prstDash val="solid"/>
           </a:ln>
         </p:spPr>
+        <p:txBody>
+          <a:bodyPr/>
+          <a:lstStyle/>
+          <a:p>
+            <a:endParaRPr lang="ru-RU"/>
+          </a:p>
+        </p:txBody>
       </p:sp>
       <p:sp>
         <p:nvSpPr>
@@ -12500,7 +12646,7 @@
           <a:bodyPr wrap="square" lIns="0" tIns="0" rIns="0" bIns="0" rtlCol="0" anchor="ctr"/>
           <a:lstStyle/>
           <a:p>
-            <a:pPr indent="0" marL="0">
+            <a:pPr marL="0" indent="0">
               <a:buNone/>
             </a:pPr>
             <a:r>
@@ -12536,7 +12682,7 @@
           <a:bodyPr wrap="square" lIns="0" tIns="0" rIns="0" bIns="0" rtlCol="0" anchor="t"/>
           <a:lstStyle/>
           <a:p>
-            <a:pPr indent="0" marL="0">
+            <a:pPr marL="0" indent="0">
               <a:buNone/>
             </a:pPr>
             <a:r>
@@ -12572,7 +12718,7 @@
           <a:bodyPr wrap="square" lIns="0" tIns="0" rIns="0" bIns="0" rtlCol="0" anchor="t"/>
           <a:lstStyle/>
           <a:p>
-            <a:pPr indent="0" marL="0">
+            <a:pPr marL="0" indent="0">
               <a:buNone/>
             </a:pPr>
             <a:r>
@@ -12607,7 +12753,7 @@
           </a:prstGeom>
           <a:extLst>
             <a:ext uri="{C572A759-6A51-4108-AA02-DFA0A04FC94B}">
-              <ma14:wrappingTextBoxFlag xmlns:ma14="http://schemas.microsoft.com/office/mac/drawingml/2011/main" val="0"/>
+              <ma14:wrappingTextBoxFlag xmlns:ma14="http://schemas.microsoft.com/office/mac/drawingml/2011/main" xmlns="" val="0"/>
             </a:ext>
           </a:extLst>
         </p:spPr>
@@ -12625,7 +12771,7 @@
           <a:p>
             <a:pPr algn="r"/>
             <a:fld id="{F7021451-1387-4CA6-816F-3879F97B5CBC}" type="slidenum">
-              <a:rPr b="0" lang="en-US"/>
+              <a:rPr lang="en-US" b="0"/>
               <a:t>7</a:t>
             </a:fld>
             <a:endParaRPr lang="en-US"/>
@@ -12660,9 +12806,11 @@
       <p:sp>
         <p:nvSpPr>
           <p:cNvPr id="2" name="Text 0"/>
-          <p:cNvSpPr/>
+          <p:cNvSpPr>
+            <a:spLocks noGrp="1"/>
+          </p:cNvSpPr>
           <p:nvPr>
-            <p:ph idx="100" type="title" hasCustomPrompt="1"/>
+            <p:ph type="title" idx="100" hasCustomPrompt="1"/>
           </p:nvPr>
         </p:nvSpPr>
         <p:spPr>
@@ -12680,7 +12828,7 @@
           <a:bodyPr wrap="square" lIns="0" tIns="0" rIns="0" bIns="0" rtlCol="0" anchor="ctr"/>
           <a:lstStyle/>
           <a:p>
-            <a:pPr algn="l" indent="0" marL="0">
+            <a:pPr marL="0" indent="0" algn="l">
               <a:buNone/>
             </a:pPr>
             <a:r>
@@ -12697,14 +12845,14 @@
       </p:sp>
       <p:pic>
         <p:nvPicPr>
-          <p:cNvPr id="3" name="Схема структуры модели" descr="/home/user/invest-project-eval/docs/img/b3-model.png">    </p:cNvPr>
+          <p:cNvPr id="3" name="Схема структуры модели" descr="/home/user/invest-project-eval/docs/img/b3-model.png"/>
           <p:cNvPicPr>
             <a:picLocks noChangeAspect="1"/>
           </p:cNvPicPr>
           <p:nvPr/>
         </p:nvPicPr>
         <p:blipFill>
-          <a:blip r:embed="rId1"/>
+          <a:blip r:embed="rId3"/>
           <a:stretch>
             <a:fillRect/>
           </a:stretch>
@@ -12740,7 +12888,7 @@
           <a:bodyPr wrap="square" lIns="0" tIns="0" rIns="0" bIns="0" rtlCol="0" anchor="t"/>
           <a:lstStyle/>
           <a:p>
-            <a:pPr algn="ctr" indent="0" marL="0">
+            <a:pPr marL="0" indent="0" algn="ctr">
               <a:buNone/>
             </a:pPr>
             <a:r>
@@ -12757,14 +12905,14 @@
       </p:sp>
       <p:pic>
         <p:nvPicPr>
-          <p:cNvPr id="5" name="Карточки показателей" descr="/tmp/claude-0/-home-user-invest-project-eval/cfb2f9eb-1ed1-598a-ae85-aefec36c7a96/scratchpad/shots/kpis.png">    </p:cNvPr>
+          <p:cNvPr id="5" name="Карточки показателей" descr="/tmp/claude-0/-home-user-invest-project-eval/cfb2f9eb-1ed1-598a-ae85-aefec36c7a96/scratchpad/shots/kpis.png"/>
           <p:cNvPicPr>
             <a:picLocks noChangeAspect="1"/>
           </p:cNvPicPr>
           <p:nvPr/>
         </p:nvPicPr>
         <p:blipFill>
-          <a:blip r:embed="rId2"/>
+          <a:blip r:embed="rId4"/>
           <a:stretch>
             <a:fillRect/>
           </a:stretch>
@@ -12778,7 +12926,7 @@
             <a:avLst/>
           </a:prstGeom>
           <a:effectLst>
-            <a:outerShdw sx="100000" sy="100000" kx="0" ky="0" algn="bl" rotWithShape="0" blurRad="76200" dist="25400" dir="2700000">
+            <a:outerShdw blurRad="76200" dist="25400" dir="2700000" algn="bl" rotWithShape="0">
               <a:srgbClr val="000000">
                 <a:alpha val="18000"/>
               </a:srgbClr>
@@ -12807,7 +12955,7 @@
           <a:bodyPr wrap="square" lIns="0" tIns="0" rIns="0" bIns="0" rtlCol="0" anchor="t"/>
           <a:lstStyle/>
           <a:p>
-            <a:pPr indent="0" marL="0">
+            <a:pPr marL="0" indent="0">
               <a:buNone/>
             </a:pPr>
             <a:r>
@@ -12843,7 +12991,7 @@
           <a:bodyPr wrap="square" lIns="0" tIns="0" rIns="0" bIns="0" rtlCol="0" anchor="t"/>
           <a:lstStyle/>
           <a:p>
-            <a:pPr indent="0" marL="0">
+            <a:pPr marL="0" indent="0">
               <a:buNone/>
             </a:pPr>
             <a:r>
@@ -12854,12 +13002,6 @@
               </a:rPr>
               <a:t>NPV — </a:t>
             </a:r>
-            <a:pPr indent="0" marL="0">
-              <a:spcAft>
-                <a:spcPts val="700"/>
-              </a:spcAft>
-              <a:buNone/>
-            </a:pPr>
             <a:r>
               <a:rPr lang="en-US" sz="1300" dirty="0">
                 <a:solidFill>
@@ -12871,7 +13013,7 @@
             <a:endParaRPr lang="en-US" sz="1300" dirty="0"/>
           </a:p>
           <a:p>
-            <a:pPr indent="0" marL="0">
+            <a:pPr marL="0" indent="0">
               <a:buNone/>
             </a:pPr>
             <a:r>
@@ -12882,12 +13024,6 @@
               </a:rPr>
               <a:t>IRR — </a:t>
             </a:r>
-            <a:pPr indent="0" marL="0">
-              <a:spcAft>
-                <a:spcPts val="700"/>
-              </a:spcAft>
-              <a:buNone/>
-            </a:pPr>
             <a:r>
               <a:rPr lang="en-US" sz="1300" dirty="0">
                 <a:solidFill>
@@ -12899,7 +13035,7 @@
             <a:endParaRPr lang="en-US" sz="1300" dirty="0"/>
           </a:p>
           <a:p>
-            <a:pPr indent="0" marL="0">
+            <a:pPr marL="0" indent="0">
               <a:buNone/>
             </a:pPr>
             <a:r>
@@ -12910,12 +13046,6 @@
               </a:rPr>
               <a:t>Срок окупаемости — </a:t>
             </a:r>
-            <a:pPr indent="0" marL="0">
-              <a:spcAft>
-                <a:spcPts val="700"/>
-              </a:spcAft>
-              <a:buNone/>
-            </a:pPr>
             <a:r>
               <a:rPr lang="en-US" sz="1300" dirty="0">
                 <a:solidFill>
@@ -12927,7 +13057,7 @@
             <a:endParaRPr lang="en-US" sz="1300" dirty="0"/>
           </a:p>
           <a:p>
-            <a:pPr indent="0" marL="0">
+            <a:pPr marL="0" indent="0">
               <a:buNone/>
             </a:pPr>
             <a:r>
@@ -12938,12 +13068,6 @@
               </a:rPr>
               <a:t>Потребность в деньгах — </a:t>
             </a:r>
-            <a:pPr indent="0" marL="0">
-              <a:spcAft>
-                <a:spcPts val="700"/>
-              </a:spcAft>
-              <a:buNone/>
-            </a:pPr>
             <a:r>
               <a:rPr lang="en-US" sz="1300" dirty="0">
                 <a:solidFill>
@@ -12955,7 +13079,7 @@
             <a:endParaRPr lang="en-US" sz="1300" dirty="0"/>
           </a:p>
           <a:p>
-            <a:pPr indent="0" marL="0">
+            <a:pPr marL="0" indent="0">
               <a:buNone/>
             </a:pPr>
             <a:r>
@@ -12966,12 +13090,6 @@
               </a:rPr>
               <a:t>DSCR — </a:t>
             </a:r>
-            <a:pPr indent="0" marL="0">
-              <a:spcAft>
-                <a:spcPts val="700"/>
-              </a:spcAft>
-              <a:buNone/>
-            </a:pPr>
             <a:r>
               <a:rPr lang="en-US" sz="1300" dirty="0">
                 <a:solidFill>
@@ -13004,7 +13122,7 @@
           </a:prstGeom>
           <a:extLst>
             <a:ext uri="{C572A759-6A51-4108-AA02-DFA0A04FC94B}">
-              <ma14:wrappingTextBoxFlag xmlns:ma14="http://schemas.microsoft.com/office/mac/drawingml/2011/main" val="0"/>
+              <ma14:wrappingTextBoxFlag xmlns:ma14="http://schemas.microsoft.com/office/mac/drawingml/2011/main" xmlns="" val="0"/>
             </a:ext>
           </a:extLst>
         </p:spPr>
@@ -13022,7 +13140,7 @@
           <a:p>
             <a:pPr algn="r"/>
             <a:fld id="{F7021451-1387-4CA6-816F-3879F97B5CBC}" type="slidenum">
-              <a:rPr b="0" lang="en-US"/>
+              <a:rPr lang="en-US" b="0"/>
               <a:t>8</a:t>
             </a:fld>
             <a:endParaRPr lang="en-US"/>
@@ -13057,9 +13175,11 @@
       <p:sp>
         <p:nvSpPr>
           <p:cNvPr id="2" name="Text 0"/>
-          <p:cNvSpPr/>
+          <p:cNvSpPr>
+            <a:spLocks noGrp="1"/>
+          </p:cNvSpPr>
           <p:nvPr>
-            <p:ph idx="100" type="title" hasCustomPrompt="1"/>
+            <p:ph type="title" idx="100" hasCustomPrompt="1"/>
           </p:nvPr>
         </p:nvSpPr>
         <p:spPr>
@@ -13077,7 +13197,7 @@
           <a:bodyPr wrap="square" lIns="0" tIns="0" rIns="0" bIns="0" rtlCol="0" anchor="ctr"/>
           <a:lstStyle/>
           <a:p>
-            <a:pPr algn="l" indent="0" marL="0">
+            <a:pPr marL="0" indent="0" algn="l">
               <a:buNone/>
             </a:pPr>
             <a:r>
@@ -13094,14 +13214,14 @@
       </p:sp>
       <p:pic>
         <p:nvPicPr>
-          <p:cNvPr id="3" name="Схема методов анализа рисков" descr="/home/user/invest-project-eval/docs/img/b4-risks.png">    </p:cNvPr>
+          <p:cNvPr id="3" name="Схема методов анализа рисков" descr="/home/user/invest-project-eval/docs/img/b4-risks.png"/>
           <p:cNvPicPr>
             <a:picLocks noChangeAspect="1"/>
           </p:cNvPicPr>
           <p:nvPr/>
         </p:nvPicPr>
         <p:blipFill>
-          <a:blip r:embed="rId1"/>
+          <a:blip r:embed="rId3"/>
           <a:stretch>
             <a:fillRect/>
           </a:stretch>
@@ -13118,14 +13238,14 @@
       </p:pic>
       <p:pic>
         <p:nvPicPr>
-          <p:cNvPr id="4" name="Результат Монте-Карло" descr="/tmp/claude-0/-home-user-invest-project-eval/cfb2f9eb-1ed1-598a-ae85-aefec36c7a96/scratchpad/shots/montecarlo.png">    </p:cNvPr>
+          <p:cNvPr id="4" name="Результат Монте-Карло" descr="/tmp/claude-0/-home-user-invest-project-eval/cfb2f9eb-1ed1-598a-ae85-aefec36c7a96/scratchpad/shots/montecarlo.png"/>
           <p:cNvPicPr>
             <a:picLocks noChangeAspect="1"/>
           </p:cNvPicPr>
           <p:nvPr/>
         </p:nvPicPr>
         <p:blipFill>
-          <a:blip r:embed="rId2"/>
+          <a:blip r:embed="rId4"/>
           <a:stretch>
             <a:fillRect/>
           </a:stretch>
@@ -13139,7 +13259,7 @@
             <a:avLst/>
           </a:prstGeom>
           <a:effectLst>
-            <a:outerShdw sx="100000" sy="100000" kx="0" ky="0" algn="bl" rotWithShape="0" blurRad="76200" dist="25400" dir="2700000">
+            <a:outerShdw blurRad="76200" dist="25400" dir="2700000" algn="bl" rotWithShape="0">
               <a:srgbClr val="000000">
                 <a:alpha val="18000"/>
               </a:srgbClr>
@@ -13168,7 +13288,7 @@
           <a:bodyPr wrap="square" lIns="0" tIns="0" rIns="0" bIns="0" rtlCol="0" anchor="t"/>
           <a:lstStyle/>
           <a:p>
-            <a:pPr algn="ctr" indent="0" marL="0">
+            <a:pPr marL="0" indent="0" algn="ctr">
               <a:buNone/>
             </a:pPr>
             <a:r>
@@ -13209,6 +13329,13 @@
             <a:prstDash val="solid"/>
           </a:ln>
         </p:spPr>
+        <p:txBody>
+          <a:bodyPr/>
+          <a:lstStyle/>
+          <a:p>
+            <a:endParaRPr lang="ru-RU"/>
+          </a:p>
+        </p:txBody>
       </p:sp>
       <p:sp>
         <p:nvSpPr>
@@ -13218,7 +13345,7 @@
         </p:nvSpPr>
         <p:spPr>
           <a:xfrm>
-            <a:off x="6080760" y="1572768"/>
+            <a:off x="6080760" y="1388697"/>
             <a:ext cx="5333695" cy="502920"/>
           </a:xfrm>
           <a:prstGeom prst="rect">
@@ -13231,7 +13358,7 @@
           <a:bodyPr wrap="square" lIns="0" tIns="0" rIns="0" bIns="0" rtlCol="0" anchor="ctr"/>
           <a:lstStyle/>
           <a:p>
-            <a:pPr indent="0" marL="0">
+            <a:pPr marL="0" indent="0">
               <a:buNone/>
             </a:pPr>
             <a:r>
@@ -13254,7 +13381,7 @@
         </p:nvSpPr>
         <p:spPr>
           <a:xfrm>
-            <a:off x="6080760" y="2148840"/>
+            <a:off x="6080760" y="1964769"/>
             <a:ext cx="5333695" cy="182880"/>
           </a:xfrm>
           <a:prstGeom prst="rect">
@@ -13267,7 +13394,7 @@
           <a:bodyPr wrap="square" lIns="0" tIns="0" rIns="0" bIns="0" rtlCol="0" anchor="t"/>
           <a:lstStyle/>
           <a:p>
-            <a:pPr indent="0" marL="0">
+            <a:pPr marL="0" indent="0">
               <a:buNone/>
             </a:pPr>
             <a:r>
@@ -13308,6 +13435,13 @@
             <a:prstDash val="solid"/>
           </a:ln>
         </p:spPr>
+        <p:txBody>
+          <a:bodyPr/>
+          <a:lstStyle/>
+          <a:p>
+            <a:endParaRPr lang="ru-RU"/>
+          </a:p>
+        </p:txBody>
       </p:sp>
       <p:sp>
         <p:nvSpPr>
@@ -13317,7 +13451,7 @@
         </p:nvSpPr>
         <p:spPr>
           <a:xfrm>
-            <a:off x="6080760" y="2788920"/>
+            <a:off x="6080760" y="2604849"/>
             <a:ext cx="5333695" cy="502920"/>
           </a:xfrm>
           <a:prstGeom prst="rect">
@@ -13330,7 +13464,7 @@
           <a:bodyPr wrap="square" lIns="0" tIns="0" rIns="0" bIns="0" rtlCol="0" anchor="ctr"/>
           <a:lstStyle/>
           <a:p>
-            <a:pPr indent="0" marL="0">
+            <a:pPr marL="0" indent="0">
               <a:buNone/>
             </a:pPr>
             <a:r>
@@ -13353,7 +13487,7 @@
         </p:nvSpPr>
         <p:spPr>
           <a:xfrm>
-            <a:off x="6080760" y="3364992"/>
+            <a:off x="6080760" y="3180921"/>
             <a:ext cx="5333695" cy="182880"/>
           </a:xfrm>
           <a:prstGeom prst="rect">
@@ -13366,7 +13500,7 @@
           <a:bodyPr wrap="square" lIns="0" tIns="0" rIns="0" bIns="0" rtlCol="0" anchor="t"/>
           <a:lstStyle/>
           <a:p>
-            <a:pPr indent="0" marL="0">
+            <a:pPr marL="0" indent="0">
               <a:buNone/>
             </a:pPr>
             <a:r>
@@ -13407,6 +13541,13 @@
             <a:prstDash val="solid"/>
           </a:ln>
         </p:spPr>
+        <p:txBody>
+          <a:bodyPr/>
+          <a:lstStyle/>
+          <a:p>
+            <a:endParaRPr lang="ru-RU"/>
+          </a:p>
+        </p:txBody>
       </p:sp>
       <p:sp>
         <p:nvSpPr>
@@ -13416,7 +13557,7 @@
         </p:nvSpPr>
         <p:spPr>
           <a:xfrm>
-            <a:off x="6080760" y="4005072"/>
+            <a:off x="6080760" y="3821001"/>
             <a:ext cx="5333695" cy="502920"/>
           </a:xfrm>
           <a:prstGeom prst="rect">
@@ -13429,7 +13570,7 @@
           <a:bodyPr wrap="square" lIns="0" tIns="0" rIns="0" bIns="0" rtlCol="0" anchor="ctr"/>
           <a:lstStyle/>
           <a:p>
-            <a:pPr indent="0" marL="0">
+            <a:pPr marL="0" indent="0">
               <a:buNone/>
             </a:pPr>
             <a:r>
@@ -13452,7 +13593,7 @@
         </p:nvSpPr>
         <p:spPr>
           <a:xfrm>
-            <a:off x="6080760" y="4581144"/>
+            <a:off x="6080760" y="4397073"/>
             <a:ext cx="5333695" cy="182880"/>
           </a:xfrm>
           <a:prstGeom prst="rect">
@@ -13465,7 +13606,7 @@
           <a:bodyPr wrap="square" lIns="0" tIns="0" rIns="0" bIns="0" rtlCol="0" anchor="t"/>
           <a:lstStyle/>
           <a:p>
-            <a:pPr indent="0" marL="0">
+            <a:pPr marL="0" indent="0">
               <a:buNone/>
             </a:pPr>
             <a:r>
@@ -13506,6 +13647,13 @@
             <a:prstDash val="solid"/>
           </a:ln>
         </p:spPr>
+        <p:txBody>
+          <a:bodyPr/>
+          <a:lstStyle/>
+          <a:p>
+            <a:endParaRPr lang="ru-RU"/>
+          </a:p>
+        </p:txBody>
       </p:sp>
       <p:sp>
         <p:nvSpPr>
@@ -13515,7 +13663,7 @@
         </p:nvSpPr>
         <p:spPr>
           <a:xfrm>
-            <a:off x="6080760" y="5221224"/>
+            <a:off x="6080760" y="5037153"/>
             <a:ext cx="5333695" cy="502920"/>
           </a:xfrm>
           <a:prstGeom prst="rect">
@@ -13528,7 +13676,7 @@
           <a:bodyPr wrap="square" lIns="0" tIns="0" rIns="0" bIns="0" rtlCol="0" anchor="ctr"/>
           <a:lstStyle/>
           <a:p>
-            <a:pPr indent="0" marL="0">
+            <a:pPr marL="0" indent="0">
               <a:buNone/>
             </a:pPr>
             <a:r>
@@ -13551,7 +13699,7 @@
         </p:nvSpPr>
         <p:spPr>
           <a:xfrm>
-            <a:off x="6080760" y="5797296"/>
+            <a:off x="6080760" y="5613225"/>
             <a:ext cx="5333695" cy="182880"/>
           </a:xfrm>
           <a:prstGeom prst="rect">
@@ -13564,7 +13712,7 @@
           <a:bodyPr wrap="square" lIns="0" tIns="0" rIns="0" bIns="0" rtlCol="0" anchor="t"/>
           <a:lstStyle/>
           <a:p>
-            <a:pPr indent="0" marL="0">
+            <a:pPr marL="0" indent="0">
               <a:buNone/>
             </a:pPr>
             <a:r>
@@ -13599,7 +13747,7 @@
           </a:prstGeom>
           <a:extLst>
             <a:ext uri="{C572A759-6A51-4108-AA02-DFA0A04FC94B}">
-              <ma14:wrappingTextBoxFlag xmlns:ma14="http://schemas.microsoft.com/office/mac/drawingml/2011/main" val="0"/>
+              <ma14:wrappingTextBoxFlag xmlns:ma14="http://schemas.microsoft.com/office/mac/drawingml/2011/main" xmlns="" val="0"/>
             </a:ext>
           </a:extLst>
         </p:spPr>
@@ -13617,7 +13765,7 @@
           <a:p>
             <a:pPr algn="r"/>
             <a:fld id="{F7021451-1387-4CA6-816F-3879F97B5CBC}" type="slidenum">
-              <a:rPr b="0" lang="en-US"/>
+              <a:rPr lang="en-US" b="0"/>
               <a:t>9</a:t>
             </a:fld>
             <a:endParaRPr lang="en-US"/>
@@ -13925,4 +14073,319 @@
     </a:ext>
   </a:extLst>
 </a:theme>
+</file>
+
+<file path=ppt/theme/theme2.xml><?xml version="1.0" encoding="utf-8"?>
+<a:theme xmlns:a="http://schemas.openxmlformats.org/drawingml/2006/main" name="Тема Office">
+  <a:themeElements>
+    <a:clrScheme name="Стандартная">
+      <a:dk1>
+        <a:sysClr val="windowText" lastClr="000000"/>
+      </a:dk1>
+      <a:lt1>
+        <a:sysClr val="window" lastClr="FFFFFF"/>
+      </a:lt1>
+      <a:dk2>
+        <a:srgbClr val="0E2841"/>
+      </a:dk2>
+      <a:lt2>
+        <a:srgbClr val="E8E8E8"/>
+      </a:lt2>
+      <a:accent1>
+        <a:srgbClr val="156082"/>
+      </a:accent1>
+      <a:accent2>
+        <a:srgbClr val="E97132"/>
+      </a:accent2>
+      <a:accent3>
+        <a:srgbClr val="196B24"/>
+      </a:accent3>
+      <a:accent4>
+        <a:srgbClr val="0F9ED5"/>
+      </a:accent4>
+      <a:accent5>
+        <a:srgbClr val="A02B93"/>
+      </a:accent5>
+      <a:accent6>
+        <a:srgbClr val="4EA72E"/>
+      </a:accent6>
+      <a:hlink>
+        <a:srgbClr val="467886"/>
+      </a:hlink>
+      <a:folHlink>
+        <a:srgbClr val="96607D"/>
+      </a:folHlink>
+    </a:clrScheme>
+    <a:fontScheme name="Стандартная">
+      <a:majorFont>
+        <a:latin typeface="Aptos Display" panose="02110004020202020204"/>
+        <a:ea typeface=""/>
+        <a:cs typeface=""/>
+        <a:font script="Jpan" typeface="游ゴシック Light"/>
+        <a:font script="Hang" typeface="맑은 고딕"/>
+        <a:font script="Hans" typeface="等线 Light"/>
+        <a:font script="Hant" typeface="新細明體"/>
+        <a:font script="Arab" typeface="Times New Roman"/>
+        <a:font script="Hebr" typeface="Times New Roman"/>
+        <a:font script="Thai" typeface="Angsana New"/>
+        <a:font script="Ethi" typeface="Nyala"/>
+        <a:font script="Beng" typeface="Vrinda"/>
+        <a:font script="Gujr" typeface="Shruti"/>
+        <a:font script="Khmr" typeface="MoolBoran"/>
+        <a:font script="Knda" typeface="Tunga"/>
+        <a:font script="Guru" typeface="Raavi"/>
+        <a:font script="Cans" typeface="Euphemia"/>
+        <a:font script="Cher" typeface="Plantagenet Cherokee"/>
+        <a:font script="Yiii" typeface="Microsoft Yi Baiti"/>
+        <a:font script="Tibt" typeface="Microsoft Himalaya"/>
+        <a:font script="Thaa" typeface="MV Boli"/>
+        <a:font script="Deva" typeface="Mangal"/>
+        <a:font script="Telu" typeface="Gautami"/>
+        <a:font script="Taml" typeface="Latha"/>
+        <a:font script="Syrc" typeface="Estrangelo Edessa"/>
+        <a:font script="Orya" typeface="Kalinga"/>
+        <a:font script="Mlym" typeface="Kartika"/>
+        <a:font script="Laoo" typeface="DokChampa"/>
+        <a:font script="Sinh" typeface="Iskoola Pota"/>
+        <a:font script="Mong" typeface="Mongolian Baiti"/>
+        <a:font script="Viet" typeface="Times New Roman"/>
+        <a:font script="Uigh" typeface="Microsoft Uighur"/>
+        <a:font script="Geor" typeface="Sylfaen"/>
+        <a:font script="Armn" typeface="Arial"/>
+        <a:font script="Bugi" typeface="Leelawadee UI"/>
+        <a:font script="Bopo" typeface="Microsoft JhengHei"/>
+        <a:font script="Java" typeface="Javanese Text"/>
+        <a:font script="Lisu" typeface="Segoe UI"/>
+        <a:font script="Mymr" typeface="Myanmar Text"/>
+        <a:font script="Nkoo" typeface="Ebrima"/>
+        <a:font script="Olck" typeface="Nirmala UI"/>
+        <a:font script="Osma" typeface="Ebrima"/>
+        <a:font script="Phag" typeface="Phagspa"/>
+        <a:font script="Syrn" typeface="Estrangelo Edessa"/>
+        <a:font script="Syrj" typeface="Estrangelo Edessa"/>
+        <a:font script="Syre" typeface="Estrangelo Edessa"/>
+        <a:font script="Sora" typeface="Nirmala UI"/>
+        <a:font script="Tale" typeface="Microsoft Tai Le"/>
+        <a:font script="Talu" typeface="Microsoft New Tai Lue"/>
+        <a:font script="Tfng" typeface="Ebrima"/>
+      </a:majorFont>
+      <a:minorFont>
+        <a:latin typeface="Aptos" panose="02110004020202020204"/>
+        <a:ea typeface=""/>
+        <a:cs typeface=""/>
+        <a:font script="Jpan" typeface="游ゴシック"/>
+        <a:font script="Hang" typeface="맑은 고딕"/>
+        <a:font script="Hans" typeface="等线"/>
+        <a:font script="Hant" typeface="新細明體"/>
+        <a:font script="Arab" typeface="Arial"/>
+        <a:font script="Hebr" typeface="Arial"/>
+        <a:font script="Thai" typeface="Cordia New"/>
+        <a:font script="Ethi" typeface="Nyala"/>
+        <a:font script="Beng" typeface="Vrinda"/>
+        <a:font script="Gujr" typeface="Shruti"/>
+        <a:font script="Khmr" typeface="DaunPenh"/>
+        <a:font script="Knda" typeface="Tunga"/>
+        <a:font script="Guru" typeface="Raavi"/>
+        <a:font script="Cans" typeface="Euphemia"/>
+        <a:font script="Cher" typeface="Plantagenet Cherokee"/>
+        <a:font script="Yiii" typeface="Microsoft Yi Baiti"/>
+        <a:font script="Tibt" typeface="Microsoft Himalaya"/>
+        <a:font script="Thaa" typeface="MV Boli"/>
+        <a:font script="Deva" typeface="Mangal"/>
+        <a:font script="Telu" typeface="Gautami"/>
+        <a:font script="Taml" typeface="Latha"/>
+        <a:font script="Syrc" typeface="Estrangelo Edessa"/>
+        <a:font script="Orya" typeface="Kalinga"/>
+        <a:font script="Mlym" typeface="Kartika"/>
+        <a:font script="Laoo" typeface="DokChampa"/>
+        <a:font script="Sinh" typeface="Iskoola Pota"/>
+        <a:font script="Mong" typeface="Mongolian Baiti"/>
+        <a:font script="Viet" typeface="Arial"/>
+        <a:font script="Uigh" typeface="Microsoft Uighur"/>
+        <a:font script="Geor" typeface="Sylfaen"/>
+        <a:font script="Armn" typeface="Arial"/>
+        <a:font script="Bugi" typeface="Leelawadee UI"/>
+        <a:font script="Bopo" typeface="Microsoft JhengHei"/>
+        <a:font script="Java" typeface="Javanese Text"/>
+        <a:font script="Lisu" typeface="Segoe UI"/>
+        <a:font script="Mymr" typeface="Myanmar Text"/>
+        <a:font script="Nkoo" typeface="Ebrima"/>
+        <a:font script="Olck" typeface="Nirmala UI"/>
+        <a:font script="Osma" typeface="Ebrima"/>
+        <a:font script="Phag" typeface="Phagspa"/>
+        <a:font script="Syrn" typeface="Estrangelo Edessa"/>
+        <a:font script="Syrj" typeface="Estrangelo Edessa"/>
+        <a:font script="Syre" typeface="Estrangelo Edessa"/>
+        <a:font script="Sora" typeface="Nirmala UI"/>
+        <a:font script="Tale" typeface="Microsoft Tai Le"/>
+        <a:font script="Talu" typeface="Microsoft New Tai Lue"/>
+        <a:font script="Tfng" typeface="Ebrima"/>
+      </a:minorFont>
+    </a:fontScheme>
+    <a:fmtScheme name="Стандартная">
+      <a:fillStyleLst>
+        <a:solidFill>
+          <a:schemeClr val="phClr"/>
+        </a:solidFill>
+        <a:gradFill rotWithShape="1">
+          <a:gsLst>
+            <a:gs pos="0">
+              <a:schemeClr val="phClr">
+                <a:lumMod val="110000"/>
+                <a:satMod val="105000"/>
+                <a:tint val="67000"/>
+              </a:schemeClr>
+            </a:gs>
+            <a:gs pos="50000">
+              <a:schemeClr val="phClr">
+                <a:lumMod val="105000"/>
+                <a:satMod val="103000"/>
+                <a:tint val="73000"/>
+              </a:schemeClr>
+            </a:gs>
+            <a:gs pos="100000">
+              <a:schemeClr val="phClr">
+                <a:lumMod val="105000"/>
+                <a:satMod val="109000"/>
+                <a:tint val="81000"/>
+              </a:schemeClr>
+            </a:gs>
+          </a:gsLst>
+          <a:lin ang="5400000" scaled="0"/>
+        </a:gradFill>
+        <a:gradFill rotWithShape="1">
+          <a:gsLst>
+            <a:gs pos="0">
+              <a:schemeClr val="phClr">
+                <a:satMod val="103000"/>
+                <a:lumMod val="102000"/>
+                <a:tint val="94000"/>
+              </a:schemeClr>
+            </a:gs>
+            <a:gs pos="50000">
+              <a:schemeClr val="phClr">
+                <a:satMod val="110000"/>
+                <a:lumMod val="100000"/>
+                <a:shade val="100000"/>
+              </a:schemeClr>
+            </a:gs>
+            <a:gs pos="100000">
+              <a:schemeClr val="phClr">
+                <a:lumMod val="99000"/>
+                <a:satMod val="120000"/>
+                <a:shade val="78000"/>
+              </a:schemeClr>
+            </a:gs>
+          </a:gsLst>
+          <a:lin ang="5400000" scaled="0"/>
+        </a:gradFill>
+      </a:fillStyleLst>
+      <a:lnStyleLst>
+        <a:ln w="12700" cap="flat" cmpd="sng" algn="ctr">
+          <a:solidFill>
+            <a:schemeClr val="phClr"/>
+          </a:solidFill>
+          <a:prstDash val="solid"/>
+          <a:miter lim="800000"/>
+        </a:ln>
+        <a:ln w="19050" cap="flat" cmpd="sng" algn="ctr">
+          <a:solidFill>
+            <a:schemeClr val="phClr"/>
+          </a:solidFill>
+          <a:prstDash val="solid"/>
+          <a:miter lim="800000"/>
+        </a:ln>
+        <a:ln w="25400" cap="flat" cmpd="sng" algn="ctr">
+          <a:solidFill>
+            <a:schemeClr val="phClr"/>
+          </a:solidFill>
+          <a:prstDash val="solid"/>
+          <a:miter lim="800000"/>
+        </a:ln>
+      </a:lnStyleLst>
+      <a:effectStyleLst>
+        <a:effectStyle>
+          <a:effectLst/>
+        </a:effectStyle>
+        <a:effectStyle>
+          <a:effectLst/>
+        </a:effectStyle>
+        <a:effectStyle>
+          <a:effectLst>
+            <a:outerShdw blurRad="57150" dist="19050" dir="5400000" algn="ctr" rotWithShape="0">
+              <a:srgbClr val="000000">
+                <a:alpha val="63000"/>
+              </a:srgbClr>
+            </a:outerShdw>
+          </a:effectLst>
+        </a:effectStyle>
+      </a:effectStyleLst>
+      <a:bgFillStyleLst>
+        <a:solidFill>
+          <a:schemeClr val="phClr"/>
+        </a:solidFill>
+        <a:solidFill>
+          <a:schemeClr val="phClr">
+            <a:tint val="95000"/>
+            <a:satMod val="170000"/>
+          </a:schemeClr>
+        </a:solidFill>
+        <a:gradFill rotWithShape="1">
+          <a:gsLst>
+            <a:gs pos="0">
+              <a:schemeClr val="phClr">
+                <a:tint val="93000"/>
+                <a:satMod val="150000"/>
+                <a:shade val="98000"/>
+                <a:lumMod val="102000"/>
+              </a:schemeClr>
+            </a:gs>
+            <a:gs pos="50000">
+              <a:schemeClr val="phClr">
+                <a:tint val="98000"/>
+                <a:satMod val="130000"/>
+                <a:shade val="90000"/>
+                <a:lumMod val="103000"/>
+              </a:schemeClr>
+            </a:gs>
+            <a:gs pos="100000">
+              <a:schemeClr val="phClr">
+                <a:shade val="63000"/>
+                <a:satMod val="120000"/>
+              </a:schemeClr>
+            </a:gs>
+          </a:gsLst>
+          <a:lin ang="5400000" scaled="0"/>
+        </a:gradFill>
+      </a:bgFillStyleLst>
+    </a:fmtScheme>
+  </a:themeElements>
+  <a:objectDefaults>
+    <a:lnDef>
+      <a:spPr/>
+      <a:bodyPr/>
+      <a:lstStyle/>
+      <a:style>
+        <a:lnRef idx="2">
+          <a:schemeClr val="accent1"/>
+        </a:lnRef>
+        <a:fillRef idx="0">
+          <a:schemeClr val="accent1"/>
+        </a:fillRef>
+        <a:effectRef idx="1">
+          <a:schemeClr val="accent1"/>
+        </a:effectRef>
+        <a:fontRef idx="minor">
+          <a:schemeClr val="tx1"/>
+        </a:fontRef>
+      </a:style>
+    </a:lnDef>
+  </a:objectDefaults>
+  <a:extraClrSchemeLst/>
+  <a:extLst>
+    <a:ext uri="{05A4C25C-085E-4340-85A3-A5531E510DB2}">
+      <thm15:themeFamily xmlns:thm15="http://schemas.microsoft.com/office/thememl/2012/main" name="Office Theme" id="{2E142A2C-CD16-42D6-873A-C26D2A0506FA}" vid="{1BDDFF52-6CD6-40A5-AB3C-68EB2F1E4D0A}"/>
+    </a:ext>
+  </a:extLst>
+</a:theme>
 </file>
--- a/docs/Презентация_сервиса.pptx
+++ b/docs/Презентация_сервиса.pptx
@@ -4,9 +4,6 @@
   <p:sldMasterIdLst>
     <p:sldMasterId id="2147483648" r:id="rId1"/>
   </p:sldMasterIdLst>
-  <p:notesMasterIdLst>
-    <p:notesMasterId r:id="rId18"/>
-  </p:notesMasterIdLst>
   <p:sldIdLst>
     <p:sldId id="256" r:id="rId2"/>
     <p:sldId id="257" r:id="rId3"/>
@@ -25,6 +22,9 @@
     <p:sldId id="270" r:id="rId16"/>
     <p:sldId id="271" r:id="rId17"/>
   </p:sldIdLst>
+  <p:notesMasterIdLst>
+    <p:notesMasterId r:id="rId18"/>
+  </p:notesMasterIdLst>
   <p:sldSz cx="12192000" cy="6858000"/>
   <p:notesSz cx="6858000" cy="12192000"/>
   <p:defaultTextStyle>
@@ -122,7 +122,7 @@
   <p:extLst>
     <p:ext uri="{521415D9-36F7-43E2-AB2F-B90AF26B5E84}">
       <p14:sectionLst xmlns:p14="http://schemas.microsoft.com/office/powerpoint/2010/main">
-        <p14:section name="Проблема" id="{6E83D9B0-5210-30B2-E15E-E5FE11E2F8A3}">
+        <p14:section name="Проблема" id="{a79511f4-7a81-9423-a1e8-41b71e0aee57}">
           <p14:sldIdLst>
             <p14:sldId id="256"/>
             <p14:sldId id="257"/>
@@ -130,7 +130,7 @@
             <p14:sldId id="259"/>
           </p14:sldIdLst>
         </p14:section>
-        <p14:section name="Решение" id="{E9669532-9F5A-A502-8269-0DC66B1A615C}">
+        <p14:section name="Решение" id="{a424403f-4f9c-dac8-f432-293ef4346c71}">
           <p14:sldIdLst>
             <p14:sldId id="260"/>
             <p14:sldId id="261"/>
@@ -142,7 +142,7 @@
             <p14:sldId id="267"/>
           </p14:sldIdLst>
         </p14:section>
-        <p14:section name="Применение" id="{7F00EE02-FAE6-1FE6-E69A-C9149AC6B307}">
+        <p14:section name="Применение" id="{49fc9d19-f524-4ed5-69d6-161ba2b78108}">
           <p14:sldIdLst>
             <p14:sldId id="268"/>
             <p14:sldId id="269"/>
@@ -181,10 +181,234 @@
           <a:chExt cx="0" cy="0"/>
         </a:xfrm>
       </p:grpSpPr>
+      <p:sp>
+        <p:nvSpPr>
+          <p:cNvPr id="2" name="Header Placeholder 1"/>
+          <p:cNvSpPr>
+            <a:spLocks noGrp="1"/>
+          </p:cNvSpPr>
+          <p:nvPr>
+            <p:ph type="hdr" sz="quarter"/>
+          </p:nvPr>
+        </p:nvSpPr>
+        <p:spPr>
+          <a:xfrm>
+            <a:off x="0" y="0"/>
+            <a:ext cx="2971800" cy="458788"/>
+          </a:xfrm>
+          <a:prstGeom prst="rect">
+            <a:avLst/>
+          </a:prstGeom>
+        </p:spPr>
+        <p:txBody>
+          <a:bodyPr vert="horz" lIns="91440" tIns="45720" rIns="91440" bIns="45720" rtlCol="0"/>
+          <a:lstStyle>
+            <a:lvl1pPr algn="l">
+              <a:defRPr sz="1200"/>
+            </a:lvl1pPr>
+          </a:lstStyle>
+          <a:p>
+            <a:endParaRPr lang="en-US"/>
+          </a:p>
+        </p:txBody>
+      </p:sp>
+      <p:sp>
+        <p:nvSpPr>
+          <p:cNvPr id="3" name="Date Placeholder 2"/>
+          <p:cNvSpPr>
+            <a:spLocks noGrp="1"/>
+          </p:cNvSpPr>
+          <p:nvPr>
+            <p:ph type="dt" idx="1"/>
+          </p:nvPr>
+        </p:nvSpPr>
+        <p:spPr>
+          <a:xfrm>
+            <a:off x="3884613" y="0"/>
+            <a:ext cx="2971800" cy="458788"/>
+          </a:xfrm>
+          <a:prstGeom prst="rect">
+            <a:avLst/>
+          </a:prstGeom>
+        </p:spPr>
+        <p:txBody>
+          <a:bodyPr vert="horz" lIns="91440" tIns="45720" rIns="91440" bIns="45720" rtlCol="0"/>
+          <a:lstStyle>
+            <a:lvl1pPr algn="r">
+              <a:defRPr sz="1200"/>
+            </a:lvl1pPr>
+          </a:lstStyle>
+          <a:p>
+            <a:fld id="{5282F153-3F37-0F45-9E97-73ACFA13230C}" type="datetimeFigureOut">
+              <a:rPr lang="en-US"/>
+              <a:t>7/23/19</a:t>
+            </a:fld>
+            <a:endParaRPr lang="en-US"/>
+          </a:p>
+        </p:txBody>
+      </p:sp>
+      <p:sp>
+        <p:nvSpPr>
+          <p:cNvPr id="4" name="Slide Image Placeholder 3"/>
+          <p:cNvSpPr>
+            <a:spLocks noGrp="1" noRot="1" noChangeAspect="1"/>
+          </p:cNvSpPr>
+          <p:nvPr>
+            <p:ph type="sldImg" idx="2"/>
+          </p:nvPr>
+        </p:nvSpPr>
+        <p:spPr>
+          <a:xfrm>
+            <a:off x="685800" y="1143000"/>
+            <a:ext cx="5486400" cy="3086100"/>
+          </a:xfrm>
+          <a:prstGeom prst="rect">
+            <a:avLst/>
+          </a:prstGeom>
+          <a:noFill/>
+          <a:ln w="12700">
+            <a:solidFill>
+              <a:prstClr val="black"/>
+            </a:solidFill>
+          </a:ln>
+        </p:spPr>
+        <p:txBody>
+          <a:bodyPr vert="horz" lIns="91440" tIns="45720" rIns="91440" bIns="45720" rtlCol="0" anchor="ctr"/>
+          <a:lstStyle/>
+          <a:p>
+            <a:endParaRPr lang="en-US"/>
+          </a:p>
+        </p:txBody>
+      </p:sp>
+      <p:sp>
+        <p:nvSpPr>
+          <p:cNvPr id="5" name="Notes Placeholder 4"/>
+          <p:cNvSpPr>
+            <a:spLocks noGrp="1"/>
+          </p:cNvSpPr>
+          <p:nvPr>
+            <p:ph type="body" sz="quarter" idx="3"/>
+          </p:nvPr>
+        </p:nvSpPr>
+        <p:spPr>
+          <a:xfrm>
+            <a:off x="685800" y="4400550"/>
+            <a:ext cx="5486400" cy="3600450"/>
+          </a:xfrm>
+          <a:prstGeom prst="rect">
+            <a:avLst/>
+          </a:prstGeom>
+        </p:spPr>
+        <p:txBody>
+          <a:bodyPr vert="horz" lIns="91440" tIns="45720" rIns="91440" bIns="45720" rtlCol="0"/>
+          <a:lstStyle/>
+          <a:p>
+            <a:pPr lvl="0"/>
+            <a:r>
+              <a:rPr lang="en-US"/>
+              <a:t>Click to edit Master text styles</a:t>
+            </a:r>
+          </a:p>
+          <a:p>
+            <a:pPr lvl="1"/>
+            <a:r>
+              <a:rPr lang="en-US"/>
+              <a:t>Second level</a:t>
+            </a:r>
+          </a:p>
+          <a:p>
+            <a:pPr lvl="2"/>
+            <a:r>
+              <a:rPr lang="en-US"/>
+              <a:t>Third level</a:t>
+            </a:r>
+          </a:p>
+          <a:p>
+            <a:pPr lvl="3"/>
+            <a:r>
+              <a:rPr lang="en-US"/>
+              <a:t>Fourth level</a:t>
+            </a:r>
+          </a:p>
+          <a:p>
+            <a:pPr lvl="4"/>
+            <a:r>
+              <a:rPr lang="en-US"/>
+              <a:t>Fifth level</a:t>
+            </a:r>
+          </a:p>
+        </p:txBody>
+      </p:sp>
+      <p:sp>
+        <p:nvSpPr>
+          <p:cNvPr id="6" name="Footer Placeholder 5"/>
+          <p:cNvSpPr>
+            <a:spLocks noGrp="1"/>
+          </p:cNvSpPr>
+          <p:nvPr>
+            <p:ph type="ftr" sz="quarter" idx="4"/>
+          </p:nvPr>
+        </p:nvSpPr>
+        <p:spPr>
+          <a:xfrm>
+            <a:off x="0" y="8685213"/>
+            <a:ext cx="2971800" cy="458787"/>
+          </a:xfrm>
+          <a:prstGeom prst="rect">
+            <a:avLst/>
+          </a:prstGeom>
+        </p:spPr>
+        <p:txBody>
+          <a:bodyPr vert="horz" lIns="91440" tIns="45720" rIns="91440" bIns="45720" rtlCol="0" anchor="b"/>
+          <a:lstStyle>
+            <a:lvl1pPr algn="l">
+              <a:defRPr sz="1200"/>
+            </a:lvl1pPr>
+          </a:lstStyle>
+          <a:p>
+            <a:endParaRPr lang="en-US"/>
+          </a:p>
+        </p:txBody>
+      </p:sp>
+      <p:sp>
+        <p:nvSpPr>
+          <p:cNvPr id="7" name="Slide Number Placeholder 6"/>
+          <p:cNvSpPr>
+            <a:spLocks noGrp="1"/>
+          </p:cNvSpPr>
+          <p:nvPr>
+            <p:ph type="sldNum" sz="quarter" idx="5"/>
+          </p:nvPr>
+        </p:nvSpPr>
+        <p:spPr>
+          <a:xfrm>
+            <a:off x="3884613" y="8685213"/>
+            <a:ext cx="2971800" cy="458787"/>
+          </a:xfrm>
+          <a:prstGeom prst="rect">
+            <a:avLst/>
+          </a:prstGeom>
+        </p:spPr>
+        <p:txBody>
+          <a:bodyPr vert="horz" lIns="91440" tIns="45720" rIns="91440" bIns="45720" rtlCol="0" anchor="b"/>
+          <a:lstStyle>
+            <a:lvl1pPr algn="r">
+              <a:defRPr sz="1200"/>
+            </a:lvl1pPr>
+          </a:lstStyle>
+          <a:p>
+            <a:fld id="{CE5E9CC1-C706-0F49-92D6-E571CC5EEA8F}" type="slidenum">
+              <a:rPr lang="en-US"/>
+              <a:t>‹#›</a:t>
+            </a:fld>
+            <a:endParaRPr lang="en-US"/>
+          </a:p>
+        </p:txBody>
+      </p:sp>
     </p:spTree>
     <p:extLst>
       <p:ext uri="{BB962C8B-B14F-4D97-AF65-F5344CB8AC3E}">
-        <p14:creationId xmlns:p14="http://schemas.microsoft.com/office/powerpoint/2010/main" val="601503271"/>
+        <p14:creationId xmlns:p14="http://schemas.microsoft.com/office/powerpoint/2010/main" val="1024086991"/>
       </p:ext>
     </p:extLst>
   </p:cSld>
@@ -332,6 +556,7 @@
               <a:rPr lang="en-US" dirty="0"/>
               <a:t>Титульный слайд. Деск предназначен для самостоятельного чтения.</a:t>
             </a:r>
+            <a:endParaRPr lang="en-US" dirty="0"/>
           </a:p>
         </p:txBody>
       </p:sp>
@@ -415,6 +640,10 @@
           <a:bodyPr/>
           <a:lstStyle/>
           <a:p>
+            <a:r>
+              <a:rPr lang="en-US" dirty="0"/>
+              <a:t/>
+            </a:r>
             <a:endParaRPr lang="en-US" dirty="0"/>
           </a:p>
         </p:txBody>
@@ -499,6 +728,10 @@
           <a:bodyPr/>
           <a:lstStyle/>
           <a:p>
+            <a:r>
+              <a:rPr lang="en-US" dirty="0"/>
+              <a:t/>
+            </a:r>
             <a:endParaRPr lang="en-US" dirty="0"/>
           </a:p>
         </p:txBody>
@@ -583,6 +816,10 @@
           <a:bodyPr/>
           <a:lstStyle/>
           <a:p>
+            <a:r>
+              <a:rPr lang="en-US" dirty="0"/>
+              <a:t/>
+            </a:r>
             <a:endParaRPr lang="en-US" dirty="0"/>
           </a:p>
         </p:txBody>
@@ -667,6 +904,10 @@
           <a:bodyPr/>
           <a:lstStyle/>
           <a:p>
+            <a:r>
+              <a:rPr lang="en-US" dirty="0"/>
+              <a:t/>
+            </a:r>
             <a:endParaRPr lang="en-US" dirty="0"/>
           </a:p>
         </p:txBody>
@@ -751,6 +992,10 @@
           <a:bodyPr/>
           <a:lstStyle/>
           <a:p>
+            <a:r>
+              <a:rPr lang="en-US" dirty="0"/>
+              <a:t/>
+            </a:r>
             <a:endParaRPr lang="en-US" dirty="0"/>
           </a:p>
         </p:txBody>
@@ -835,6 +1080,10 @@
           <a:bodyPr/>
           <a:lstStyle/>
           <a:p>
+            <a:r>
+              <a:rPr lang="en-US" dirty="0"/>
+              <a:t/>
+            </a:r>
             <a:endParaRPr lang="en-US" dirty="0"/>
           </a:p>
         </p:txBody>
@@ -919,6 +1168,10 @@
           <a:bodyPr/>
           <a:lstStyle/>
           <a:p>
+            <a:r>
+              <a:rPr lang="en-US" dirty="0"/>
+              <a:t/>
+            </a:r>
             <a:endParaRPr lang="en-US" dirty="0"/>
           </a:p>
         </p:txBody>
@@ -1003,6 +1256,10 @@
           <a:bodyPr/>
           <a:lstStyle/>
           <a:p>
+            <a:r>
+              <a:rPr lang="en-US" dirty="0"/>
+              <a:t/>
+            </a:r>
             <a:endParaRPr lang="en-US" dirty="0"/>
           </a:p>
         </p:txBody>
@@ -1087,6 +1344,10 @@
           <a:bodyPr/>
           <a:lstStyle/>
           <a:p>
+            <a:r>
+              <a:rPr lang="en-US" dirty="0"/>
+              <a:t/>
+            </a:r>
             <a:endParaRPr lang="en-US" dirty="0"/>
           </a:p>
         </p:txBody>
@@ -1171,6 +1432,10 @@
           <a:bodyPr/>
           <a:lstStyle/>
           <a:p>
+            <a:r>
+              <a:rPr lang="en-US" dirty="0"/>
+              <a:t/>
+            </a:r>
             <a:endParaRPr lang="en-US" dirty="0"/>
           </a:p>
         </p:txBody>
@@ -1255,6 +1520,10 @@
           <a:bodyPr/>
           <a:lstStyle/>
           <a:p>
+            <a:r>
+              <a:rPr lang="en-US" dirty="0"/>
+              <a:t/>
+            </a:r>
             <a:endParaRPr lang="en-US" dirty="0"/>
           </a:p>
         </p:txBody>
@@ -1339,6 +1608,10 @@
           <a:bodyPr/>
           <a:lstStyle/>
           <a:p>
+            <a:r>
+              <a:rPr lang="en-US" dirty="0"/>
+              <a:t/>
+            </a:r>
             <a:endParaRPr lang="en-US" dirty="0"/>
           </a:p>
         </p:txBody>
@@ -1423,6 +1696,10 @@
           <a:bodyPr/>
           <a:lstStyle/>
           <a:p>
+            <a:r>
+              <a:rPr lang="en-US" dirty="0"/>
+              <a:t/>
+            </a:r>
             <a:endParaRPr lang="en-US" dirty="0"/>
           </a:p>
         </p:txBody>
@@ -1507,6 +1784,10 @@
           <a:bodyPr/>
           <a:lstStyle/>
           <a:p>
+            <a:r>
+              <a:rPr lang="en-US" dirty="0"/>
+              <a:t/>
+            </a:r>
             <a:endParaRPr lang="en-US" dirty="0"/>
           </a:p>
         </p:txBody>
@@ -1591,6 +1872,10 @@
           <a:bodyPr/>
           <a:lstStyle/>
           <a:p>
+            <a:r>
+              <a:rPr lang="en-US" dirty="0"/>
+              <a:t/>
+            </a:r>
             <a:endParaRPr lang="en-US" dirty="0"/>
           </a:p>
         </p:txBody>
@@ -1669,7 +1954,6 @@
         <a:solidFill>
           <a:srgbClr val="16202C"/>
         </a:solidFill>
-        <a:effectLst/>
       </p:bgPr>
     </p:bg>
     <p:spTree>
@@ -1689,11 +1973,9 @@
       <p:sp>
         <p:nvSpPr>
           <p:cNvPr id="2" name="Text 0"/>
-          <p:cNvSpPr>
-            <a:spLocks noGrp="1"/>
-          </p:cNvSpPr>
+          <p:cNvSpPr/>
           <p:nvPr>
-            <p:ph type="title" idx="100" hasCustomPrompt="1"/>
+            <p:ph idx="100" type="title" hasCustomPrompt="1"/>
           </p:nvPr>
         </p:nvSpPr>
         <p:spPr>
@@ -1710,7 +1992,7 @@
         <p:txBody>
           <a:bodyPr wrap="square" rtlCol="0"/>
           <a:lstStyle>
-            <a:lvl1pPr marL="0" indent="0" algn="l">
+            <a:lvl1pPr algn="l" indent="0" marL="0">
               <a:buNone/>
               <a:defRPr lang="en-US" sz="4400" b="1" dirty="0">
                 <a:solidFill>
@@ -1720,7 +2002,7 @@
             </a:lvl1pPr>
           </a:lstStyle>
           <a:p>
-            <a:pPr marL="0" indent="0" algn="l">
+            <a:pPr algn="l" indent="0" marL="0">
               <a:buNone/>
             </a:pPr>
             <a:endParaRPr lang="en-US" sz="4400" dirty="0"/>
@@ -1730,11 +2012,9 @@
       <p:sp>
         <p:nvSpPr>
           <p:cNvPr id="3" name="Text 0"/>
-          <p:cNvSpPr>
-            <a:spLocks noGrp="1"/>
-          </p:cNvSpPr>
+          <p:cNvSpPr/>
           <p:nvPr>
-            <p:ph type="body" idx="101" hasCustomPrompt="1"/>
+            <p:ph idx="101" type="body" hasCustomPrompt="1"/>
           </p:nvPr>
         </p:nvSpPr>
         <p:spPr>
@@ -1751,7 +2031,7 @@
         <p:txBody>
           <a:bodyPr wrap="square" rtlCol="0"/>
           <a:lstStyle>
-            <a:lvl1pPr marL="0" indent="0" algn="l">
+            <a:lvl1pPr algn="l" indent="0" marL="0">
               <a:buNone/>
               <a:defRPr lang="en-US" sz="2000" dirty="0">
                 <a:solidFill>
@@ -1761,7 +2041,7 @@
             </a:lvl1pPr>
           </a:lstStyle>
           <a:p>
-            <a:pPr marL="0" indent="0" algn="l">
+            <a:pPr algn="l" indent="0" marL="0">
               <a:buNone/>
             </a:pPr>
             <a:endParaRPr lang="en-US" sz="2000" dirty="0"/>
@@ -1784,7 +2064,6 @@
         <a:solidFill>
           <a:srgbClr val="FFFFFF"/>
         </a:solidFill>
-        <a:effectLst/>
       </p:bgPr>
     </p:bg>
     <p:spTree>
@@ -1804,11 +2083,9 @@
       <p:sp>
         <p:nvSpPr>
           <p:cNvPr id="2" name="Text 0"/>
-          <p:cNvSpPr>
-            <a:spLocks noGrp="1"/>
-          </p:cNvSpPr>
+          <p:cNvSpPr/>
           <p:nvPr>
-            <p:ph type="title" idx="100" hasCustomPrompt="1"/>
+            <p:ph idx="100" type="title" hasCustomPrompt="1"/>
           </p:nvPr>
         </p:nvSpPr>
         <p:spPr>
@@ -1825,7 +2102,7 @@
         <p:txBody>
           <a:bodyPr wrap="square" rtlCol="0"/>
           <a:lstStyle>
-            <a:lvl1pPr marL="0" indent="0" algn="l">
+            <a:lvl1pPr algn="l" indent="0" marL="0">
               <a:buNone/>
               <a:defRPr lang="en-US" sz="2800" b="1" dirty="0">
                 <a:solidFill>
@@ -1835,7 +2112,7 @@
             </a:lvl1pPr>
           </a:lstStyle>
           <a:p>
-            <a:pPr marL="0" indent="0" algn="l">
+            <a:pPr algn="l" indent="0" marL="0">
               <a:buNone/>
             </a:pPr>
             <a:endParaRPr lang="en-US" sz="2800" dirty="0"/>
@@ -1863,7 +2140,7 @@
           <a:bodyPr wrap="square" lIns="0" tIns="0" rIns="0" bIns="0" rtlCol="0" anchor="ctr"/>
           <a:lstStyle/>
           <a:p>
-            <a:pPr marL="0" indent="0">
+            <a:pPr indent="0" marL="0">
               <a:buNone/>
             </a:pPr>
             <a:r>
@@ -1898,7 +2175,7 @@
           </a:prstGeom>
           <a:extLst>
             <a:ext uri="{C572A759-6A51-4108-AA02-DFA0A04FC94B}">
-              <ma14:wrappingTextBoxFlag xmlns:ma14="http://schemas.microsoft.com/office/mac/drawingml/2011/main" xmlns="" val="0"/>
+              <ma14:wrappingTextBoxFlag xmlns:ma14="http://schemas.microsoft.com/office/mac/drawingml/2011/main" val="0"/>
             </a:ext>
           </a:extLst>
         </p:spPr>
@@ -1916,8 +2193,8 @@
           <a:p>
             <a:pPr algn="r"/>
             <a:fld id="{F7021451-1387-4CA6-816F-3879F97B5CBC}" type="slidenum">
-              <a:rPr lang="en-US" b="0"/>
-              <a:t>‹#›</a:t>
+              <a:rPr b="0" lang="en-US"/>
+              <a:t>1003</a:t>
             </a:fld>
             <a:endParaRPr lang="en-US"/>
           </a:p>
@@ -1939,7 +2216,6 @@
         <a:solidFill>
           <a:srgbClr val="16202C"/>
         </a:solidFill>
-        <a:effectLst/>
       </p:bgPr>
     </p:bg>
     <p:spTree>
@@ -1959,11 +2235,9 @@
       <p:sp>
         <p:nvSpPr>
           <p:cNvPr id="2" name="Text 0"/>
-          <p:cNvSpPr>
-            <a:spLocks noGrp="1"/>
-          </p:cNvSpPr>
+          <p:cNvSpPr/>
           <p:nvPr>
-            <p:ph type="title" idx="100" hasCustomPrompt="1"/>
+            <p:ph idx="100" type="title" hasCustomPrompt="1"/>
           </p:nvPr>
         </p:nvSpPr>
         <p:spPr>
@@ -1980,7 +2254,7 @@
         <p:txBody>
           <a:bodyPr wrap="square" rtlCol="0"/>
           <a:lstStyle>
-            <a:lvl1pPr marL="0" indent="0" algn="l">
+            <a:lvl1pPr algn="l" indent="0" marL="0">
               <a:buNone/>
               <a:defRPr lang="en-US" sz="2800" b="1" dirty="0">
                 <a:solidFill>
@@ -1990,7 +2264,7 @@
             </a:lvl1pPr>
           </a:lstStyle>
           <a:p>
-            <a:pPr marL="0" indent="0" algn="l">
+            <a:pPr algn="l" indent="0" marL="0">
               <a:buNone/>
             </a:pPr>
             <a:endParaRPr lang="en-US" sz="2800" dirty="0"/>
@@ -2017,7 +2291,7 @@
           </a:prstGeom>
           <a:extLst>
             <a:ext uri="{C572A759-6A51-4108-AA02-DFA0A04FC94B}">
-              <ma14:wrappingTextBoxFlag xmlns:ma14="http://schemas.microsoft.com/office/mac/drawingml/2011/main" xmlns="" val="0"/>
+              <ma14:wrappingTextBoxFlag xmlns:ma14="http://schemas.microsoft.com/office/mac/drawingml/2011/main" val="0"/>
             </a:ext>
           </a:extLst>
         </p:spPr>
@@ -2035,8 +2309,8 @@
           <a:p>
             <a:pPr algn="r"/>
             <a:fld id="{F7021451-1387-4CA6-816F-3879F97B5CBC}" type="slidenum">
-              <a:rPr lang="en-US" b="0"/>
-              <a:t>‹#›</a:t>
+              <a:rPr b="0" lang="en-US"/>
+              <a:t>1004</a:t>
             </a:fld>
             <a:endParaRPr lang="en-US"/>
           </a:p>
@@ -2053,11 +2327,6 @@
 <file path=ppt/slideMasters/slideMaster1.xml><?xml version="1.0" encoding="utf-8"?>
 <p:sldMaster xmlns:a="http://schemas.openxmlformats.org/drawingml/2006/main" xmlns:r="http://schemas.openxmlformats.org/officeDocument/2006/relationships" xmlns:p="http://schemas.openxmlformats.org/presentationml/2006/main">
   <p:cSld>
-    <p:bg>
-      <p:bgRef idx="1001">
-        <a:schemeClr val="bg1"/>
-      </p:bgRef>
-    </p:bg>
     <p:spTree>
       <p:nvGrpSpPr>
         <p:cNvPr id="1" name=""/>
@@ -2092,7 +2361,7 @@
           </a:prstGeom>
           <a:extLst>
             <a:ext uri="{C572A759-6A51-4108-AA02-DFA0A04FC94B}">
-              <ma14:wrappingTextBoxFlag xmlns:ma14="http://schemas.microsoft.com/office/mac/drawingml/2011/main" xmlns="" val="0"/>
+              <ma14:wrappingTextBoxFlag xmlns:ma14="http://schemas.microsoft.com/office/mac/drawingml/2011/main" val="0"/>
             </a:ext>
           </a:extLst>
         </p:spPr>
@@ -2110,8 +2379,8 @@
           <a:p>
             <a:pPr algn="r"/>
             <a:fld id="{F7021451-1387-4CA6-816F-3879F97B5CBC}" type="slidenum">
-              <a:rPr lang="en-US" b="0"/>
-              <a:t>‹#›</a:t>
+              <a:rPr b="0" lang="en-US"/>
+              <a:t>null</a:t>
             </a:fld>
             <a:endParaRPr lang="en-US"/>
           </a:p>
@@ -2400,11 +2669,9 @@
       <p:sp>
         <p:nvSpPr>
           <p:cNvPr id="2" name="Text 0"/>
-          <p:cNvSpPr>
-            <a:spLocks noGrp="1"/>
-          </p:cNvSpPr>
+          <p:cNvSpPr/>
           <p:nvPr>
-            <p:ph type="title" idx="100" hasCustomPrompt="1"/>
+            <p:ph idx="100" type="title" hasCustomPrompt="1"/>
           </p:nvPr>
         </p:nvSpPr>
         <p:spPr>
@@ -2422,7 +2689,7 @@
           <a:bodyPr wrap="square" lIns="0" tIns="0" rIns="0" bIns="0" rtlCol="0" anchor="b"/>
           <a:lstStyle/>
           <a:p>
-            <a:pPr marL="0" indent="0" algn="l">
+            <a:pPr algn="l" indent="0" marL="0">
               <a:buNone/>
             </a:pPr>
             <a:r>
@@ -2440,11 +2707,9 @@
       <p:sp>
         <p:nvSpPr>
           <p:cNvPr id="3" name="Text 0"/>
-          <p:cNvSpPr>
-            <a:spLocks noGrp="1"/>
-          </p:cNvSpPr>
+          <p:cNvSpPr/>
           <p:nvPr>
-            <p:ph type="body" idx="101" hasCustomPrompt="1"/>
+            <p:ph idx="101" type="body" hasCustomPrompt="1"/>
           </p:nvPr>
         </p:nvSpPr>
         <p:spPr>
@@ -2462,7 +2727,7 @@
           <a:bodyPr wrap="square" lIns="0" tIns="0" rIns="0" bIns="0" rtlCol="0" anchor="t"/>
           <a:lstStyle/>
           <a:p>
-            <a:pPr marL="0" indent="0" algn="l">
+            <a:pPr algn="l" indent="0" marL="0">
               <a:buNone/>
             </a:pPr>
             <a:r>
@@ -2503,13 +2768,6 @@
             <a:prstDash val="solid"/>
           </a:ln>
         </p:spPr>
-        <p:txBody>
-          <a:bodyPr/>
-          <a:lstStyle/>
-          <a:p>
-            <a:endParaRPr lang="ru-RU"/>
-          </a:p>
-        </p:txBody>
       </p:sp>
       <p:sp>
         <p:nvSpPr>
@@ -2532,7 +2790,7 @@
           <a:bodyPr wrap="square" lIns="0" tIns="0" rIns="0" bIns="0" rtlCol="0" anchor="ctr"/>
           <a:lstStyle/>
           <a:p>
-            <a:pPr marL="0" indent="0" algn="ctr">
+            <a:pPr algn="ctr" indent="0" marL="0">
               <a:buNone/>
             </a:pPr>
             <a:r>
@@ -2568,7 +2826,7 @@
           <a:bodyPr wrap="square" lIns="0" tIns="0" rIns="0" bIns="0" rtlCol="0" anchor="t"/>
           <a:lstStyle/>
           <a:p>
-            <a:pPr marL="0" indent="0">
+            <a:pPr indent="0" marL="0">
               <a:buNone/>
             </a:pPr>
             <a:r>
@@ -2604,7 +2862,7 @@
           <a:bodyPr wrap="square" lIns="0" tIns="0" rIns="0" bIns="0" rtlCol="0" anchor="t"/>
           <a:lstStyle/>
           <a:p>
-            <a:pPr marL="0" indent="0">
+            <a:pPr indent="0" marL="0">
               <a:buNone/>
             </a:pPr>
             <a:r>
@@ -2647,11 +2905,9 @@
       <p:sp>
         <p:nvSpPr>
           <p:cNvPr id="2" name="Text 0"/>
-          <p:cNvSpPr>
-            <a:spLocks noGrp="1"/>
-          </p:cNvSpPr>
+          <p:cNvSpPr/>
           <p:nvPr>
-            <p:ph type="title" idx="100" hasCustomPrompt="1"/>
+            <p:ph idx="100" type="title" hasCustomPrompt="1"/>
           </p:nvPr>
         </p:nvSpPr>
         <p:spPr>
@@ -2669,7 +2925,7 @@
           <a:bodyPr wrap="square" lIns="0" tIns="0" rIns="0" bIns="0" rtlCol="0" anchor="ctr"/>
           <a:lstStyle/>
           <a:p>
-            <a:pPr marL="0" indent="0" algn="l">
+            <a:pPr algn="l" indent="0" marL="0">
               <a:buNone/>
             </a:pPr>
             <a:r>
@@ -2686,14 +2942,14 @@
       </p:sp>
       <p:pic>
         <p:nvPicPr>
-          <p:cNvPr id="3" name="Диалог с ассистентом" descr="/tmp/claude-0/-home-user-invest-project-eval/cfb2f9eb-1ed1-598a-ae85-aefec36c7a96/scratchpad/shots/ai.png"/>
+          <p:cNvPr id="3" name="Диалог с ассистентом" descr="/tmp/claude-0/-home-user-invest-project-eval/cfb2f9eb-1ed1-598a-ae85-aefec36c7a96/scratchpad/shots/ai.png">    </p:cNvPr>
           <p:cNvPicPr>
             <a:picLocks noChangeAspect="1"/>
           </p:cNvPicPr>
           <p:nvPr/>
         </p:nvPicPr>
         <p:blipFill>
-          <a:blip r:embed="rId3"/>
+          <a:blip r:embed="rId1"/>
           <a:stretch>
             <a:fillRect/>
           </a:stretch>
@@ -2707,7 +2963,7 @@
             <a:avLst/>
           </a:prstGeom>
           <a:effectLst>
-            <a:outerShdw blurRad="76200" dist="25400" dir="2700000" algn="bl" rotWithShape="0">
+            <a:outerShdw sx="100000" sy="100000" kx="0" ky="0" algn="bl" rotWithShape="0" blurRad="76200" dist="25400" dir="2700000">
               <a:srgbClr val="000000">
                 <a:alpha val="18000"/>
               </a:srgbClr>
@@ -2736,7 +2992,7 @@
           <a:bodyPr wrap="square" lIns="0" tIns="0" rIns="0" bIns="0" rtlCol="0" anchor="t"/>
           <a:lstStyle/>
           <a:p>
-            <a:pPr marL="0" indent="0" algn="ctr">
+            <a:pPr algn="ctr" indent="0" marL="0">
               <a:buNone/>
             </a:pPr>
             <a:r>
@@ -2889,13 +3145,6 @@
             <a:prstDash val="solid"/>
           </a:ln>
         </p:spPr>
-        <p:txBody>
-          <a:bodyPr/>
-          <a:lstStyle/>
-          <a:p>
-            <a:endParaRPr lang="ru-RU"/>
-          </a:p>
-        </p:txBody>
       </p:sp>
       <p:sp>
         <p:nvSpPr>
@@ -2918,7 +3167,7 @@
           <a:bodyPr wrap="square" lIns="0" tIns="0" rIns="0" bIns="0" rtlCol="0" anchor="t"/>
           <a:lstStyle/>
           <a:p>
-            <a:pPr marL="0" indent="0">
+            <a:pPr indent="0" marL="0">
               <a:buNone/>
             </a:pPr>
             <a:r>
@@ -2953,7 +3202,7 @@
           </a:prstGeom>
           <a:extLst>
             <a:ext uri="{C572A759-6A51-4108-AA02-DFA0A04FC94B}">
-              <ma14:wrappingTextBoxFlag xmlns:ma14="http://schemas.microsoft.com/office/mac/drawingml/2011/main" xmlns="" val="0"/>
+              <ma14:wrappingTextBoxFlag xmlns:ma14="http://schemas.microsoft.com/office/mac/drawingml/2011/main" val="0"/>
             </a:ext>
           </a:extLst>
         </p:spPr>
@@ -2971,7 +3220,7 @@
           <a:p>
             <a:pPr algn="r"/>
             <a:fld id="{F7021451-1387-4CA6-816F-3879F97B5CBC}" type="slidenum">
-              <a:rPr lang="en-US" b="0"/>
+              <a:rPr b="0" lang="en-US"/>
               <a:t>10</a:t>
             </a:fld>
             <a:endParaRPr lang="en-US"/>
@@ -3006,11 +3255,9 @@
       <p:sp>
         <p:nvSpPr>
           <p:cNvPr id="2" name="Text 0"/>
-          <p:cNvSpPr>
-            <a:spLocks noGrp="1"/>
-          </p:cNvSpPr>
+          <p:cNvSpPr/>
           <p:nvPr>
-            <p:ph type="title" idx="100" hasCustomPrompt="1"/>
+            <p:ph idx="100" type="title" hasCustomPrompt="1"/>
           </p:nvPr>
         </p:nvSpPr>
         <p:spPr>
@@ -3028,7 +3275,7 @@
           <a:bodyPr wrap="square" lIns="0" tIns="0" rIns="0" bIns="0" rtlCol="0" anchor="ctr"/>
           <a:lstStyle/>
           <a:p>
-            <a:pPr marL="0" indent="0" algn="l">
+            <a:pPr algn="l" indent="0" marL="0">
               <a:buNone/>
             </a:pPr>
             <a:r>
@@ -3037,7 +3284,7 @@
                   <a:schemeClr val="tx1"/>
                 </a:solidFill>
               </a:rPr>
-              <a:t>Не только проекты: 12 готовых инструментов для задач финансовой службы</a:t>
+              <a:t>Не только проекты: 13 готовых инструментов для задач финансовой службы</a:t>
             </a:r>
             <a:endParaRPr lang="en-US" sz="2800" dirty="0"/>
           </a:p>
@@ -3045,14 +3292,14 @@
       </p:sp>
       <p:pic>
         <p:nvPicPr>
-          <p:cNvPr id="3" name="Схема библиотеки шаблонов" descr="/home/user/invest-project-eval/docs/img/b5-library.png"/>
+          <p:cNvPr id="3" name="Схема библиотеки шаблонов" descr="/home/user/invest-project-eval/docs/img/b5-library.png">    </p:cNvPr>
           <p:cNvPicPr>
             <a:picLocks noChangeAspect="1"/>
           </p:cNvPicPr>
           <p:nvPr/>
         </p:nvPicPr>
         <p:blipFill>
-          <a:blip r:embed="rId3"/>
+          <a:blip r:embed="rId1"/>
           <a:stretch>
             <a:fillRect/>
           </a:stretch>
@@ -3075,12 +3322,12 @@
         </p:nvSpPr>
         <p:spPr>
           <a:xfrm>
-            <a:off x="6949440" y="1371600"/>
-            <a:ext cx="4693615" cy="1097280"/>
+            <a:off x="6949440" y="1325880"/>
+            <a:ext cx="4693615" cy="1225296"/>
           </a:xfrm>
           <a:prstGeom prst="roundRect">
             <a:avLst>
-              <a:gd name="adj" fmla="val 10000"/>
+              <a:gd name="adj" fmla="val 8955"/>
             </a:avLst>
           </a:prstGeom>
           <a:solidFill>
@@ -3093,13 +3340,6 @@
             <a:prstDash val="solid"/>
           </a:ln>
         </p:spPr>
-        <p:txBody>
-          <a:bodyPr/>
-          <a:lstStyle/>
-          <a:p>
-            <a:endParaRPr lang="ru-RU"/>
-          </a:p>
-        </p:txBody>
       </p:sp>
       <p:sp>
         <p:nvSpPr>
@@ -3109,7 +3349,7 @@
         </p:nvSpPr>
         <p:spPr>
           <a:xfrm>
-            <a:off x="7178040" y="1394637"/>
+            <a:off x="7178040" y="1527048"/>
             <a:ext cx="4236415" cy="502920"/>
           </a:xfrm>
           <a:prstGeom prst="rect">
@@ -3122,7 +3362,7 @@
           <a:bodyPr wrap="square" lIns="0" tIns="0" rIns="0" bIns="0" rtlCol="0" anchor="ctr"/>
           <a:lstStyle/>
           <a:p>
-            <a:pPr marL="0" indent="0">
+            <a:pPr indent="0" marL="0">
               <a:buNone/>
             </a:pPr>
             <a:r>
@@ -3145,8 +3385,8 @@
         </p:nvSpPr>
         <p:spPr>
           <a:xfrm>
-            <a:off x="7178040" y="1970709"/>
-            <a:ext cx="4236415" cy="182880"/>
+            <a:off x="7178040" y="2103120"/>
+            <a:ext cx="4236415" cy="310896"/>
           </a:xfrm>
           <a:prstGeom prst="rect">
             <a:avLst/>
@@ -3158,18 +3398,18 @@
           <a:bodyPr wrap="square" lIns="0" tIns="0" rIns="0" bIns="0" rtlCol="0" anchor="t"/>
           <a:lstStyle/>
           <a:p>
-            <a:pPr marL="0" indent="0">
-              <a:buNone/>
-            </a:pPr>
-            <a:r>
-              <a:rPr lang="en-US" sz="1200" dirty="0">
+            <a:pPr indent="0" marL="0">
+              <a:buNone/>
+            </a:pPr>
+            <a:r>
+              <a:rPr lang="en-US" sz="1100" dirty="0">
                 <a:solidFill>
                   <a:schemeClr val="tx1"/>
                 </a:solidFill>
               </a:rPr>
               <a:t>экспресс-оценка, универсальная модель, сравнение проектов, WACC, реальная ставка кредита, лизинг или кредит</a:t>
             </a:r>
-            <a:endParaRPr lang="en-US" sz="1200" dirty="0"/>
+            <a:endParaRPr lang="en-US" sz="1100" dirty="0"/>
           </a:p>
         </p:txBody>
       </p:sp>
@@ -3182,11 +3422,11 @@
         <p:spPr>
           <a:xfrm>
             <a:off x="6949440" y="2587752"/>
-            <a:ext cx="4693615" cy="1097280"/>
+            <a:ext cx="4693615" cy="1225296"/>
           </a:xfrm>
           <a:prstGeom prst="roundRect">
             <a:avLst>
-              <a:gd name="adj" fmla="val 10000"/>
+              <a:gd name="adj" fmla="val 8955"/>
             </a:avLst>
           </a:prstGeom>
           <a:solidFill>
@@ -3199,13 +3439,6 @@
             <a:prstDash val="solid"/>
           </a:ln>
         </p:spPr>
-        <p:txBody>
-          <a:bodyPr/>
-          <a:lstStyle/>
-          <a:p>
-            <a:endParaRPr lang="ru-RU"/>
-          </a:p>
-        </p:txBody>
       </p:sp>
       <p:sp>
         <p:nvSpPr>
@@ -3215,7 +3448,7 @@
         </p:nvSpPr>
         <p:spPr>
           <a:xfrm>
-            <a:off x="7178040" y="2610789"/>
+            <a:off x="7178040" y="2788920"/>
             <a:ext cx="4236415" cy="502920"/>
           </a:xfrm>
           <a:prstGeom prst="rect">
@@ -3228,7 +3461,7 @@
           <a:bodyPr wrap="square" lIns="0" tIns="0" rIns="0" bIns="0" rtlCol="0" anchor="ctr"/>
           <a:lstStyle/>
           <a:p>
-            <a:pPr marL="0" indent="0">
+            <a:pPr indent="0" marL="0">
               <a:buNone/>
             </a:pPr>
             <a:r>
@@ -3251,8 +3484,8 @@
         </p:nvSpPr>
         <p:spPr>
           <a:xfrm>
-            <a:off x="7178040" y="3186861"/>
-            <a:ext cx="4236415" cy="182880"/>
+            <a:off x="7178040" y="3364992"/>
+            <a:ext cx="4236415" cy="310896"/>
           </a:xfrm>
           <a:prstGeom prst="rect">
             <a:avLst/>
@@ -3264,18 +3497,18 @@
           <a:bodyPr wrap="square" lIns="0" tIns="0" rIns="0" bIns="0" rtlCol="0" anchor="t"/>
           <a:lstStyle/>
           <a:p>
-            <a:pPr marL="0" indent="0">
-              <a:buNone/>
-            </a:pPr>
-            <a:r>
-              <a:rPr lang="en-US" sz="1200" dirty="0">
+            <a:pPr indent="0" marL="0">
+              <a:buNone/>
+            </a:pPr>
+            <a:r>
+              <a:rPr lang="en-US" sz="1100" dirty="0">
                 <a:solidFill>
                   <a:schemeClr val="tx1"/>
                 </a:solidFill>
               </a:rPr>
               <a:t>точка безубыточности, факторный анализ прибыли, план-факт бюджета с ABC-ранжированием отклонений</a:t>
             </a:r>
-            <a:endParaRPr lang="en-US" sz="1200" dirty="0"/>
+            <a:endParaRPr lang="en-US" sz="1100" dirty="0"/>
           </a:p>
         </p:txBody>
       </p:sp>
@@ -3287,12 +3520,12 @@
         </p:nvSpPr>
         <p:spPr>
           <a:xfrm>
-            <a:off x="6949440" y="3803904"/>
-            <a:ext cx="4693615" cy="1097280"/>
+            <a:off x="6949440" y="3849624"/>
+            <a:ext cx="4693615" cy="1225296"/>
           </a:xfrm>
           <a:prstGeom prst="roundRect">
             <a:avLst>
-              <a:gd name="adj" fmla="val 10000"/>
+              <a:gd name="adj" fmla="val 8955"/>
             </a:avLst>
           </a:prstGeom>
           <a:solidFill>
@@ -3305,13 +3538,6 @@
             <a:prstDash val="solid"/>
           </a:ln>
         </p:spPr>
-        <p:txBody>
-          <a:bodyPr/>
-          <a:lstStyle/>
-          <a:p>
-            <a:endParaRPr lang="ru-RU"/>
-          </a:p>
-        </p:txBody>
       </p:sp>
       <p:sp>
         <p:nvSpPr>
@@ -3321,7 +3547,7 @@
         </p:nvSpPr>
         <p:spPr>
           <a:xfrm>
-            <a:off x="7178040" y="3826941"/>
+            <a:off x="7178040" y="4050792"/>
             <a:ext cx="4236415" cy="502920"/>
           </a:xfrm>
           <a:prstGeom prst="rect">
@@ -3334,7 +3560,7 @@
           <a:bodyPr wrap="square" lIns="0" tIns="0" rIns="0" bIns="0" rtlCol="0" anchor="ctr"/>
           <a:lstStyle/>
           <a:p>
-            <a:pPr marL="0" indent="0">
+            <a:pPr indent="0" marL="0">
               <a:buNone/>
             </a:pPr>
             <a:r>
@@ -3357,8 +3583,8 @@
         </p:nvSpPr>
         <p:spPr>
           <a:xfrm>
-            <a:off x="7178040" y="4403013"/>
-            <a:ext cx="4236415" cy="182880"/>
+            <a:off x="7178040" y="4626864"/>
+            <a:ext cx="4236415" cy="310896"/>
           </a:xfrm>
           <a:prstGeom prst="rect">
             <a:avLst/>
@@ -3370,18 +3596,18 @@
           <a:bodyPr wrap="square" lIns="0" tIns="0" rIns="0" bIns="0" rtlCol="0" anchor="t"/>
           <a:lstStyle/>
           <a:p>
-            <a:pPr marL="0" indent="0">
-              <a:buNone/>
-            </a:pPr>
-            <a:r>
-              <a:rPr lang="en-US" sz="1200" dirty="0">
+            <a:pPr indent="0" marL="0">
+              <a:buNone/>
+            </a:pPr>
+            <a:r>
+              <a:rPr lang="en-US" sz="1100" dirty="0">
                 <a:solidFill>
                   <a:schemeClr val="tx1"/>
                 </a:solidFill>
               </a:rPr>
               <a:t>БДР, БДДС и прогнозный баланс на 12 месяцев с лагами оплаты и проверкой «актив = пассив»</a:t>
             </a:r>
-            <a:endParaRPr lang="en-US" sz="1200" dirty="0"/>
+            <a:endParaRPr lang="en-US" sz="1100" dirty="0"/>
           </a:p>
         </p:txBody>
       </p:sp>
@@ -3393,12 +3619,12 @@
         </p:nvSpPr>
         <p:spPr>
           <a:xfrm>
-            <a:off x="6949440" y="5020056"/>
-            <a:ext cx="4693615" cy="1097280"/>
+            <a:off x="6949440" y="5111496"/>
+            <a:ext cx="4693615" cy="1225296"/>
           </a:xfrm>
           <a:prstGeom prst="roundRect">
             <a:avLst>
-              <a:gd name="adj" fmla="val 10000"/>
+              <a:gd name="adj" fmla="val 8955"/>
             </a:avLst>
           </a:prstGeom>
           <a:solidFill>
@@ -3411,13 +3637,6 @@
             <a:prstDash val="solid"/>
           </a:ln>
         </p:spPr>
-        <p:txBody>
-          <a:bodyPr/>
-          <a:lstStyle/>
-          <a:p>
-            <a:endParaRPr lang="ru-RU"/>
-          </a:p>
-        </p:txBody>
       </p:sp>
       <p:sp>
         <p:nvSpPr>
@@ -3427,7 +3646,7 @@
         </p:nvSpPr>
         <p:spPr>
           <a:xfrm>
-            <a:off x="7178040" y="5043093"/>
+            <a:off x="7178040" y="5312664"/>
             <a:ext cx="4236415" cy="502920"/>
           </a:xfrm>
           <a:prstGeom prst="rect">
@@ -3440,7 +3659,7 @@
           <a:bodyPr wrap="square" lIns="0" tIns="0" rIns="0" bIns="0" rtlCol="0" anchor="ctr"/>
           <a:lstStyle/>
           <a:p>
-            <a:pPr marL="0" indent="0">
+            <a:pPr indent="0" marL="0">
               <a:buNone/>
             </a:pPr>
             <a:r>
@@ -3463,8 +3682,8 @@
         </p:nvSpPr>
         <p:spPr>
           <a:xfrm>
-            <a:off x="7178040" y="5619165"/>
-            <a:ext cx="4236415" cy="182880"/>
+            <a:off x="7178040" y="5888736"/>
+            <a:ext cx="4236415" cy="310896"/>
           </a:xfrm>
           <a:prstGeom prst="rect">
             <a:avLst/>
@@ -3476,18 +3695,18 @@
           <a:bodyPr wrap="square" lIns="0" tIns="0" rIns="0" bIns="0" rtlCol="0" anchor="t"/>
           <a:lstStyle/>
           <a:p>
-            <a:pPr marL="0" indent="0">
-              <a:buNone/>
-            </a:pPr>
-            <a:r>
-              <a:rPr lang="en-US" sz="1200" dirty="0">
+            <a:pPr indent="0" marL="0">
+              <a:buNone/>
+            </a:pPr>
+            <a:r>
+              <a:rPr lang="en-US" sz="1100" dirty="0">
                 <a:solidFill>
                   <a:schemeClr val="tx1"/>
                 </a:solidFill>
               </a:rPr>
-              <a:t>оценка стоимости бизнеса методом DCF, финансовые коэффициенты с нормативами и моделью Дюпон</a:t>
-            </a:r>
-            <a:endParaRPr lang="en-US" sz="1200" dirty="0"/>
+              <a:t>оценка бизнеса методом DCF, экономическая добавленная стоимость EVA с корректировками и факторным анализом, финансовые коэффициенты и модель Дюпон</a:t>
+            </a:r>
+            <a:endParaRPr lang="en-US" sz="1100" dirty="0"/>
           </a:p>
         </p:txBody>
       </p:sp>
@@ -3511,7 +3730,7 @@
           </a:prstGeom>
           <a:extLst>
             <a:ext uri="{C572A759-6A51-4108-AA02-DFA0A04FC94B}">
-              <ma14:wrappingTextBoxFlag xmlns:ma14="http://schemas.microsoft.com/office/mac/drawingml/2011/main" xmlns="" val="0"/>
+              <ma14:wrappingTextBoxFlag xmlns:ma14="http://schemas.microsoft.com/office/mac/drawingml/2011/main" val="0"/>
             </a:ext>
           </a:extLst>
         </p:spPr>
@@ -3529,7 +3748,7 @@
           <a:p>
             <a:pPr algn="r"/>
             <a:fld id="{F7021451-1387-4CA6-816F-3879F97B5CBC}" type="slidenum">
-              <a:rPr lang="en-US" b="0"/>
+              <a:rPr b="0" lang="en-US"/>
               <a:t>11</a:t>
             </a:fld>
             <a:endParaRPr lang="en-US"/>
@@ -3564,11 +3783,9 @@
       <p:sp>
         <p:nvSpPr>
           <p:cNvPr id="2" name="Text 0"/>
-          <p:cNvSpPr>
-            <a:spLocks noGrp="1"/>
-          </p:cNvSpPr>
+          <p:cNvSpPr/>
           <p:nvPr>
-            <p:ph type="title" idx="100" hasCustomPrompt="1"/>
+            <p:ph idx="100" type="title" hasCustomPrompt="1"/>
           </p:nvPr>
         </p:nvSpPr>
         <p:spPr>
@@ -3586,7 +3803,7 @@
           <a:bodyPr wrap="square" lIns="0" tIns="0" rIns="0" bIns="0" rtlCol="0" anchor="ctr"/>
           <a:lstStyle/>
           <a:p>
-            <a:pPr marL="0" indent="0" algn="l">
+            <a:pPr algn="l" indent="0" marL="0">
               <a:buNone/>
             </a:pPr>
             <a:r>
@@ -3603,14 +3820,14 @@
       </p:sp>
       <p:pic>
         <p:nvPicPr>
-          <p:cNvPr id="3" name="Вкладка экспорта" descr="/tmp/claude-0/-home-user-invest-project-eval/cfb2f9eb-1ed1-598a-ae85-aefec36c7a96/scratchpad/shots/export.png"/>
+          <p:cNvPr id="3" name="Вкладка экспорта" descr="/tmp/claude-0/-home-user-invest-project-eval/cfb2f9eb-1ed1-598a-ae85-aefec36c7a96/scratchpad/shots/export.png">    </p:cNvPr>
           <p:cNvPicPr>
             <a:picLocks noChangeAspect="1"/>
           </p:cNvPicPr>
           <p:nvPr/>
         </p:nvPicPr>
         <p:blipFill>
-          <a:blip r:embed="rId3"/>
+          <a:blip r:embed="rId1"/>
           <a:stretch>
             <a:fillRect/>
           </a:stretch>
@@ -3624,7 +3841,7 @@
             <a:avLst/>
           </a:prstGeom>
           <a:effectLst>
-            <a:outerShdw blurRad="76200" dist="25400" dir="2700000" algn="bl" rotWithShape="0">
+            <a:outerShdw sx="100000" sy="100000" kx="0" ky="0" algn="bl" rotWithShape="0" blurRad="76200" dist="25400" dir="2700000">
               <a:srgbClr val="000000">
                 <a:alpha val="18000"/>
               </a:srgbClr>
@@ -3634,14 +3851,14 @@
       </p:pic>
       <p:pic>
         <p:nvPicPr>
-          <p:cNvPr id="4" name="Графики модели" descr="/tmp/claude-0/-home-user-invest-project-eval/cfb2f9eb-1ed1-598a-ae85-aefec36c7a96/scratchpad/shots/charts.png"/>
+          <p:cNvPr id="4" name="Графики модели" descr="/tmp/claude-0/-home-user-invest-project-eval/cfb2f9eb-1ed1-598a-ae85-aefec36c7a96/scratchpad/shots/charts.png">    </p:cNvPr>
           <p:cNvPicPr>
             <a:picLocks noChangeAspect="1"/>
           </p:cNvPicPr>
           <p:nvPr/>
         </p:nvPicPr>
         <p:blipFill>
-          <a:blip r:embed="rId4"/>
+          <a:blip r:embed="rId2"/>
           <a:stretch>
             <a:fillRect/>
           </a:stretch>
@@ -3655,7 +3872,7 @@
             <a:avLst/>
           </a:prstGeom>
           <a:effectLst>
-            <a:outerShdw blurRad="76200" dist="25400" dir="2700000" algn="bl" rotWithShape="0">
+            <a:outerShdw sx="100000" sy="100000" kx="0" ky="0" algn="bl" rotWithShape="0" blurRad="76200" dist="25400" dir="2700000">
               <a:srgbClr val="000000">
                 <a:alpha val="18000"/>
               </a:srgbClr>
@@ -3684,7 +3901,7 @@
           <a:bodyPr wrap="square" lIns="0" tIns="0" rIns="0" bIns="0" rtlCol="0" anchor="t"/>
           <a:lstStyle/>
           <a:p>
-            <a:pPr marL="0" indent="0" algn="ctr">
+            <a:pPr algn="ctr" indent="0" marL="0">
               <a:buNone/>
             </a:pPr>
             <a:r>
@@ -3707,12 +3924,12 @@
         </p:nvSpPr>
         <p:spPr>
           <a:xfrm>
-            <a:off x="7680960" y="1371600"/>
-            <a:ext cx="3962095" cy="1097280"/>
+            <a:off x="7680960" y="1325880"/>
+            <a:ext cx="3962095" cy="1225296"/>
           </a:xfrm>
           <a:prstGeom prst="roundRect">
             <a:avLst>
-              <a:gd name="adj" fmla="val 10000"/>
+              <a:gd name="adj" fmla="val 8955"/>
             </a:avLst>
           </a:prstGeom>
           <a:solidFill>
@@ -3725,13 +3942,6 @@
             <a:prstDash val="solid"/>
           </a:ln>
         </p:spPr>
-        <p:txBody>
-          <a:bodyPr/>
-          <a:lstStyle/>
-          <a:p>
-            <a:endParaRPr lang="ru-RU"/>
-          </a:p>
-        </p:txBody>
       </p:sp>
       <p:sp>
         <p:nvSpPr>
@@ -3741,7 +3951,7 @@
         </p:nvSpPr>
         <p:spPr>
           <a:xfrm>
-            <a:off x="7909560" y="1388697"/>
+            <a:off x="7909560" y="1527048"/>
             <a:ext cx="3504895" cy="502920"/>
           </a:xfrm>
           <a:prstGeom prst="rect">
@@ -3754,7 +3964,7 @@
           <a:bodyPr wrap="square" lIns="0" tIns="0" rIns="0" bIns="0" rtlCol="0" anchor="ctr"/>
           <a:lstStyle/>
           <a:p>
-            <a:pPr marL="0" indent="0">
+            <a:pPr indent="0" marL="0">
               <a:buNone/>
             </a:pPr>
             <a:r>
@@ -3777,8 +3987,8 @@
         </p:nvSpPr>
         <p:spPr>
           <a:xfrm>
-            <a:off x="7909560" y="1875703"/>
-            <a:ext cx="3504895" cy="182880"/>
+            <a:off x="7909560" y="2103120"/>
+            <a:ext cx="3504895" cy="310896"/>
           </a:xfrm>
           <a:prstGeom prst="rect">
             <a:avLst/>
@@ -3790,18 +4000,18 @@
           <a:bodyPr wrap="square" lIns="0" tIns="0" rIns="0" bIns="0" rtlCol="0" anchor="t"/>
           <a:lstStyle/>
           <a:p>
-            <a:pPr marL="0" indent="0">
-              <a:buNone/>
-            </a:pPr>
-            <a:r>
-              <a:rPr lang="en-US" sz="1200" dirty="0">
+            <a:pPr indent="0" marL="0">
+              <a:buNone/>
+            </a:pPr>
+            <a:r>
+              <a:rPr lang="en-US" sz="1100" dirty="0">
                 <a:solidFill>
                   <a:schemeClr val="tx1"/>
                 </a:solidFill>
               </a:rPr>
               <a:t>Все расчётные листы, показатели, чувствительность, сценарии, Монте-Карло. В листе денежных потоков живые формулы: ЧПС, ВСД, PI.</a:t>
             </a:r>
-            <a:endParaRPr lang="en-US" sz="1200" dirty="0"/>
+            <a:endParaRPr lang="en-US" sz="1100" dirty="0"/>
           </a:p>
         </p:txBody>
       </p:sp>
@@ -3814,11 +4024,11 @@
         <p:spPr>
           <a:xfrm>
             <a:off x="7680960" y="2587752"/>
-            <a:ext cx="3962095" cy="1097280"/>
+            <a:ext cx="3962095" cy="1225296"/>
           </a:xfrm>
           <a:prstGeom prst="roundRect">
             <a:avLst>
-              <a:gd name="adj" fmla="val 10000"/>
+              <a:gd name="adj" fmla="val 8955"/>
             </a:avLst>
           </a:prstGeom>
           <a:solidFill>
@@ -3831,13 +4041,6 @@
             <a:prstDash val="solid"/>
           </a:ln>
         </p:spPr>
-        <p:txBody>
-          <a:bodyPr/>
-          <a:lstStyle/>
-          <a:p>
-            <a:endParaRPr lang="ru-RU"/>
-          </a:p>
-        </p:txBody>
       </p:sp>
       <p:sp>
         <p:nvSpPr>
@@ -3847,7 +4050,7 @@
         </p:nvSpPr>
         <p:spPr>
           <a:xfrm>
-            <a:off x="7909560" y="2604849"/>
+            <a:off x="7909560" y="2788920"/>
             <a:ext cx="3504895" cy="502920"/>
           </a:xfrm>
           <a:prstGeom prst="rect">
@@ -3860,7 +4063,7 @@
           <a:bodyPr wrap="square" lIns="0" tIns="0" rIns="0" bIns="0" rtlCol="0" anchor="ctr"/>
           <a:lstStyle/>
           <a:p>
-            <a:pPr marL="0" indent="0">
+            <a:pPr indent="0" marL="0">
               <a:buNone/>
             </a:pPr>
             <a:r>
@@ -3883,8 +4086,8 @@
         </p:nvSpPr>
         <p:spPr>
           <a:xfrm>
-            <a:off x="7909560" y="3091855"/>
-            <a:ext cx="3504895" cy="182880"/>
+            <a:off x="7909560" y="3364992"/>
+            <a:ext cx="3504895" cy="310896"/>
           </a:xfrm>
           <a:prstGeom prst="rect">
             <a:avLst/>
@@ -3896,18 +4099,18 @@
           <a:bodyPr wrap="square" lIns="0" tIns="0" rIns="0" bIns="0" rtlCol="0" anchor="t"/>
           <a:lstStyle/>
           <a:p>
-            <a:pPr marL="0" indent="0">
-              <a:buNone/>
-            </a:pPr>
-            <a:r>
-              <a:rPr lang="en-US" sz="1200" dirty="0">
+            <a:pPr indent="0" marL="0">
+              <a:buNone/>
+            </a:pPr>
+            <a:r>
+              <a:rPr lang="en-US" sz="1100" dirty="0">
                 <a:solidFill>
                   <a:schemeClr val="tx1"/>
                 </a:solidFill>
               </a:rPr>
               <a:t>Титул, таблица показателей с оценкой, заключение и риски, графики, расчётные таблицы, исходные данные.</a:t>
             </a:r>
-            <a:endParaRPr lang="en-US" sz="1200" dirty="0"/>
+            <a:endParaRPr lang="en-US" sz="1100" dirty="0"/>
           </a:p>
         </p:txBody>
       </p:sp>
@@ -3919,12 +4122,12 @@
         </p:nvSpPr>
         <p:spPr>
           <a:xfrm>
-            <a:off x="7680960" y="3803904"/>
-            <a:ext cx="3962095" cy="1097280"/>
+            <a:off x="7680960" y="3849624"/>
+            <a:ext cx="3962095" cy="1225296"/>
           </a:xfrm>
           <a:prstGeom prst="roundRect">
             <a:avLst>
-              <a:gd name="adj" fmla="val 10000"/>
+              <a:gd name="adj" fmla="val 8955"/>
             </a:avLst>
           </a:prstGeom>
           <a:solidFill>
@@ -3937,13 +4140,6 @@
             <a:prstDash val="solid"/>
           </a:ln>
         </p:spPr>
-        <p:txBody>
-          <a:bodyPr/>
-          <a:lstStyle/>
-          <a:p>
-            <a:endParaRPr lang="ru-RU"/>
-          </a:p>
-        </p:txBody>
       </p:sp>
       <p:sp>
         <p:nvSpPr>
@@ -3953,7 +4149,7 @@
         </p:nvSpPr>
         <p:spPr>
           <a:xfrm>
-            <a:off x="7909560" y="3821001"/>
+            <a:off x="7909560" y="4050792"/>
             <a:ext cx="3504895" cy="502920"/>
           </a:xfrm>
           <a:prstGeom prst="rect">
@@ -3966,7 +4162,7 @@
           <a:bodyPr wrap="square" lIns="0" tIns="0" rIns="0" bIns="0" rtlCol="0" anchor="ctr"/>
           <a:lstStyle/>
           <a:p>
-            <a:pPr marL="0" indent="0">
+            <a:pPr indent="0" marL="0">
               <a:buNone/>
             </a:pPr>
             <a:r>
@@ -3989,8 +4185,8 @@
         </p:nvSpPr>
         <p:spPr>
           <a:xfrm>
-            <a:off x="7909560" y="4308007"/>
-            <a:ext cx="3504895" cy="182880"/>
+            <a:off x="7909560" y="4626864"/>
+            <a:ext cx="3504895" cy="310896"/>
           </a:xfrm>
           <a:prstGeom prst="rect">
             <a:avLst/>
@@ -4002,18 +4198,18 @@
           <a:bodyPr wrap="square" lIns="0" tIns="0" rIns="0" bIns="0" rtlCol="0" anchor="t"/>
           <a:lstStyle/>
           <a:p>
-            <a:pPr marL="0" indent="0">
-              <a:buNone/>
-            </a:pPr>
-            <a:r>
-              <a:rPr lang="en-US" sz="1200" dirty="0">
+            <a:pPr indent="0" marL="0">
+              <a:buNone/>
+            </a:pPr>
+            <a:r>
+              <a:rPr lang="en-US" sz="1100" dirty="0">
                 <a:solidFill>
                   <a:schemeClr val="tx1"/>
                 </a:solidFill>
               </a:rPr>
               <a:t>Любая таблица отдельно для BI; вся модель файлом, чтобы открыть позже или передать коллеге.</a:t>
             </a:r>
-            <a:endParaRPr lang="en-US" sz="1200" dirty="0"/>
+            <a:endParaRPr lang="en-US" sz="1100" dirty="0"/>
           </a:p>
         </p:txBody>
       </p:sp>
@@ -4025,12 +4221,12 @@
         </p:nvSpPr>
         <p:spPr>
           <a:xfrm>
-            <a:off x="7680960" y="5020056"/>
-            <a:ext cx="3962095" cy="1097280"/>
+            <a:off x="7680960" y="5111496"/>
+            <a:ext cx="3962095" cy="1225296"/>
           </a:xfrm>
           <a:prstGeom prst="roundRect">
             <a:avLst>
-              <a:gd name="adj" fmla="val 10000"/>
+              <a:gd name="adj" fmla="val 8955"/>
             </a:avLst>
           </a:prstGeom>
           <a:solidFill>
@@ -4043,13 +4239,6 @@
             <a:prstDash val="solid"/>
           </a:ln>
         </p:spPr>
-        <p:txBody>
-          <a:bodyPr/>
-          <a:lstStyle/>
-          <a:p>
-            <a:endParaRPr lang="ru-RU"/>
-          </a:p>
-        </p:txBody>
       </p:sp>
       <p:sp>
         <p:nvSpPr>
@@ -4059,7 +4248,7 @@
         </p:nvSpPr>
         <p:spPr>
           <a:xfrm>
-            <a:off x="7909560" y="5037153"/>
+            <a:off x="7909560" y="5312664"/>
             <a:ext cx="3504895" cy="502920"/>
           </a:xfrm>
           <a:prstGeom prst="rect">
@@ -4072,7 +4261,7 @@
           <a:bodyPr wrap="square" lIns="0" tIns="0" rIns="0" bIns="0" rtlCol="0" anchor="ctr"/>
           <a:lstStyle/>
           <a:p>
-            <a:pPr marL="0" indent="0">
+            <a:pPr indent="0" marL="0">
               <a:buNone/>
             </a:pPr>
             <a:r>
@@ -4095,8 +4284,8 @@
         </p:nvSpPr>
         <p:spPr>
           <a:xfrm>
-            <a:off x="7909560" y="5524159"/>
-            <a:ext cx="3504895" cy="182880"/>
+            <a:off x="7909560" y="5888736"/>
+            <a:ext cx="3504895" cy="310896"/>
           </a:xfrm>
           <a:prstGeom prst="rect">
             <a:avLst/>
@@ -4108,18 +4297,18 @@
           <a:bodyPr wrap="square" lIns="0" tIns="0" rIns="0" bIns="0" rtlCol="0" anchor="t"/>
           <a:lstStyle/>
           <a:p>
-            <a:pPr marL="0" indent="0">
-              <a:buNone/>
-            </a:pPr>
-            <a:r>
-              <a:rPr lang="en-US" sz="1200" dirty="0">
+            <a:pPr indent="0" marL="0">
+              <a:buNone/>
+            </a:pPr>
+            <a:r>
+              <a:rPr lang="en-US" sz="1100" dirty="0">
                 <a:solidFill>
                   <a:schemeClr val="tx1"/>
                 </a:solidFill>
               </a:rPr>
               <a:t>Ряды по годам вставляются из Excel через буфер или загружаются файлом с автосопоставлением строк.</a:t>
             </a:r>
-            <a:endParaRPr lang="en-US" sz="1200" dirty="0"/>
+            <a:endParaRPr lang="en-US" sz="1100" dirty="0"/>
           </a:p>
         </p:txBody>
       </p:sp>
@@ -4143,7 +4332,7 @@
           </a:prstGeom>
           <a:extLst>
             <a:ext uri="{C572A759-6A51-4108-AA02-DFA0A04FC94B}">
-              <ma14:wrappingTextBoxFlag xmlns:ma14="http://schemas.microsoft.com/office/mac/drawingml/2011/main" xmlns="" val="0"/>
+              <ma14:wrappingTextBoxFlag xmlns:ma14="http://schemas.microsoft.com/office/mac/drawingml/2011/main" val="0"/>
             </a:ext>
           </a:extLst>
         </p:spPr>
@@ -4161,7 +4350,7 @@
           <a:p>
             <a:pPr algn="r"/>
             <a:fld id="{F7021451-1387-4CA6-816F-3879F97B5CBC}" type="slidenum">
-              <a:rPr lang="en-US" b="0"/>
+              <a:rPr b="0" lang="en-US"/>
               <a:t>12</a:t>
             </a:fld>
             <a:endParaRPr lang="en-US"/>
@@ -4196,11 +4385,9 @@
       <p:sp>
         <p:nvSpPr>
           <p:cNvPr id="2" name="Text 0"/>
-          <p:cNvSpPr>
-            <a:spLocks noGrp="1"/>
-          </p:cNvSpPr>
+          <p:cNvSpPr/>
           <p:nvPr>
-            <p:ph type="title" idx="100" hasCustomPrompt="1"/>
+            <p:ph idx="100" type="title" hasCustomPrompt="1"/>
           </p:nvPr>
         </p:nvSpPr>
         <p:spPr>
@@ -4218,7 +4405,7 @@
           <a:bodyPr wrap="square" lIns="0" tIns="0" rIns="0" bIns="0" rtlCol="0" anchor="ctr"/>
           <a:lstStyle/>
           <a:p>
-            <a:pPr marL="0" indent="0" algn="l">
+            <a:pPr algn="l" indent="0" marL="0">
               <a:buNone/>
             </a:pPr>
             <a:r>
@@ -4259,13 +4446,6 @@
             <a:prstDash val="solid"/>
           </a:ln>
         </p:spPr>
-        <p:txBody>
-          <a:bodyPr/>
-          <a:lstStyle/>
-          <a:p>
-            <a:endParaRPr lang="ru-RU"/>
-          </a:p>
-        </p:txBody>
       </p:sp>
       <p:sp>
         <p:nvSpPr>
@@ -4288,7 +4468,7 @@
           <a:bodyPr wrap="square" lIns="0" tIns="0" rIns="0" bIns="0" rtlCol="0" anchor="ctr"/>
           <a:lstStyle/>
           <a:p>
-            <a:pPr marL="0" indent="0">
+            <a:pPr indent="0" marL="0">
               <a:buNone/>
             </a:pPr>
             <a:r>
@@ -4324,7 +4504,7 @@
           <a:bodyPr wrap="square" lIns="0" tIns="0" rIns="0" bIns="0" rtlCol="0" anchor="t"/>
           <a:lstStyle/>
           <a:p>
-            <a:pPr marL="0" indent="0">
+            <a:pPr indent="0" marL="0">
               <a:buNone/>
             </a:pPr>
             <a:r>
@@ -4365,13 +4545,6 @@
             <a:prstDash val="solid"/>
           </a:ln>
         </p:spPr>
-        <p:txBody>
-          <a:bodyPr/>
-          <a:lstStyle/>
-          <a:p>
-            <a:endParaRPr lang="ru-RU"/>
-          </a:p>
-        </p:txBody>
       </p:sp>
       <p:sp>
         <p:nvSpPr>
@@ -4394,7 +4567,7 @@
           <a:bodyPr wrap="square" lIns="0" tIns="0" rIns="0" bIns="0" rtlCol="0" anchor="ctr"/>
           <a:lstStyle/>
           <a:p>
-            <a:pPr marL="0" indent="0">
+            <a:pPr indent="0" marL="0">
               <a:buNone/>
             </a:pPr>
             <a:r>
@@ -4430,7 +4603,7 @@
           <a:bodyPr wrap="square" lIns="0" tIns="0" rIns="0" bIns="0" rtlCol="0" anchor="t"/>
           <a:lstStyle/>
           <a:p>
-            <a:pPr marL="0" indent="0">
+            <a:pPr indent="0" marL="0">
               <a:buNone/>
             </a:pPr>
             <a:r>
@@ -4471,13 +4644,6 @@
             <a:prstDash val="solid"/>
           </a:ln>
         </p:spPr>
-        <p:txBody>
-          <a:bodyPr/>
-          <a:lstStyle/>
-          <a:p>
-            <a:endParaRPr lang="ru-RU"/>
-          </a:p>
-        </p:txBody>
       </p:sp>
       <p:sp>
         <p:nvSpPr>
@@ -4500,7 +4666,7 @@
           <a:bodyPr wrap="square" lIns="0" tIns="0" rIns="0" bIns="0" rtlCol="0" anchor="ctr"/>
           <a:lstStyle/>
           <a:p>
-            <a:pPr marL="0" indent="0">
+            <a:pPr indent="0" marL="0">
               <a:buNone/>
             </a:pPr>
             <a:r>
@@ -4536,7 +4702,7 @@
           <a:bodyPr wrap="square" lIns="0" tIns="0" rIns="0" bIns="0" rtlCol="0" anchor="t"/>
           <a:lstStyle/>
           <a:p>
-            <a:pPr marL="0" indent="0">
+            <a:pPr indent="0" marL="0">
               <a:buNone/>
             </a:pPr>
             <a:r>
@@ -4577,13 +4743,6 @@
             <a:prstDash val="solid"/>
           </a:ln>
         </p:spPr>
-        <p:txBody>
-          <a:bodyPr/>
-          <a:lstStyle/>
-          <a:p>
-            <a:endParaRPr lang="ru-RU"/>
-          </a:p>
-        </p:txBody>
       </p:sp>
       <p:sp>
         <p:nvSpPr>
@@ -4606,7 +4765,7 @@
           <a:bodyPr wrap="square" lIns="0" tIns="0" rIns="0" bIns="0" rtlCol="0" anchor="ctr"/>
           <a:lstStyle/>
           <a:p>
-            <a:pPr marL="0" indent="0">
+            <a:pPr indent="0" marL="0">
               <a:buNone/>
             </a:pPr>
             <a:r>
@@ -4642,7 +4801,7 @@
           <a:bodyPr wrap="square" lIns="0" tIns="0" rIns="0" bIns="0" rtlCol="0" anchor="t"/>
           <a:lstStyle/>
           <a:p>
-            <a:pPr marL="0" indent="0">
+            <a:pPr indent="0" marL="0">
               <a:buNone/>
             </a:pPr>
             <a:r>
@@ -4665,7 +4824,7 @@
         </p:nvSpPr>
         <p:spPr>
           <a:xfrm>
-            <a:off x="548640" y="6301641"/>
+            <a:off x="548640" y="5989320"/>
             <a:ext cx="11094415" cy="274320"/>
           </a:xfrm>
           <a:prstGeom prst="rect">
@@ -4678,7 +4837,7 @@
           <a:bodyPr wrap="square" lIns="0" tIns="0" rIns="0" bIns="0" rtlCol="0" anchor="t"/>
           <a:lstStyle/>
           <a:p>
-            <a:pPr marL="0" indent="0">
+            <a:pPr indent="0" marL="0">
               <a:buNone/>
             </a:pPr>
             <a:r>
@@ -4713,7 +4872,7 @@
           </a:prstGeom>
           <a:extLst>
             <a:ext uri="{C572A759-6A51-4108-AA02-DFA0A04FC94B}">
-              <ma14:wrappingTextBoxFlag xmlns:ma14="http://schemas.microsoft.com/office/mac/drawingml/2011/main" xmlns="" val="0"/>
+              <ma14:wrappingTextBoxFlag xmlns:ma14="http://schemas.microsoft.com/office/mac/drawingml/2011/main" val="0"/>
             </a:ext>
           </a:extLst>
         </p:spPr>
@@ -4731,7 +4890,7 @@
           <a:p>
             <a:pPr algn="r"/>
             <a:fld id="{F7021451-1387-4CA6-816F-3879F97B5CBC}" type="slidenum">
-              <a:rPr lang="en-US" b="0"/>
+              <a:rPr b="0" lang="en-US"/>
               <a:t>13</a:t>
             </a:fld>
             <a:endParaRPr lang="en-US"/>
@@ -4766,11 +4925,9 @@
       <p:sp>
         <p:nvSpPr>
           <p:cNvPr id="2" name="Text 0"/>
-          <p:cNvSpPr>
-            <a:spLocks noGrp="1"/>
-          </p:cNvSpPr>
+          <p:cNvSpPr/>
           <p:nvPr>
-            <p:ph type="title" idx="100" hasCustomPrompt="1"/>
+            <p:ph idx="100" type="title" hasCustomPrompt="1"/>
           </p:nvPr>
         </p:nvSpPr>
         <p:spPr>
@@ -4788,7 +4945,7 @@
           <a:bodyPr wrap="square" lIns="0" tIns="0" rIns="0" bIns="0" rtlCol="0" anchor="ctr"/>
           <a:lstStyle/>
           <a:p>
-            <a:pPr marL="0" indent="0" algn="l">
+            <a:pPr algn="l" indent="0" marL="0">
               <a:buNone/>
             </a:pPr>
             <a:r>
@@ -4829,13 +4986,6 @@
             <a:prstDash val="solid"/>
           </a:ln>
         </p:spPr>
-        <p:txBody>
-          <a:bodyPr/>
-          <a:lstStyle/>
-          <a:p>
-            <a:endParaRPr lang="ru-RU"/>
-          </a:p>
-        </p:txBody>
       </p:sp>
       <p:sp>
         <p:nvSpPr>
@@ -4858,7 +5008,7 @@
           <a:bodyPr wrap="square" lIns="0" tIns="0" rIns="0" bIns="0" rtlCol="0" anchor="ctr"/>
           <a:lstStyle/>
           <a:p>
-            <a:pPr marL="0" indent="0">
+            <a:pPr indent="0" marL="0">
               <a:buNone/>
             </a:pPr>
             <a:r>
@@ -4894,7 +5044,7 @@
           <a:bodyPr wrap="square" lIns="0" tIns="0" rIns="0" bIns="0" rtlCol="0" anchor="t"/>
           <a:lstStyle/>
           <a:p>
-            <a:pPr marL="0" indent="0">
+            <a:pPr indent="0" marL="0">
               <a:buNone/>
             </a:pPr>
             <a:r>
@@ -4935,13 +5085,6 @@
             <a:prstDash val="solid"/>
           </a:ln>
         </p:spPr>
-        <p:txBody>
-          <a:bodyPr/>
-          <a:lstStyle/>
-          <a:p>
-            <a:endParaRPr lang="ru-RU"/>
-          </a:p>
-        </p:txBody>
       </p:sp>
       <p:sp>
         <p:nvSpPr>
@@ -4964,7 +5107,7 @@
           <a:bodyPr wrap="square" lIns="0" tIns="0" rIns="0" bIns="0" rtlCol="0" anchor="ctr"/>
           <a:lstStyle/>
           <a:p>
-            <a:pPr marL="0" indent="0">
+            <a:pPr indent="0" marL="0">
               <a:buNone/>
             </a:pPr>
             <a:r>
@@ -5000,7 +5143,7 @@
           <a:bodyPr wrap="square" lIns="0" tIns="0" rIns="0" bIns="0" rtlCol="0" anchor="t"/>
           <a:lstStyle/>
           <a:p>
-            <a:pPr marL="0" indent="0">
+            <a:pPr indent="0" marL="0">
               <a:buNone/>
             </a:pPr>
             <a:r>
@@ -5041,13 +5184,6 @@
             <a:prstDash val="solid"/>
           </a:ln>
         </p:spPr>
-        <p:txBody>
-          <a:bodyPr/>
-          <a:lstStyle/>
-          <a:p>
-            <a:endParaRPr lang="ru-RU"/>
-          </a:p>
-        </p:txBody>
       </p:sp>
       <p:sp>
         <p:nvSpPr>
@@ -5070,7 +5206,7 @@
           <a:bodyPr wrap="square" lIns="0" tIns="0" rIns="0" bIns="0" rtlCol="0" anchor="ctr"/>
           <a:lstStyle/>
           <a:p>
-            <a:pPr marL="0" indent="0">
+            <a:pPr indent="0" marL="0">
               <a:buNone/>
             </a:pPr>
             <a:r>
@@ -5106,7 +5242,7 @@
           <a:bodyPr wrap="square" lIns="0" tIns="0" rIns="0" bIns="0" rtlCol="0" anchor="t"/>
           <a:lstStyle/>
           <a:p>
-            <a:pPr marL="0" indent="0">
+            <a:pPr indent="0" marL="0">
               <a:buNone/>
             </a:pPr>
             <a:r>
@@ -5147,13 +5283,6 @@
             <a:prstDash val="solid"/>
           </a:ln>
         </p:spPr>
-        <p:txBody>
-          <a:bodyPr/>
-          <a:lstStyle/>
-          <a:p>
-            <a:endParaRPr lang="ru-RU"/>
-          </a:p>
-        </p:txBody>
       </p:sp>
       <p:sp>
         <p:nvSpPr>
@@ -5176,7 +5305,7 @@
           <a:bodyPr wrap="square" lIns="0" tIns="0" rIns="0" bIns="0" rtlCol="0" anchor="ctr"/>
           <a:lstStyle/>
           <a:p>
-            <a:pPr marL="0" indent="0">
+            <a:pPr indent="0" marL="0">
               <a:buNone/>
             </a:pPr>
             <a:r>
@@ -5212,7 +5341,7 @@
           <a:bodyPr wrap="square" lIns="0" tIns="0" rIns="0" bIns="0" rtlCol="0" anchor="t"/>
           <a:lstStyle/>
           <a:p>
-            <a:pPr marL="0" indent="0">
+            <a:pPr indent="0" marL="0">
               <a:buNone/>
             </a:pPr>
             <a:r>
@@ -5247,7 +5376,7 @@
           </a:prstGeom>
           <a:extLst>
             <a:ext uri="{C572A759-6A51-4108-AA02-DFA0A04FC94B}">
-              <ma14:wrappingTextBoxFlag xmlns:ma14="http://schemas.microsoft.com/office/mac/drawingml/2011/main" xmlns="" val="0"/>
+              <ma14:wrappingTextBoxFlag xmlns:ma14="http://schemas.microsoft.com/office/mac/drawingml/2011/main" val="0"/>
             </a:ext>
           </a:extLst>
         </p:spPr>
@@ -5265,7 +5394,7 @@
           <a:p>
             <a:pPr algn="r"/>
             <a:fld id="{F7021451-1387-4CA6-816F-3879F97B5CBC}" type="slidenum">
-              <a:rPr lang="en-US" b="0"/>
+              <a:rPr b="0" lang="en-US"/>
               <a:t>14</a:t>
             </a:fld>
             <a:endParaRPr lang="en-US"/>
@@ -5300,11 +5429,9 @@
       <p:sp>
         <p:nvSpPr>
           <p:cNvPr id="2" name="Text 0"/>
-          <p:cNvSpPr>
-            <a:spLocks noGrp="1"/>
-          </p:cNvSpPr>
+          <p:cNvSpPr/>
           <p:nvPr>
-            <p:ph type="title" idx="100" hasCustomPrompt="1"/>
+            <p:ph idx="100" type="title" hasCustomPrompt="1"/>
           </p:nvPr>
         </p:nvSpPr>
         <p:spPr>
@@ -5322,7 +5449,7 @@
           <a:bodyPr wrap="square" lIns="0" tIns="0" rIns="0" bIns="0" rtlCol="0" anchor="ctr"/>
           <a:lstStyle/>
           <a:p>
-            <a:pPr marL="0" indent="0" algn="l">
+            <a:pPr algn="l" indent="0" marL="0">
               <a:buNone/>
             </a:pPr>
             <a:r>
@@ -5363,13 +5490,6 @@
             <a:prstDash val="solid"/>
           </a:ln>
         </p:spPr>
-        <p:txBody>
-          <a:bodyPr/>
-          <a:lstStyle/>
-          <a:p>
-            <a:endParaRPr lang="ru-RU"/>
-          </a:p>
-        </p:txBody>
       </p:sp>
       <p:sp>
         <p:nvSpPr>
@@ -5392,7 +5512,7 @@
           <a:bodyPr wrap="square" lIns="0" tIns="0" rIns="0" bIns="0" rtlCol="0" anchor="ctr"/>
           <a:lstStyle/>
           <a:p>
-            <a:pPr marL="0" indent="0">
+            <a:pPr indent="0" marL="0">
               <a:buNone/>
             </a:pPr>
             <a:r>
@@ -5428,7 +5548,7 @@
           <a:bodyPr wrap="square" lIns="0" tIns="0" rIns="0" bIns="0" rtlCol="0" anchor="t"/>
           <a:lstStyle/>
           <a:p>
-            <a:pPr marL="0" indent="0">
+            <a:pPr indent="0" marL="0">
               <a:buNone/>
             </a:pPr>
             <a:r>
@@ -5464,7 +5584,7 @@
           <a:bodyPr wrap="square" lIns="0" tIns="0" rIns="0" bIns="0" rtlCol="0" anchor="t"/>
           <a:lstStyle/>
           <a:p>
-            <a:pPr marL="0" indent="0">
+            <a:pPr indent="0" marL="0">
               <a:buNone/>
             </a:pPr>
             <a:r>
@@ -5505,13 +5625,6 @@
             <a:prstDash val="solid"/>
           </a:ln>
         </p:spPr>
-        <p:txBody>
-          <a:bodyPr/>
-          <a:lstStyle/>
-          <a:p>
-            <a:endParaRPr lang="ru-RU"/>
-          </a:p>
-        </p:txBody>
       </p:sp>
       <p:sp>
         <p:nvSpPr>
@@ -5534,7 +5647,7 @@
           <a:bodyPr wrap="square" lIns="0" tIns="0" rIns="0" bIns="0" rtlCol="0" anchor="ctr"/>
           <a:lstStyle/>
           <a:p>
-            <a:pPr marL="0" indent="0">
+            <a:pPr indent="0" marL="0">
               <a:buNone/>
             </a:pPr>
             <a:r>
@@ -5570,7 +5683,7 @@
           <a:bodyPr wrap="square" lIns="0" tIns="0" rIns="0" bIns="0" rtlCol="0" anchor="t"/>
           <a:lstStyle/>
           <a:p>
-            <a:pPr marL="0" indent="0">
+            <a:pPr indent="0" marL="0">
               <a:buNone/>
             </a:pPr>
             <a:r>
@@ -5606,7 +5719,7 @@
           <a:bodyPr wrap="square" lIns="0" tIns="0" rIns="0" bIns="0" rtlCol="0" anchor="t"/>
           <a:lstStyle/>
           <a:p>
-            <a:pPr marL="0" indent="0">
+            <a:pPr indent="0" marL="0">
               <a:buNone/>
             </a:pPr>
             <a:r>
@@ -5647,13 +5760,6 @@
             <a:prstDash val="solid"/>
           </a:ln>
         </p:spPr>
-        <p:txBody>
-          <a:bodyPr/>
-          <a:lstStyle/>
-          <a:p>
-            <a:endParaRPr lang="ru-RU"/>
-          </a:p>
-        </p:txBody>
       </p:sp>
       <p:sp>
         <p:nvSpPr>
@@ -5676,7 +5782,7 @@
           <a:bodyPr wrap="square" lIns="0" tIns="0" rIns="0" bIns="0" rtlCol="0" anchor="ctr"/>
           <a:lstStyle/>
           <a:p>
-            <a:pPr marL="0" indent="0">
+            <a:pPr indent="0" marL="0">
               <a:buNone/>
             </a:pPr>
             <a:r>
@@ -5712,7 +5818,7 @@
           <a:bodyPr wrap="square" lIns="0" tIns="0" rIns="0" bIns="0" rtlCol="0" anchor="t"/>
           <a:lstStyle/>
           <a:p>
-            <a:pPr marL="0" indent="0">
+            <a:pPr indent="0" marL="0">
               <a:buNone/>
             </a:pPr>
             <a:r>
@@ -5748,7 +5854,7 @@
           <a:bodyPr wrap="square" lIns="0" tIns="0" rIns="0" bIns="0" rtlCol="0" anchor="t"/>
           <a:lstStyle/>
           <a:p>
-            <a:pPr marL="0" indent="0">
+            <a:pPr indent="0" marL="0">
               <a:buNone/>
             </a:pPr>
             <a:r>
@@ -5789,13 +5895,6 @@
             <a:prstDash val="solid"/>
           </a:ln>
         </p:spPr>
-        <p:txBody>
-          <a:bodyPr/>
-          <a:lstStyle/>
-          <a:p>
-            <a:endParaRPr lang="ru-RU"/>
-          </a:p>
-        </p:txBody>
       </p:sp>
       <p:sp>
         <p:nvSpPr>
@@ -5818,7 +5917,7 @@
           <a:bodyPr wrap="square" lIns="0" tIns="0" rIns="0" bIns="0" rtlCol="0" anchor="ctr"/>
           <a:lstStyle/>
           <a:p>
-            <a:pPr marL="0" indent="0">
+            <a:pPr indent="0" marL="0">
               <a:buNone/>
             </a:pPr>
             <a:r>
@@ -5854,7 +5953,7 @@
           <a:bodyPr wrap="square" lIns="0" tIns="0" rIns="0" bIns="0" rtlCol="0" anchor="t"/>
           <a:lstStyle/>
           <a:p>
-            <a:pPr marL="0" indent="0">
+            <a:pPr indent="0" marL="0">
               <a:buNone/>
             </a:pPr>
             <a:r>
@@ -5890,7 +5989,7 @@
           <a:bodyPr wrap="square" lIns="0" tIns="0" rIns="0" bIns="0" rtlCol="0" anchor="t"/>
           <a:lstStyle/>
           <a:p>
-            <a:pPr marL="0" indent="0">
+            <a:pPr indent="0" marL="0">
               <a:buNone/>
             </a:pPr>
             <a:r>
@@ -5926,7 +6025,7 @@
           <a:bodyPr wrap="square" lIns="0" tIns="0" rIns="0" bIns="0" rtlCol="0" anchor="t"/>
           <a:lstStyle/>
           <a:p>
-            <a:pPr marL="0" indent="0">
+            <a:pPr indent="0" marL="0">
               <a:buNone/>
             </a:pPr>
             <a:r>
@@ -5961,7 +6060,7 @@
           </a:prstGeom>
           <a:extLst>
             <a:ext uri="{C572A759-6A51-4108-AA02-DFA0A04FC94B}">
-              <ma14:wrappingTextBoxFlag xmlns:ma14="http://schemas.microsoft.com/office/mac/drawingml/2011/main" xmlns="" val="0"/>
+              <ma14:wrappingTextBoxFlag xmlns:ma14="http://schemas.microsoft.com/office/mac/drawingml/2011/main" val="0"/>
             </a:ext>
           </a:extLst>
         </p:spPr>
@@ -5979,7 +6078,7 @@
           <a:p>
             <a:pPr algn="r"/>
             <a:fld id="{F7021451-1387-4CA6-816F-3879F97B5CBC}" type="slidenum">
-              <a:rPr lang="en-US" b="0"/>
+              <a:rPr b="0" lang="en-US"/>
               <a:t>15</a:t>
             </a:fld>
             <a:endParaRPr lang="en-US"/>
@@ -6014,11 +6113,9 @@
       <p:sp>
         <p:nvSpPr>
           <p:cNvPr id="2" name="Text 0"/>
-          <p:cNvSpPr>
-            <a:spLocks noGrp="1"/>
-          </p:cNvSpPr>
+          <p:cNvSpPr/>
           <p:nvPr>
-            <p:ph type="title" idx="100" hasCustomPrompt="1"/>
+            <p:ph idx="100" type="title" hasCustomPrompt="1"/>
           </p:nvPr>
         </p:nvSpPr>
         <p:spPr>
@@ -6036,7 +6133,7 @@
           <a:bodyPr wrap="square" lIns="0" tIns="0" rIns="0" bIns="0" rtlCol="0" anchor="ctr"/>
           <a:lstStyle/>
           <a:p>
-            <a:pPr marL="0" indent="0" algn="l">
+            <a:pPr algn="l" indent="0" marL="0">
               <a:buNone/>
             </a:pPr>
             <a:r>
@@ -6075,13 +6172,6 @@
             <a:prstDash val="solid"/>
           </a:ln>
         </p:spPr>
-        <p:txBody>
-          <a:bodyPr/>
-          <a:lstStyle/>
-          <a:p>
-            <a:endParaRPr lang="ru-RU"/>
-          </a:p>
-        </p:txBody>
       </p:sp>
       <p:sp>
         <p:nvSpPr>
@@ -6104,7 +6194,7 @@
           <a:bodyPr wrap="square" lIns="0" tIns="0" rIns="0" bIns="0" rtlCol="0" anchor="ctr"/>
           <a:lstStyle/>
           <a:p>
-            <a:pPr marL="0" indent="0" algn="ctr">
+            <a:pPr algn="ctr" indent="0" marL="0">
               <a:buNone/>
             </a:pPr>
             <a:r>
@@ -6140,7 +6230,7 @@
           <a:bodyPr wrap="square" lIns="0" tIns="0" rIns="0" bIns="0" rtlCol="0" anchor="t"/>
           <a:lstStyle/>
           <a:p>
-            <a:pPr marL="0" indent="0">
+            <a:pPr indent="0" marL="0">
               <a:buNone/>
             </a:pPr>
             <a:r>
@@ -6176,7 +6266,7 @@
           <a:bodyPr wrap="square" lIns="0" tIns="0" rIns="0" bIns="0" rtlCol="0" anchor="t"/>
           <a:lstStyle/>
           <a:p>
-            <a:pPr marL="0" indent="0">
+            <a:pPr indent="0" marL="0">
               <a:buNone/>
             </a:pPr>
             <a:r>
@@ -6215,13 +6305,6 @@
             <a:prstDash val="solid"/>
           </a:ln>
         </p:spPr>
-        <p:txBody>
-          <a:bodyPr/>
-          <a:lstStyle/>
-          <a:p>
-            <a:endParaRPr lang="ru-RU"/>
-          </a:p>
-        </p:txBody>
       </p:sp>
       <p:sp>
         <p:nvSpPr>
@@ -6244,7 +6327,7 @@
           <a:bodyPr wrap="square" lIns="0" tIns="0" rIns="0" bIns="0" rtlCol="0" anchor="ctr"/>
           <a:lstStyle/>
           <a:p>
-            <a:pPr marL="0" indent="0" algn="ctr">
+            <a:pPr algn="ctr" indent="0" marL="0">
               <a:buNone/>
             </a:pPr>
             <a:r>
@@ -6280,7 +6363,7 @@
           <a:bodyPr wrap="square" lIns="0" tIns="0" rIns="0" bIns="0" rtlCol="0" anchor="t"/>
           <a:lstStyle/>
           <a:p>
-            <a:pPr marL="0" indent="0">
+            <a:pPr indent="0" marL="0">
               <a:buNone/>
             </a:pPr>
             <a:r>
@@ -6316,7 +6399,7 @@
           <a:bodyPr wrap="square" lIns="0" tIns="0" rIns="0" bIns="0" rtlCol="0" anchor="t"/>
           <a:lstStyle/>
           <a:p>
-            <a:pPr marL="0" indent="0">
+            <a:pPr indent="0" marL="0">
               <a:buNone/>
             </a:pPr>
             <a:r>
@@ -6355,13 +6438,6 @@
             <a:prstDash val="solid"/>
           </a:ln>
         </p:spPr>
-        <p:txBody>
-          <a:bodyPr/>
-          <a:lstStyle/>
-          <a:p>
-            <a:endParaRPr lang="ru-RU"/>
-          </a:p>
-        </p:txBody>
       </p:sp>
       <p:sp>
         <p:nvSpPr>
@@ -6384,7 +6460,7 @@
           <a:bodyPr wrap="square" lIns="0" tIns="0" rIns="0" bIns="0" rtlCol="0" anchor="ctr"/>
           <a:lstStyle/>
           <a:p>
-            <a:pPr marL="0" indent="0" algn="ctr">
+            <a:pPr algn="ctr" indent="0" marL="0">
               <a:buNone/>
             </a:pPr>
             <a:r>
@@ -6420,7 +6496,7 @@
           <a:bodyPr wrap="square" lIns="0" tIns="0" rIns="0" bIns="0" rtlCol="0" anchor="t"/>
           <a:lstStyle/>
           <a:p>
-            <a:pPr marL="0" indent="0">
+            <a:pPr indent="0" marL="0">
               <a:buNone/>
             </a:pPr>
             <a:r>
@@ -6456,7 +6532,7 @@
           <a:bodyPr wrap="square" lIns="0" tIns="0" rIns="0" bIns="0" rtlCol="0" anchor="t"/>
           <a:lstStyle/>
           <a:p>
-            <a:pPr marL="0" indent="0">
+            <a:pPr indent="0" marL="0">
               <a:buNone/>
             </a:pPr>
             <a:r>
@@ -6492,7 +6568,7 @@
           <a:bodyPr wrap="square" lIns="0" tIns="0" rIns="0" bIns="0" rtlCol="0" anchor="t"/>
           <a:lstStyle/>
           <a:p>
-            <a:pPr marL="0" indent="0">
+            <a:pPr indent="0" marL="0">
               <a:buNone/>
             </a:pPr>
             <a:r>
@@ -6528,7 +6604,7 @@
           <a:bodyPr wrap="square" lIns="0" tIns="0" rIns="0" bIns="0" rtlCol="0" anchor="t"/>
           <a:lstStyle/>
           <a:p>
-            <a:pPr marL="0" indent="0">
+            <a:pPr indent="0" marL="0">
               <a:buNone/>
             </a:pPr>
             <a:r>
@@ -6569,24 +6645,17 @@
             <a:prstDash val="solid"/>
           </a:ln>
         </p:spPr>
-        <p:txBody>
-          <a:bodyPr/>
-          <a:lstStyle/>
-          <a:p>
-            <a:endParaRPr lang="ru-RU"/>
-          </a:p>
-        </p:txBody>
       </p:sp>
       <p:pic>
         <p:nvPicPr>
-          <p:cNvPr id="18" name="QR-код сайта" descr="/tmp/ipe-qr.png"/>
+          <p:cNvPr id="18" name="QR-код сайта" descr="/tmp/ipe-qr.png">    </p:cNvPr>
           <p:cNvPicPr>
             <a:picLocks noChangeAspect="1"/>
           </p:cNvPicPr>
           <p:nvPr/>
         </p:nvPicPr>
         <p:blipFill>
-          <a:blip r:embed="rId3"/>
+          <a:blip r:embed="rId1"/>
           <a:stretch>
             <a:fillRect/>
           </a:stretch>
@@ -6622,7 +6691,7 @@
           <a:bodyPr wrap="square" lIns="0" tIns="0" rIns="0" bIns="0" rtlCol="0" anchor="t"/>
           <a:lstStyle/>
           <a:p>
-            <a:pPr marL="0" indent="0" algn="ctr">
+            <a:pPr algn="ctr" indent="0" marL="0">
               <a:buNone/>
             </a:pPr>
             <a:r>
@@ -6658,7 +6727,7 @@
           <a:bodyPr wrap="square" lIns="0" tIns="0" rIns="0" bIns="0" rtlCol="0" anchor="t"/>
           <a:lstStyle/>
           <a:p>
-            <a:pPr marL="0" indent="0" algn="ctr">
+            <a:pPr algn="ctr" indent="0" marL="0">
               <a:buNone/>
             </a:pPr>
             <a:r>
@@ -6693,7 +6762,7 @@
           </a:prstGeom>
           <a:extLst>
             <a:ext uri="{C572A759-6A51-4108-AA02-DFA0A04FC94B}">
-              <ma14:wrappingTextBoxFlag xmlns:ma14="http://schemas.microsoft.com/office/mac/drawingml/2011/main" xmlns="" val="0"/>
+              <ma14:wrappingTextBoxFlag xmlns:ma14="http://schemas.microsoft.com/office/mac/drawingml/2011/main" val="0"/>
             </a:ext>
           </a:extLst>
         </p:spPr>
@@ -6711,7 +6780,7 @@
           <a:p>
             <a:pPr algn="r"/>
             <a:fld id="{F7021451-1387-4CA6-816F-3879F97B5CBC}" type="slidenum">
-              <a:rPr lang="en-US" b="0"/>
+              <a:rPr b="0" lang="en-US"/>
               <a:t>16</a:t>
             </a:fld>
             <a:endParaRPr lang="en-US"/>
@@ -6746,11 +6815,9 @@
       <p:sp>
         <p:nvSpPr>
           <p:cNvPr id="2" name="Text 0"/>
-          <p:cNvSpPr>
-            <a:spLocks noGrp="1"/>
-          </p:cNvSpPr>
+          <p:cNvSpPr/>
           <p:nvPr>
-            <p:ph type="title" idx="100" hasCustomPrompt="1"/>
+            <p:ph idx="100" type="title" hasCustomPrompt="1"/>
           </p:nvPr>
         </p:nvSpPr>
         <p:spPr>
@@ -6768,7 +6835,7 @@
           <a:bodyPr wrap="square" lIns="0" tIns="0" rIns="0" bIns="0" rtlCol="0" anchor="ctr"/>
           <a:lstStyle/>
           <a:p>
-            <a:pPr marL="0" indent="0" algn="l">
+            <a:pPr algn="l" indent="0" marL="0">
               <a:buNone/>
             </a:pPr>
             <a:r>
@@ -6804,7 +6871,7 @@
           <a:bodyPr wrap="square" lIns="0" tIns="0" rIns="0" bIns="0" rtlCol="0" anchor="t"/>
           <a:lstStyle/>
           <a:p>
-            <a:pPr marL="0" indent="0">
+            <a:pPr indent="0" marL="0">
               <a:buNone/>
             </a:pPr>
             <a:r>
@@ -6845,13 +6912,6 @@
             <a:prstDash val="solid"/>
           </a:ln>
         </p:spPr>
-        <p:txBody>
-          <a:bodyPr/>
-          <a:lstStyle/>
-          <a:p>
-            <a:endParaRPr lang="ru-RU"/>
-          </a:p>
-        </p:txBody>
       </p:sp>
       <p:sp>
         <p:nvSpPr>
@@ -6874,7 +6934,7 @@
           <a:bodyPr wrap="square" lIns="0" tIns="0" rIns="0" bIns="0" rtlCol="0" anchor="ctr"/>
           <a:lstStyle/>
           <a:p>
-            <a:pPr marL="0" indent="0">
+            <a:pPr indent="0" marL="0">
               <a:buNone/>
             </a:pPr>
             <a:r>
@@ -6910,7 +6970,7 @@
           <a:bodyPr wrap="square" lIns="0" tIns="0" rIns="0" bIns="0" rtlCol="0" anchor="t"/>
           <a:lstStyle/>
           <a:p>
-            <a:pPr marL="0" indent="0">
+            <a:pPr indent="0" marL="0">
               <a:buNone/>
             </a:pPr>
             <a:r>
@@ -6951,13 +7011,6 @@
             <a:prstDash val="solid"/>
           </a:ln>
         </p:spPr>
-        <p:txBody>
-          <a:bodyPr/>
-          <a:lstStyle/>
-          <a:p>
-            <a:endParaRPr lang="ru-RU"/>
-          </a:p>
-        </p:txBody>
       </p:sp>
       <p:sp>
         <p:nvSpPr>
@@ -6980,7 +7033,7 @@
           <a:bodyPr wrap="square" lIns="0" tIns="0" rIns="0" bIns="0" rtlCol="0" anchor="ctr"/>
           <a:lstStyle/>
           <a:p>
-            <a:pPr marL="0" indent="0">
+            <a:pPr indent="0" marL="0">
               <a:buNone/>
             </a:pPr>
             <a:r>
@@ -7016,7 +7069,7 @@
           <a:bodyPr wrap="square" lIns="0" tIns="0" rIns="0" bIns="0" rtlCol="0" anchor="t"/>
           <a:lstStyle/>
           <a:p>
-            <a:pPr marL="0" indent="0">
+            <a:pPr indent="0" marL="0">
               <a:buNone/>
             </a:pPr>
             <a:r>
@@ -7057,13 +7110,6 @@
             <a:prstDash val="solid"/>
           </a:ln>
         </p:spPr>
-        <p:txBody>
-          <a:bodyPr/>
-          <a:lstStyle/>
-          <a:p>
-            <a:endParaRPr lang="ru-RU"/>
-          </a:p>
-        </p:txBody>
       </p:sp>
       <p:sp>
         <p:nvSpPr>
@@ -7086,7 +7132,7 @@
           <a:bodyPr wrap="square" lIns="0" tIns="0" rIns="0" bIns="0" rtlCol="0" anchor="ctr"/>
           <a:lstStyle/>
           <a:p>
-            <a:pPr marL="0" indent="0">
+            <a:pPr indent="0" marL="0">
               <a:buNone/>
             </a:pPr>
             <a:r>
@@ -7122,7 +7168,7 @@
           <a:bodyPr wrap="square" lIns="0" tIns="0" rIns="0" bIns="0" rtlCol="0" anchor="t"/>
           <a:lstStyle/>
           <a:p>
-            <a:pPr marL="0" indent="0">
+            <a:pPr indent="0" marL="0">
               <a:buNone/>
             </a:pPr>
             <a:r>
@@ -7158,7 +7204,7 @@
           <a:bodyPr wrap="square" lIns="0" tIns="0" rIns="0" bIns="0" rtlCol="0" anchor="t"/>
           <a:lstStyle/>
           <a:p>
-            <a:pPr marL="0" indent="0">
+            <a:pPr indent="0" marL="0">
               <a:buNone/>
             </a:pPr>
             <a:r>
@@ -7193,7 +7239,7 @@
           </a:prstGeom>
           <a:extLst>
             <a:ext uri="{C572A759-6A51-4108-AA02-DFA0A04FC94B}">
-              <ma14:wrappingTextBoxFlag xmlns:ma14="http://schemas.microsoft.com/office/mac/drawingml/2011/main" xmlns="" val="0"/>
+              <ma14:wrappingTextBoxFlag xmlns:ma14="http://schemas.microsoft.com/office/mac/drawingml/2011/main" val="0"/>
             </a:ext>
           </a:extLst>
         </p:spPr>
@@ -7211,7 +7257,7 @@
           <a:p>
             <a:pPr algn="r"/>
             <a:fld id="{F7021451-1387-4CA6-816F-3879F97B5CBC}" type="slidenum">
-              <a:rPr lang="en-US" b="0"/>
+              <a:rPr b="0" lang="en-US"/>
               <a:t>2</a:t>
             </a:fld>
             <a:endParaRPr lang="en-US"/>
@@ -7246,11 +7292,9 @@
       <p:sp>
         <p:nvSpPr>
           <p:cNvPr id="2" name="Text 0"/>
-          <p:cNvSpPr>
-            <a:spLocks noGrp="1"/>
-          </p:cNvSpPr>
+          <p:cNvSpPr/>
           <p:nvPr>
-            <p:ph type="title" idx="100" hasCustomPrompt="1"/>
+            <p:ph idx="100" type="title" hasCustomPrompt="1"/>
           </p:nvPr>
         </p:nvSpPr>
         <p:spPr>
@@ -7268,7 +7312,7 @@
           <a:bodyPr wrap="square" lIns="0" tIns="0" rIns="0" bIns="0" rtlCol="0" anchor="ctr"/>
           <a:lstStyle/>
           <a:p>
-            <a:pPr marL="0" indent="0" algn="l">
+            <a:pPr algn="l" indent="0" marL="0">
               <a:buNone/>
             </a:pPr>
             <a:r>
@@ -7309,13 +7353,6 @@
             <a:prstDash val="solid"/>
           </a:ln>
         </p:spPr>
-        <p:txBody>
-          <a:bodyPr/>
-          <a:lstStyle/>
-          <a:p>
-            <a:endParaRPr lang="ru-RU"/>
-          </a:p>
-        </p:txBody>
       </p:sp>
       <p:sp>
         <p:nvSpPr>
@@ -7338,7 +7375,7 @@
           <a:bodyPr wrap="square" lIns="0" tIns="0" rIns="0" bIns="0" rtlCol="0" anchor="t"/>
           <a:lstStyle/>
           <a:p>
-            <a:pPr marL="0" indent="0">
+            <a:pPr indent="0" marL="0">
               <a:buNone/>
             </a:pPr>
             <a:r>
@@ -7374,7 +7411,7 @@
           <a:bodyPr wrap="square" lIns="0" tIns="0" rIns="0" bIns="0" rtlCol="0" anchor="t"/>
           <a:lstStyle/>
           <a:p>
-            <a:pPr marL="0" indent="0">
+            <a:pPr indent="0" marL="0">
               <a:buNone/>
             </a:pPr>
             <a:r>
@@ -7410,7 +7447,7 @@
           <a:bodyPr wrap="square" lIns="0" tIns="0" rIns="0" bIns="0" rtlCol="0" anchor="t"/>
           <a:lstStyle/>
           <a:p>
-            <a:pPr marL="0" indent="0">
+            <a:pPr indent="0" marL="0">
               <a:buNone/>
             </a:pPr>
             <a:r>
@@ -7451,13 +7488,6 @@
             <a:prstDash val="solid"/>
           </a:ln>
         </p:spPr>
-        <p:txBody>
-          <a:bodyPr/>
-          <a:lstStyle/>
-          <a:p>
-            <a:endParaRPr lang="ru-RU"/>
-          </a:p>
-        </p:txBody>
       </p:sp>
       <p:sp>
         <p:nvSpPr>
@@ -7480,7 +7510,7 @@
           <a:bodyPr wrap="square" lIns="0" tIns="0" rIns="0" bIns="0" rtlCol="0" anchor="t"/>
           <a:lstStyle/>
           <a:p>
-            <a:pPr marL="0" indent="0">
+            <a:pPr indent="0" marL="0">
               <a:buNone/>
             </a:pPr>
             <a:r>
@@ -7516,7 +7546,7 @@
           <a:bodyPr wrap="square" lIns="0" tIns="0" rIns="0" bIns="0" rtlCol="0" anchor="t"/>
           <a:lstStyle/>
           <a:p>
-            <a:pPr marL="0" indent="0">
+            <a:pPr indent="0" marL="0">
               <a:buNone/>
             </a:pPr>
             <a:r>
@@ -7552,7 +7582,7 @@
           <a:bodyPr wrap="square" lIns="0" tIns="0" rIns="0" bIns="0" rtlCol="0" anchor="t"/>
           <a:lstStyle/>
           <a:p>
-            <a:pPr marL="0" indent="0">
+            <a:pPr indent="0" marL="0">
               <a:buNone/>
             </a:pPr>
             <a:r>
@@ -7593,13 +7623,6 @@
             <a:prstDash val="solid"/>
           </a:ln>
         </p:spPr>
-        <p:txBody>
-          <a:bodyPr/>
-          <a:lstStyle/>
-          <a:p>
-            <a:endParaRPr lang="ru-RU"/>
-          </a:p>
-        </p:txBody>
       </p:sp>
       <p:sp>
         <p:nvSpPr>
@@ -7622,7 +7645,7 @@
           <a:bodyPr wrap="square" lIns="0" tIns="0" rIns="0" bIns="0" rtlCol="0" anchor="t"/>
           <a:lstStyle/>
           <a:p>
-            <a:pPr marL="0" indent="0">
+            <a:pPr indent="0" marL="0">
               <a:buNone/>
             </a:pPr>
             <a:r>
@@ -7658,7 +7681,7 @@
           <a:bodyPr wrap="square" lIns="0" tIns="0" rIns="0" bIns="0" rtlCol="0" anchor="t"/>
           <a:lstStyle/>
           <a:p>
-            <a:pPr marL="0" indent="0">
+            <a:pPr indent="0" marL="0">
               <a:buNone/>
             </a:pPr>
             <a:r>
@@ -7694,7 +7717,7 @@
           <a:bodyPr wrap="square" lIns="0" tIns="0" rIns="0" bIns="0" rtlCol="0" anchor="t"/>
           <a:lstStyle/>
           <a:p>
-            <a:pPr marL="0" indent="0">
+            <a:pPr indent="0" marL="0">
               <a:buNone/>
             </a:pPr>
             <a:r>
@@ -7730,7 +7753,7 @@
           <a:bodyPr wrap="square" lIns="0" tIns="0" rIns="0" bIns="0" rtlCol="0" anchor="t"/>
           <a:lstStyle/>
           <a:p>
-            <a:pPr marL="0" indent="0">
+            <a:pPr indent="0" marL="0">
               <a:buNone/>
             </a:pPr>
             <a:r>
@@ -7765,7 +7788,7 @@
           </a:prstGeom>
           <a:extLst>
             <a:ext uri="{C572A759-6A51-4108-AA02-DFA0A04FC94B}">
-              <ma14:wrappingTextBoxFlag xmlns:ma14="http://schemas.microsoft.com/office/mac/drawingml/2011/main" xmlns="" val="0"/>
+              <ma14:wrappingTextBoxFlag xmlns:ma14="http://schemas.microsoft.com/office/mac/drawingml/2011/main" val="0"/>
             </a:ext>
           </a:extLst>
         </p:spPr>
@@ -7783,7 +7806,7 @@
           <a:p>
             <a:pPr algn="r"/>
             <a:fld id="{F7021451-1387-4CA6-816F-3879F97B5CBC}" type="slidenum">
-              <a:rPr lang="en-US" b="0"/>
+              <a:rPr b="0" lang="en-US"/>
               <a:t>3</a:t>
             </a:fld>
             <a:endParaRPr lang="en-US"/>
@@ -7818,11 +7841,9 @@
       <p:sp>
         <p:nvSpPr>
           <p:cNvPr id="2" name="Text 0"/>
-          <p:cNvSpPr>
-            <a:spLocks noGrp="1"/>
-          </p:cNvSpPr>
+          <p:cNvSpPr/>
           <p:nvPr>
-            <p:ph type="title" idx="100" hasCustomPrompt="1"/>
+            <p:ph idx="100" type="title" hasCustomPrompt="1"/>
           </p:nvPr>
         </p:nvSpPr>
         <p:spPr>
@@ -7840,7 +7861,7 @@
           <a:bodyPr wrap="square" lIns="0" tIns="0" rIns="0" bIns="0" rtlCol="0" anchor="ctr"/>
           <a:lstStyle/>
           <a:p>
-            <a:pPr marL="0" indent="0" algn="l">
+            <a:pPr algn="l" indent="0" marL="0">
               <a:buNone/>
             </a:pPr>
             <a:r>
@@ -7878,41 +7899,11 @@
             <a:tbl>
               <a:tblPr/>
               <a:tblGrid>
-                <a:gridCol w="3017520">
-                  <a:extLst>
-                    <a:ext uri="{9D8B030D-6E8A-4147-A177-3AD203B41FA5}">
-                      <a16:colId xmlns:a16="http://schemas.microsoft.com/office/drawing/2014/main" val="20000"/>
-                    </a:ext>
-                  </a:extLst>
-                </a:gridCol>
-                <a:gridCol w="2011680">
-                  <a:extLst>
-                    <a:ext uri="{9D8B030D-6E8A-4147-A177-3AD203B41FA5}">
-                      <a16:colId xmlns:a16="http://schemas.microsoft.com/office/drawing/2014/main" val="20001"/>
-                    </a:ext>
-                  </a:extLst>
-                </a:gridCol>
-                <a:gridCol w="2011680">
-                  <a:extLst>
-                    <a:ext uri="{9D8B030D-6E8A-4147-A177-3AD203B41FA5}">
-                      <a16:colId xmlns:a16="http://schemas.microsoft.com/office/drawing/2014/main" val="20002"/>
-                    </a:ext>
-                  </a:extLst>
-                </a:gridCol>
-                <a:gridCol w="2011680">
-                  <a:extLst>
-                    <a:ext uri="{9D8B030D-6E8A-4147-A177-3AD203B41FA5}">
-                      <a16:colId xmlns:a16="http://schemas.microsoft.com/office/drawing/2014/main" val="20003"/>
-                    </a:ext>
-                  </a:extLst>
-                </a:gridCol>
-                <a:gridCol w="2039112">
-                  <a:extLst>
-                    <a:ext uri="{9D8B030D-6E8A-4147-A177-3AD203B41FA5}">
-                      <a16:colId xmlns:a16="http://schemas.microsoft.com/office/drawing/2014/main" val="20004"/>
-                    </a:ext>
-                  </a:extLst>
-                </a:gridCol>
+                <a:gridCol w="3017520"/>
+                <a:gridCol w="2011680"/>
+                <a:gridCol w="2011680"/>
+                <a:gridCol w="2011680"/>
+                <a:gridCol w="2039112"/>
               </a:tblGrid>
               <a:tr h="475488">
                 <a:tc>
@@ -7920,7 +7911,7 @@
                     <a:bodyPr/>
                     <a:lstStyle/>
                     <a:p>
-                      <a:pPr marL="0" indent="0" algn="ctr">
+                      <a:pPr algn="ctr" indent="0" marL="0">
                         <a:buNone/>
                       </a:pPr>
                       <a:r>
@@ -7988,7 +7979,7 @@
                     <a:bodyPr/>
                     <a:lstStyle/>
                     <a:p>
-                      <a:pPr marL="0" indent="0" algn="ctr">
+                      <a:pPr algn="ctr" indent="0" marL="0">
                         <a:buNone/>
                       </a:pPr>
                       <a:r>
@@ -8056,7 +8047,7 @@
                     <a:bodyPr/>
                     <a:lstStyle/>
                     <a:p>
-                      <a:pPr marL="0" indent="0" algn="ctr">
+                      <a:pPr algn="ctr" indent="0" marL="0">
                         <a:buNone/>
                       </a:pPr>
                       <a:r>
@@ -8124,7 +8115,7 @@
                     <a:bodyPr/>
                     <a:lstStyle/>
                     <a:p>
-                      <a:pPr marL="0" indent="0" algn="ctr">
+                      <a:pPr algn="ctr" indent="0" marL="0">
                         <a:buNone/>
                       </a:pPr>
                       <a:r>
@@ -8192,7 +8183,7 @@
                     <a:bodyPr/>
                     <a:lstStyle/>
                     <a:p>
-                      <a:pPr marL="0" indent="0" algn="ctr">
+                      <a:pPr algn="ctr" indent="0" marL="0">
                         <a:buNone/>
                       </a:pPr>
                       <a:r>
@@ -8255,11 +8246,6 @@
                     </a:solidFill>
                   </a:tcPr>
                 </a:tc>
-                <a:extLst>
-                  <a:ext uri="{0D108BD9-81ED-4DB2-BD59-A6C34878D82A}">
-                    <a16:rowId xmlns:a16="http://schemas.microsoft.com/office/drawing/2014/main" val="10000"/>
-                  </a:ext>
-                </a:extLst>
               </a:tr>
               <a:tr h="475488">
                 <a:tc>
@@ -8267,7 +8253,7 @@
                     <a:bodyPr/>
                     <a:lstStyle/>
                     <a:p>
-                      <a:pPr marL="0" indent="0">
+                      <a:pPr indent="0" marL="0">
                         <a:buNone/>
                       </a:pPr>
                       <a:r>
@@ -8335,7 +8321,7 @@
                     <a:bodyPr/>
                     <a:lstStyle/>
                     <a:p>
-                      <a:pPr marL="0" indent="0" algn="ctr">
+                      <a:pPr algn="ctr" indent="0" marL="0">
                         <a:buNone/>
                       </a:pPr>
                       <a:r>
@@ -8400,7 +8386,7 @@
                     <a:bodyPr/>
                     <a:lstStyle/>
                     <a:p>
-                      <a:pPr marL="0" indent="0" algn="ctr">
+                      <a:pPr algn="ctr" indent="0" marL="0">
                         <a:buNone/>
                       </a:pPr>
                       <a:r>
@@ -8465,7 +8451,7 @@
                     <a:bodyPr/>
                     <a:lstStyle/>
                     <a:p>
-                      <a:pPr marL="0" indent="0" algn="ctr">
+                      <a:pPr algn="ctr" indent="0" marL="0">
                         <a:buNone/>
                       </a:pPr>
                       <a:r>
@@ -8530,7 +8516,7 @@
                     <a:bodyPr/>
                     <a:lstStyle/>
                     <a:p>
-                      <a:pPr marL="0" indent="0" algn="ctr">
+                      <a:pPr algn="ctr" indent="0" marL="0">
                         <a:buNone/>
                       </a:pPr>
                       <a:r>
@@ -8590,11 +8576,6 @@
                     </a:lnB>
                   </a:tcPr>
                 </a:tc>
-                <a:extLst>
-                  <a:ext uri="{0D108BD9-81ED-4DB2-BD59-A6C34878D82A}">
-                    <a16:rowId xmlns:a16="http://schemas.microsoft.com/office/drawing/2014/main" val="10001"/>
-                  </a:ext>
-                </a:extLst>
               </a:tr>
               <a:tr h="475488">
                 <a:tc>
@@ -8602,7 +8583,7 @@
                     <a:bodyPr/>
                     <a:lstStyle/>
                     <a:p>
-                      <a:pPr marL="0" indent="0">
+                      <a:pPr indent="0" marL="0">
                         <a:buNone/>
                       </a:pPr>
                       <a:r>
@@ -8670,7 +8651,7 @@
                     <a:bodyPr/>
                     <a:lstStyle/>
                     <a:p>
-                      <a:pPr marL="0" indent="0" algn="ctr">
+                      <a:pPr algn="ctr" indent="0" marL="0">
                         <a:buNone/>
                       </a:pPr>
                       <a:r>
@@ -8735,7 +8716,7 @@
                     <a:bodyPr/>
                     <a:lstStyle/>
                     <a:p>
-                      <a:pPr marL="0" indent="0" algn="ctr">
+                      <a:pPr algn="ctr" indent="0" marL="0">
                         <a:buNone/>
                       </a:pPr>
                       <a:r>
@@ -8800,7 +8781,7 @@
                     <a:bodyPr/>
                     <a:lstStyle/>
                     <a:p>
-                      <a:pPr marL="0" indent="0" algn="ctr">
+                      <a:pPr algn="ctr" indent="0" marL="0">
                         <a:buNone/>
                       </a:pPr>
                       <a:r>
@@ -8865,7 +8846,7 @@
                     <a:bodyPr/>
                     <a:lstStyle/>
                     <a:p>
-                      <a:pPr marL="0" indent="0" algn="ctr">
+                      <a:pPr algn="ctr" indent="0" marL="0">
                         <a:buNone/>
                       </a:pPr>
                       <a:r>
@@ -8925,11 +8906,6 @@
                     </a:lnB>
                   </a:tcPr>
                 </a:tc>
-                <a:extLst>
-                  <a:ext uri="{0D108BD9-81ED-4DB2-BD59-A6C34878D82A}">
-                    <a16:rowId xmlns:a16="http://schemas.microsoft.com/office/drawing/2014/main" val="10002"/>
-                  </a:ext>
-                </a:extLst>
               </a:tr>
               <a:tr h="475488">
                 <a:tc>
@@ -8937,7 +8913,7 @@
                     <a:bodyPr/>
                     <a:lstStyle/>
                     <a:p>
-                      <a:pPr marL="0" indent="0">
+                      <a:pPr indent="0" marL="0">
                         <a:buNone/>
                       </a:pPr>
                       <a:r>
@@ -9005,7 +8981,7 @@
                     <a:bodyPr/>
                     <a:lstStyle/>
                     <a:p>
-                      <a:pPr marL="0" indent="0" algn="ctr">
+                      <a:pPr algn="ctr" indent="0" marL="0">
                         <a:buNone/>
                       </a:pPr>
                       <a:r>
@@ -9070,7 +9046,7 @@
                     <a:bodyPr/>
                     <a:lstStyle/>
                     <a:p>
-                      <a:pPr marL="0" indent="0" algn="ctr">
+                      <a:pPr algn="ctr" indent="0" marL="0">
                         <a:buNone/>
                       </a:pPr>
                       <a:r>
@@ -9135,7 +9111,7 @@
                     <a:bodyPr/>
                     <a:lstStyle/>
                     <a:p>
-                      <a:pPr marL="0" indent="0" algn="ctr">
+                      <a:pPr algn="ctr" indent="0" marL="0">
                         <a:buNone/>
                       </a:pPr>
                       <a:r>
@@ -9200,7 +9176,7 @@
                     <a:bodyPr/>
                     <a:lstStyle/>
                     <a:p>
-                      <a:pPr marL="0" indent="0" algn="ctr">
+                      <a:pPr algn="ctr" indent="0" marL="0">
                         <a:buNone/>
                       </a:pPr>
                       <a:r>
@@ -9260,11 +9236,6 @@
                     </a:lnB>
                   </a:tcPr>
                 </a:tc>
-                <a:extLst>
-                  <a:ext uri="{0D108BD9-81ED-4DB2-BD59-A6C34878D82A}">
-                    <a16:rowId xmlns:a16="http://schemas.microsoft.com/office/drawing/2014/main" val="10003"/>
-                  </a:ext>
-                </a:extLst>
               </a:tr>
               <a:tr h="475488">
                 <a:tc>
@@ -9272,7 +9243,7 @@
                     <a:bodyPr/>
                     <a:lstStyle/>
                     <a:p>
-                      <a:pPr marL="0" indent="0">
+                      <a:pPr indent="0" marL="0">
                         <a:buNone/>
                       </a:pPr>
                       <a:r>
@@ -9340,7 +9311,7 @@
                     <a:bodyPr/>
                     <a:lstStyle/>
                     <a:p>
-                      <a:pPr marL="0" indent="0" algn="ctr">
+                      <a:pPr algn="ctr" indent="0" marL="0">
                         <a:buNone/>
                       </a:pPr>
                       <a:r>
@@ -9405,7 +9376,7 @@
                     <a:bodyPr/>
                     <a:lstStyle/>
                     <a:p>
-                      <a:pPr marL="0" indent="0" algn="ctr">
+                      <a:pPr algn="ctr" indent="0" marL="0">
                         <a:buNone/>
                       </a:pPr>
                       <a:r>
@@ -9470,7 +9441,7 @@
                     <a:bodyPr/>
                     <a:lstStyle/>
                     <a:p>
-                      <a:pPr marL="0" indent="0" algn="ctr">
+                      <a:pPr algn="ctr" indent="0" marL="0">
                         <a:buNone/>
                       </a:pPr>
                       <a:r>
@@ -9535,7 +9506,7 @@
                     <a:bodyPr/>
                     <a:lstStyle/>
                     <a:p>
-                      <a:pPr marL="0" indent="0" algn="ctr">
+                      <a:pPr algn="ctr" indent="0" marL="0">
                         <a:buNone/>
                       </a:pPr>
                       <a:r>
@@ -9595,11 +9566,6 @@
                     </a:lnB>
                   </a:tcPr>
                 </a:tc>
-                <a:extLst>
-                  <a:ext uri="{0D108BD9-81ED-4DB2-BD59-A6C34878D82A}">
-                    <a16:rowId xmlns:a16="http://schemas.microsoft.com/office/drawing/2014/main" val="10004"/>
-                  </a:ext>
-                </a:extLst>
               </a:tr>
               <a:tr h="475488">
                 <a:tc>
@@ -9607,7 +9573,7 @@
                     <a:bodyPr/>
                     <a:lstStyle/>
                     <a:p>
-                      <a:pPr marL="0" indent="0">
+                      <a:pPr indent="0" marL="0">
                         <a:buNone/>
                       </a:pPr>
                       <a:r>
@@ -9675,7 +9641,7 @@
                     <a:bodyPr/>
                     <a:lstStyle/>
                     <a:p>
-                      <a:pPr marL="0" indent="0" algn="ctr">
+                      <a:pPr algn="ctr" indent="0" marL="0">
                         <a:buNone/>
                       </a:pPr>
                       <a:r>
@@ -9740,7 +9706,7 @@
                     <a:bodyPr/>
                     <a:lstStyle/>
                     <a:p>
-                      <a:pPr marL="0" indent="0" algn="ctr">
+                      <a:pPr algn="ctr" indent="0" marL="0">
                         <a:buNone/>
                       </a:pPr>
                       <a:r>
@@ -9805,7 +9771,7 @@
                     <a:bodyPr/>
                     <a:lstStyle/>
                     <a:p>
-                      <a:pPr marL="0" indent="0" algn="ctr">
+                      <a:pPr algn="ctr" indent="0" marL="0">
                         <a:buNone/>
                       </a:pPr>
                       <a:r>
@@ -9870,7 +9836,7 @@
                     <a:bodyPr/>
                     <a:lstStyle/>
                     <a:p>
-                      <a:pPr marL="0" indent="0" algn="ctr">
+                      <a:pPr algn="ctr" indent="0" marL="0">
                         <a:buNone/>
                       </a:pPr>
                       <a:r>
@@ -9930,11 +9896,6 @@
                     </a:lnB>
                   </a:tcPr>
                 </a:tc>
-                <a:extLst>
-                  <a:ext uri="{0D108BD9-81ED-4DB2-BD59-A6C34878D82A}">
-                    <a16:rowId xmlns:a16="http://schemas.microsoft.com/office/drawing/2014/main" val="10005"/>
-                  </a:ext>
-                </a:extLst>
               </a:tr>
               <a:tr h="475488">
                 <a:tc>
@@ -9942,7 +9903,7 @@
                     <a:bodyPr/>
                     <a:lstStyle/>
                     <a:p>
-                      <a:pPr marL="0" indent="0">
+                      <a:pPr indent="0" marL="0">
                         <a:buNone/>
                       </a:pPr>
                       <a:r>
@@ -10010,7 +9971,7 @@
                     <a:bodyPr/>
                     <a:lstStyle/>
                     <a:p>
-                      <a:pPr marL="0" indent="0" algn="ctr">
+                      <a:pPr algn="ctr" indent="0" marL="0">
                         <a:buNone/>
                       </a:pPr>
                       <a:r>
@@ -10075,7 +10036,7 @@
                     <a:bodyPr/>
                     <a:lstStyle/>
                     <a:p>
-                      <a:pPr marL="0" indent="0" algn="ctr">
+                      <a:pPr algn="ctr" indent="0" marL="0">
                         <a:buNone/>
                       </a:pPr>
                       <a:r>
@@ -10140,7 +10101,7 @@
                     <a:bodyPr/>
                     <a:lstStyle/>
                     <a:p>
-                      <a:pPr marL="0" indent="0" algn="ctr">
+                      <a:pPr algn="ctr" indent="0" marL="0">
                         <a:buNone/>
                       </a:pPr>
                       <a:r>
@@ -10205,7 +10166,7 @@
                     <a:bodyPr/>
                     <a:lstStyle/>
                     <a:p>
-                      <a:pPr marL="0" indent="0" algn="ctr">
+                      <a:pPr algn="ctr" indent="0" marL="0">
                         <a:buNone/>
                       </a:pPr>
                       <a:r>
@@ -10265,11 +10226,6 @@
                     </a:lnB>
                   </a:tcPr>
                 </a:tc>
-                <a:extLst>
-                  <a:ext uri="{0D108BD9-81ED-4DB2-BD59-A6C34878D82A}">
-                    <a16:rowId xmlns:a16="http://schemas.microsoft.com/office/drawing/2014/main" val="10006"/>
-                  </a:ext>
-                </a:extLst>
               </a:tr>
               <a:tr h="475488">
                 <a:tc>
@@ -10277,7 +10233,7 @@
                     <a:bodyPr/>
                     <a:lstStyle/>
                     <a:p>
-                      <a:pPr marL="0" indent="0">
+                      <a:pPr indent="0" marL="0">
                         <a:buNone/>
                       </a:pPr>
                       <a:r>
@@ -10345,7 +10301,7 @@
                     <a:bodyPr/>
                     <a:lstStyle/>
                     <a:p>
-                      <a:pPr marL="0" indent="0" algn="ctr">
+                      <a:pPr algn="ctr" indent="0" marL="0">
                         <a:buNone/>
                       </a:pPr>
                       <a:r>
@@ -10410,7 +10366,7 @@
                     <a:bodyPr/>
                     <a:lstStyle/>
                     <a:p>
-                      <a:pPr marL="0" indent="0" algn="ctr">
+                      <a:pPr algn="ctr" indent="0" marL="0">
                         <a:buNone/>
                       </a:pPr>
                       <a:r>
@@ -10475,7 +10431,7 @@
                     <a:bodyPr/>
                     <a:lstStyle/>
                     <a:p>
-                      <a:pPr marL="0" indent="0" algn="ctr">
+                      <a:pPr algn="ctr" indent="0" marL="0">
                         <a:buNone/>
                       </a:pPr>
                       <a:r>
@@ -10540,7 +10496,7 @@
                     <a:bodyPr/>
                     <a:lstStyle/>
                     <a:p>
-                      <a:pPr marL="0" indent="0" algn="ctr">
+                      <a:pPr algn="ctr" indent="0" marL="0">
                         <a:buNone/>
                       </a:pPr>
                       <a:r>
@@ -10600,11 +10556,6 @@
                     </a:lnB>
                   </a:tcPr>
                 </a:tc>
-                <a:extLst>
-                  <a:ext uri="{0D108BD9-81ED-4DB2-BD59-A6C34878D82A}">
-                    <a16:rowId xmlns:a16="http://schemas.microsoft.com/office/drawing/2014/main" val="10007"/>
-                  </a:ext>
-                </a:extLst>
               </a:tr>
             </a:tbl>
           </a:graphicData>
@@ -10631,7 +10582,7 @@
           <a:bodyPr wrap="square" lIns="0" tIns="0" rIns="0" bIns="0" rtlCol="0" anchor="t"/>
           <a:lstStyle/>
           <a:p>
-            <a:pPr marL="0" indent="0">
+            <a:pPr indent="0" marL="0">
               <a:buNone/>
             </a:pPr>
             <a:r>
@@ -10666,7 +10617,7 @@
           </a:prstGeom>
           <a:extLst>
             <a:ext uri="{C572A759-6A51-4108-AA02-DFA0A04FC94B}">
-              <ma14:wrappingTextBoxFlag xmlns:ma14="http://schemas.microsoft.com/office/mac/drawingml/2011/main" xmlns="" val="0"/>
+              <ma14:wrappingTextBoxFlag xmlns:ma14="http://schemas.microsoft.com/office/mac/drawingml/2011/main" val="0"/>
             </a:ext>
           </a:extLst>
         </p:spPr>
@@ -10684,7 +10635,7 @@
           <a:p>
             <a:pPr algn="r"/>
             <a:fld id="{F7021451-1387-4CA6-816F-3879F97B5CBC}" type="slidenum">
-              <a:rPr lang="en-US" b="0"/>
+              <a:rPr b="0" lang="en-US"/>
               <a:t>4</a:t>
             </a:fld>
             <a:endParaRPr lang="en-US"/>
@@ -10719,11 +10670,9 @@
       <p:sp>
         <p:nvSpPr>
           <p:cNvPr id="2" name="Text 0"/>
-          <p:cNvSpPr>
-            <a:spLocks noGrp="1"/>
-          </p:cNvSpPr>
+          <p:cNvSpPr/>
           <p:nvPr>
-            <p:ph type="title" idx="100" hasCustomPrompt="1"/>
+            <p:ph idx="100" type="title" hasCustomPrompt="1"/>
           </p:nvPr>
         </p:nvSpPr>
         <p:spPr>
@@ -10741,7 +10690,7 @@
           <a:bodyPr wrap="square" lIns="0" tIns="0" rIns="0" bIns="0" rtlCol="0" anchor="ctr"/>
           <a:lstStyle/>
           <a:p>
-            <a:pPr marL="0" indent="0" algn="l">
+            <a:pPr algn="l" indent="0" marL="0">
               <a:buNone/>
             </a:pPr>
             <a:r>
@@ -10758,14 +10707,14 @@
       </p:sp>
       <p:pic>
         <p:nvPicPr>
-          <p:cNvPr id="3" name="Главная страница сервиса" descr="/tmp/claude-0/-home-user-invest-project-eval/cfb2f9eb-1ed1-598a-ae85-aefec36c7a96/scratchpad/shots/home.png"/>
+          <p:cNvPr id="3" name="Главная страница сервиса" descr="/tmp/claude-0/-home-user-invest-project-eval/cfb2f9eb-1ed1-598a-ae85-aefec36c7a96/scratchpad/shots/home.png">    </p:cNvPr>
           <p:cNvPicPr>
             <a:picLocks noChangeAspect="1"/>
           </p:cNvPicPr>
           <p:nvPr/>
         </p:nvPicPr>
         <p:blipFill>
-          <a:blip r:embed="rId3"/>
+          <a:blip r:embed="rId1"/>
           <a:stretch>
             <a:fillRect/>
           </a:stretch>
@@ -10779,7 +10728,7 @@
             <a:avLst/>
           </a:prstGeom>
           <a:effectLst>
-            <a:outerShdw blurRad="76200" dist="25400" dir="2700000" algn="bl" rotWithShape="0">
+            <a:outerShdw sx="100000" sy="100000" kx="0" ky="0" algn="bl" rotWithShape="0" blurRad="76200" dist="25400" dir="2700000">
               <a:srgbClr val="000000">
                 <a:alpha val="18000"/>
               </a:srgbClr>
@@ -10808,7 +10757,7 @@
           <a:bodyPr wrap="square" lIns="0" tIns="0" rIns="0" bIns="0" rtlCol="0" anchor="t"/>
           <a:lstStyle/>
           <a:p>
-            <a:pPr marL="0" indent="0" algn="ctr">
+            <a:pPr algn="ctr" indent="0" marL="0">
               <a:buNone/>
             </a:pPr>
             <a:r>
@@ -10973,7 +10922,7 @@
           </a:prstGeom>
           <a:extLst>
             <a:ext uri="{C572A759-6A51-4108-AA02-DFA0A04FC94B}">
-              <ma14:wrappingTextBoxFlag xmlns:ma14="http://schemas.microsoft.com/office/mac/drawingml/2011/main" xmlns="" val="0"/>
+              <ma14:wrappingTextBoxFlag xmlns:ma14="http://schemas.microsoft.com/office/mac/drawingml/2011/main" val="0"/>
             </a:ext>
           </a:extLst>
         </p:spPr>
@@ -10991,7 +10940,7 @@
           <a:p>
             <a:pPr algn="r"/>
             <a:fld id="{F7021451-1387-4CA6-816F-3879F97B5CBC}" type="slidenum">
-              <a:rPr lang="en-US" b="0"/>
+              <a:rPr b="0" lang="en-US"/>
               <a:t>5</a:t>
             </a:fld>
             <a:endParaRPr lang="en-US"/>
@@ -11026,11 +10975,9 @@
       <p:sp>
         <p:nvSpPr>
           <p:cNvPr id="2" name="Text 0"/>
-          <p:cNvSpPr>
-            <a:spLocks noGrp="1"/>
-          </p:cNvSpPr>
+          <p:cNvSpPr/>
           <p:nvPr>
-            <p:ph type="title" idx="100" hasCustomPrompt="1"/>
+            <p:ph idx="100" type="title" hasCustomPrompt="1"/>
           </p:nvPr>
         </p:nvSpPr>
         <p:spPr>
@@ -11048,7 +10995,7 @@
           <a:bodyPr wrap="square" lIns="0" tIns="0" rIns="0" bIns="0" rtlCol="0" anchor="ctr"/>
           <a:lstStyle/>
           <a:p>
-            <a:pPr marL="0" indent="0" algn="l">
+            <a:pPr algn="l" indent="0" marL="0">
               <a:buNone/>
             </a:pPr>
             <a:r>
@@ -11065,14 +11012,14 @@
       </p:sp>
       <p:pic>
         <p:nvPicPr>
-          <p:cNvPr id="3" name="Схема пяти шагов" descr="/home/user/invest-project-eval/docs/img/b1-how-it-works.png"/>
+          <p:cNvPr id="3" name="Схема пяти шагов" descr="/home/user/invest-project-eval/docs/img/b1-how-it-works.png">    </p:cNvPr>
           <p:cNvPicPr>
             <a:picLocks noChangeAspect="1"/>
           </p:cNvPicPr>
           <p:nvPr/>
         </p:nvPicPr>
         <p:blipFill>
-          <a:blip r:embed="rId3"/>
+          <a:blip r:embed="rId1"/>
           <a:stretch>
             <a:fillRect/>
           </a:stretch>
@@ -11113,13 +11060,6 @@
             <a:prstDash val="solid"/>
           </a:ln>
         </p:spPr>
-        <p:txBody>
-          <a:bodyPr/>
-          <a:lstStyle/>
-          <a:p>
-            <a:endParaRPr lang="ru-RU"/>
-          </a:p>
-        </p:txBody>
       </p:sp>
       <p:sp>
         <p:nvSpPr>
@@ -11145,13 +11085,6 @@
             <a:prstDash val="solid"/>
           </a:ln>
         </p:spPr>
-        <p:txBody>
-          <a:bodyPr/>
-          <a:lstStyle/>
-          <a:p>
-            <a:endParaRPr lang="ru-RU"/>
-          </a:p>
-        </p:txBody>
       </p:sp>
       <p:sp>
         <p:nvSpPr>
@@ -11174,7 +11107,7 @@
           <a:bodyPr wrap="square" lIns="0" tIns="0" rIns="0" bIns="0" rtlCol="0" anchor="ctr"/>
           <a:lstStyle/>
           <a:p>
-            <a:pPr marL="0" indent="0" algn="ctr">
+            <a:pPr algn="ctr" indent="0" marL="0">
               <a:buNone/>
             </a:pPr>
             <a:r>
@@ -11210,7 +11143,7 @@
           <a:bodyPr wrap="square" lIns="0" tIns="0" rIns="0" bIns="0" rtlCol="0" anchor="ctr"/>
           <a:lstStyle/>
           <a:p>
-            <a:pPr marL="0" indent="0">
+            <a:pPr indent="0" marL="0">
               <a:buNone/>
             </a:pPr>
             <a:r>
@@ -11246,7 +11179,7 @@
           <a:bodyPr wrap="square" lIns="0" tIns="0" rIns="0" bIns="0" rtlCol="0" anchor="t"/>
           <a:lstStyle/>
           <a:p>
-            <a:pPr marL="0" indent="0">
+            <a:pPr indent="0" marL="0">
               <a:buNone/>
             </a:pPr>
             <a:r>
@@ -11282,7 +11215,7 @@
           <a:bodyPr wrap="square" lIns="0" tIns="0" rIns="0" bIns="0" rtlCol="0" anchor="t"/>
           <a:lstStyle/>
           <a:p>
-            <a:pPr marL="0" indent="0">
+            <a:pPr indent="0" marL="0">
               <a:buNone/>
             </a:pPr>
             <a:r>
@@ -11323,13 +11256,6 @@
             <a:prstDash val="solid"/>
           </a:ln>
         </p:spPr>
-        <p:txBody>
-          <a:bodyPr/>
-          <a:lstStyle/>
-          <a:p>
-            <a:endParaRPr lang="ru-RU"/>
-          </a:p>
-        </p:txBody>
       </p:sp>
       <p:sp>
         <p:nvSpPr>
@@ -11355,13 +11281,6 @@
             <a:prstDash val="solid"/>
           </a:ln>
         </p:spPr>
-        <p:txBody>
-          <a:bodyPr/>
-          <a:lstStyle/>
-          <a:p>
-            <a:endParaRPr lang="ru-RU"/>
-          </a:p>
-        </p:txBody>
       </p:sp>
       <p:sp>
         <p:nvSpPr>
@@ -11384,7 +11303,7 @@
           <a:bodyPr wrap="square" lIns="0" tIns="0" rIns="0" bIns="0" rtlCol="0" anchor="ctr"/>
           <a:lstStyle/>
           <a:p>
-            <a:pPr marL="0" indent="0" algn="ctr">
+            <a:pPr algn="ctr" indent="0" marL="0">
               <a:buNone/>
             </a:pPr>
             <a:r>
@@ -11420,7 +11339,7 @@
           <a:bodyPr wrap="square" lIns="0" tIns="0" rIns="0" bIns="0" rtlCol="0" anchor="ctr"/>
           <a:lstStyle/>
           <a:p>
-            <a:pPr marL="0" indent="0">
+            <a:pPr indent="0" marL="0">
               <a:buNone/>
             </a:pPr>
             <a:r>
@@ -11456,7 +11375,7 @@
           <a:bodyPr wrap="square" lIns="0" tIns="0" rIns="0" bIns="0" rtlCol="0" anchor="t"/>
           <a:lstStyle/>
           <a:p>
-            <a:pPr marL="0" indent="0">
+            <a:pPr indent="0" marL="0">
               <a:buNone/>
             </a:pPr>
             <a:r>
@@ -11492,7 +11411,7 @@
           <a:bodyPr wrap="square" lIns="0" tIns="0" rIns="0" bIns="0" rtlCol="0" anchor="t"/>
           <a:lstStyle/>
           <a:p>
-            <a:pPr marL="0" indent="0">
+            <a:pPr indent="0" marL="0">
               <a:buNone/>
             </a:pPr>
             <a:r>
@@ -11533,13 +11452,6 @@
             <a:prstDash val="solid"/>
           </a:ln>
         </p:spPr>
-        <p:txBody>
-          <a:bodyPr/>
-          <a:lstStyle/>
-          <a:p>
-            <a:endParaRPr lang="ru-RU"/>
-          </a:p>
-        </p:txBody>
       </p:sp>
       <p:sp>
         <p:nvSpPr>
@@ -11565,13 +11477,6 @@
             <a:prstDash val="solid"/>
           </a:ln>
         </p:spPr>
-        <p:txBody>
-          <a:bodyPr/>
-          <a:lstStyle/>
-          <a:p>
-            <a:endParaRPr lang="ru-RU"/>
-          </a:p>
-        </p:txBody>
       </p:sp>
       <p:sp>
         <p:nvSpPr>
@@ -11594,7 +11499,7 @@
           <a:bodyPr wrap="square" lIns="0" tIns="0" rIns="0" bIns="0" rtlCol="0" anchor="ctr"/>
           <a:lstStyle/>
           <a:p>
-            <a:pPr marL="0" indent="0" algn="ctr">
+            <a:pPr algn="ctr" indent="0" marL="0">
               <a:buNone/>
             </a:pPr>
             <a:r>
@@ -11630,7 +11535,7 @@
           <a:bodyPr wrap="square" lIns="0" tIns="0" rIns="0" bIns="0" rtlCol="0" anchor="ctr"/>
           <a:lstStyle/>
           <a:p>
-            <a:pPr marL="0" indent="0">
+            <a:pPr indent="0" marL="0">
               <a:buNone/>
             </a:pPr>
             <a:r>
@@ -11666,7 +11571,7 @@
           <a:bodyPr wrap="square" lIns="0" tIns="0" rIns="0" bIns="0" rtlCol="0" anchor="t"/>
           <a:lstStyle/>
           <a:p>
-            <a:pPr marL="0" indent="0">
+            <a:pPr indent="0" marL="0">
               <a:buNone/>
             </a:pPr>
             <a:r>
@@ -11702,7 +11607,7 @@
           <a:bodyPr wrap="square" lIns="0" tIns="0" rIns="0" bIns="0" rtlCol="0" anchor="t"/>
           <a:lstStyle/>
           <a:p>
-            <a:pPr marL="0" indent="0">
+            <a:pPr indent="0" marL="0">
               <a:buNone/>
             </a:pPr>
             <a:r>
@@ -11743,13 +11648,6 @@
             <a:prstDash val="solid"/>
           </a:ln>
         </p:spPr>
-        <p:txBody>
-          <a:bodyPr/>
-          <a:lstStyle/>
-          <a:p>
-            <a:endParaRPr lang="ru-RU"/>
-          </a:p>
-        </p:txBody>
       </p:sp>
       <p:sp>
         <p:nvSpPr>
@@ -11775,13 +11673,6 @@
             <a:prstDash val="solid"/>
           </a:ln>
         </p:spPr>
-        <p:txBody>
-          <a:bodyPr/>
-          <a:lstStyle/>
-          <a:p>
-            <a:endParaRPr lang="ru-RU"/>
-          </a:p>
-        </p:txBody>
       </p:sp>
       <p:sp>
         <p:nvSpPr>
@@ -11804,7 +11695,7 @@
           <a:bodyPr wrap="square" lIns="0" tIns="0" rIns="0" bIns="0" rtlCol="0" anchor="ctr"/>
           <a:lstStyle/>
           <a:p>
-            <a:pPr marL="0" indent="0" algn="ctr">
+            <a:pPr algn="ctr" indent="0" marL="0">
               <a:buNone/>
             </a:pPr>
             <a:r>
@@ -11840,7 +11731,7 @@
           <a:bodyPr wrap="square" lIns="0" tIns="0" rIns="0" bIns="0" rtlCol="0" anchor="ctr"/>
           <a:lstStyle/>
           <a:p>
-            <a:pPr marL="0" indent="0">
+            <a:pPr indent="0" marL="0">
               <a:buNone/>
             </a:pPr>
             <a:r>
@@ -11876,7 +11767,7 @@
           <a:bodyPr wrap="square" lIns="0" tIns="0" rIns="0" bIns="0" rtlCol="0" anchor="t"/>
           <a:lstStyle/>
           <a:p>
-            <a:pPr marL="0" indent="0">
+            <a:pPr indent="0" marL="0">
               <a:buNone/>
             </a:pPr>
             <a:r>
@@ -11912,7 +11803,7 @@
           <a:bodyPr wrap="square" lIns="0" tIns="0" rIns="0" bIns="0" rtlCol="0" anchor="t"/>
           <a:lstStyle/>
           <a:p>
-            <a:pPr marL="0" indent="0">
+            <a:pPr indent="0" marL="0">
               <a:buNone/>
             </a:pPr>
             <a:r>
@@ -11953,13 +11844,6 @@
             <a:prstDash val="solid"/>
           </a:ln>
         </p:spPr>
-        <p:txBody>
-          <a:bodyPr/>
-          <a:lstStyle/>
-          <a:p>
-            <a:endParaRPr lang="ru-RU"/>
-          </a:p>
-        </p:txBody>
       </p:sp>
       <p:sp>
         <p:nvSpPr>
@@ -11985,13 +11869,6 @@
             <a:prstDash val="solid"/>
           </a:ln>
         </p:spPr>
-        <p:txBody>
-          <a:bodyPr/>
-          <a:lstStyle/>
-          <a:p>
-            <a:endParaRPr lang="ru-RU"/>
-          </a:p>
-        </p:txBody>
       </p:sp>
       <p:sp>
         <p:nvSpPr>
@@ -12014,7 +11891,7 @@
           <a:bodyPr wrap="square" lIns="0" tIns="0" rIns="0" bIns="0" rtlCol="0" anchor="ctr"/>
           <a:lstStyle/>
           <a:p>
-            <a:pPr marL="0" indent="0" algn="ctr">
+            <a:pPr algn="ctr" indent="0" marL="0">
               <a:buNone/>
             </a:pPr>
             <a:r>
@@ -12050,7 +11927,7 @@
           <a:bodyPr wrap="square" lIns="0" tIns="0" rIns="0" bIns="0" rtlCol="0" anchor="ctr"/>
           <a:lstStyle/>
           <a:p>
-            <a:pPr marL="0" indent="0">
+            <a:pPr indent="0" marL="0">
               <a:buNone/>
             </a:pPr>
             <a:r>
@@ -12086,7 +11963,7 @@
           <a:bodyPr wrap="square" lIns="0" tIns="0" rIns="0" bIns="0" rtlCol="0" anchor="t"/>
           <a:lstStyle/>
           <a:p>
-            <a:pPr marL="0" indent="0">
+            <a:pPr indent="0" marL="0">
               <a:buNone/>
             </a:pPr>
             <a:r>
@@ -12122,7 +11999,7 @@
           <a:bodyPr wrap="square" lIns="0" tIns="0" rIns="0" bIns="0" rtlCol="0" anchor="t"/>
           <a:lstStyle/>
           <a:p>
-            <a:pPr marL="0" indent="0">
+            <a:pPr indent="0" marL="0">
               <a:buNone/>
             </a:pPr>
             <a:r>
@@ -12139,7 +12016,7 @@
       </p:sp>
       <p:sp>
         <p:nvSpPr>
-          <p:cNvPr id="34" name="Slide Number Placeholder 0"/>
+          <p:cNvPr id="25" name="Slide Number Placeholder 0"/>
           <p:cNvSpPr>
             <a:spLocks noGrp="1"/>
           </p:cNvSpPr>
@@ -12157,7 +12034,7 @@
           </a:prstGeom>
           <a:extLst>
             <a:ext uri="{C572A759-6A51-4108-AA02-DFA0A04FC94B}">
-              <ma14:wrappingTextBoxFlag xmlns:ma14="http://schemas.microsoft.com/office/mac/drawingml/2011/main" xmlns="" val="0"/>
+              <ma14:wrappingTextBoxFlag xmlns:ma14="http://schemas.microsoft.com/office/mac/drawingml/2011/main" val="0"/>
             </a:ext>
           </a:extLst>
         </p:spPr>
@@ -12175,7 +12052,7 @@
           <a:p>
             <a:pPr algn="r"/>
             <a:fld id="{F7021451-1387-4CA6-816F-3879F97B5CBC}" type="slidenum">
-              <a:rPr lang="en-US" b="0"/>
+              <a:rPr b="0" lang="en-US"/>
               <a:t>6</a:t>
             </a:fld>
             <a:endParaRPr lang="en-US"/>
@@ -12210,11 +12087,9 @@
       <p:sp>
         <p:nvSpPr>
           <p:cNvPr id="2" name="Text 0"/>
-          <p:cNvSpPr>
-            <a:spLocks noGrp="1"/>
-          </p:cNvSpPr>
+          <p:cNvSpPr/>
           <p:nvPr>
-            <p:ph type="title" idx="100" hasCustomPrompt="1"/>
+            <p:ph idx="100" type="title" hasCustomPrompt="1"/>
           </p:nvPr>
         </p:nvSpPr>
         <p:spPr>
@@ -12232,7 +12107,7 @@
           <a:bodyPr wrap="square" lIns="0" tIns="0" rIns="0" bIns="0" rtlCol="0" anchor="ctr"/>
           <a:lstStyle/>
           <a:p>
-            <a:pPr marL="0" indent="0" algn="l">
+            <a:pPr algn="l" indent="0" marL="0">
               <a:buNone/>
             </a:pPr>
             <a:r>
@@ -12268,7 +12143,7 @@
           <a:bodyPr wrap="square" lIns="0" tIns="0" rIns="0" bIns="0" rtlCol="0" anchor="t"/>
           <a:lstStyle/>
           <a:p>
-            <a:pPr marL="0" indent="0">
+            <a:pPr indent="0" marL="0">
               <a:buNone/>
             </a:pPr>
             <a:r>
@@ -12285,14 +12160,14 @@
       </p:sp>
       <p:pic>
         <p:nvPicPr>
-          <p:cNvPr id="4" name="Схема трёх уровней" descr="/home/user/invest-project-eval/docs/img/b2-levels.png"/>
+          <p:cNvPr id="4" name="Схема трёх уровней" descr="/home/user/invest-project-eval/docs/img/b2-levels.png">    </p:cNvPr>
           <p:cNvPicPr>
             <a:picLocks noChangeAspect="1"/>
           </p:cNvPicPr>
           <p:nvPr/>
         </p:nvPicPr>
         <p:blipFill>
-          <a:blip r:embed="rId3"/>
+          <a:blip r:embed="rId1"/>
           <a:stretch>
             <a:fillRect/>
           </a:stretch>
@@ -12333,13 +12208,6 @@
             <a:prstDash val="solid"/>
           </a:ln>
         </p:spPr>
-        <p:txBody>
-          <a:bodyPr/>
-          <a:lstStyle/>
-          <a:p>
-            <a:endParaRPr lang="ru-RU"/>
-          </a:p>
-        </p:txBody>
       </p:sp>
       <p:sp>
         <p:nvSpPr>
@@ -12362,7 +12230,7 @@
           <a:bodyPr wrap="square" lIns="0" tIns="0" rIns="0" bIns="0" rtlCol="0" anchor="ctr"/>
           <a:lstStyle/>
           <a:p>
-            <a:pPr marL="0" indent="0">
+            <a:pPr indent="0" marL="0">
               <a:buNone/>
             </a:pPr>
             <a:r>
@@ -12398,7 +12266,7 @@
           <a:bodyPr wrap="square" lIns="0" tIns="0" rIns="0" bIns="0" rtlCol="0" anchor="t"/>
           <a:lstStyle/>
           <a:p>
-            <a:pPr marL="0" indent="0">
+            <a:pPr indent="0" marL="0">
               <a:buNone/>
             </a:pPr>
             <a:r>
@@ -12434,7 +12302,7 @@
           <a:bodyPr wrap="square" lIns="0" tIns="0" rIns="0" bIns="0" rtlCol="0" anchor="t"/>
           <a:lstStyle/>
           <a:p>
-            <a:pPr marL="0" indent="0">
+            <a:pPr indent="0" marL="0">
               <a:buNone/>
             </a:pPr>
             <a:r>
@@ -12475,13 +12343,6 @@
             <a:prstDash val="solid"/>
           </a:ln>
         </p:spPr>
-        <p:txBody>
-          <a:bodyPr/>
-          <a:lstStyle/>
-          <a:p>
-            <a:endParaRPr lang="ru-RU"/>
-          </a:p>
-        </p:txBody>
       </p:sp>
       <p:sp>
         <p:nvSpPr>
@@ -12504,7 +12365,7 @@
           <a:bodyPr wrap="square" lIns="0" tIns="0" rIns="0" bIns="0" rtlCol="0" anchor="ctr"/>
           <a:lstStyle/>
           <a:p>
-            <a:pPr marL="0" indent="0">
+            <a:pPr indent="0" marL="0">
               <a:buNone/>
             </a:pPr>
             <a:r>
@@ -12540,7 +12401,7 @@
           <a:bodyPr wrap="square" lIns="0" tIns="0" rIns="0" bIns="0" rtlCol="0" anchor="t"/>
           <a:lstStyle/>
           <a:p>
-            <a:pPr marL="0" indent="0">
+            <a:pPr indent="0" marL="0">
               <a:buNone/>
             </a:pPr>
             <a:r>
@@ -12576,7 +12437,7 @@
           <a:bodyPr wrap="square" lIns="0" tIns="0" rIns="0" bIns="0" rtlCol="0" anchor="t"/>
           <a:lstStyle/>
           <a:p>
-            <a:pPr marL="0" indent="0">
+            <a:pPr indent="0" marL="0">
               <a:buNone/>
             </a:pPr>
             <a:r>
@@ -12617,13 +12478,6 @@
             <a:prstDash val="solid"/>
           </a:ln>
         </p:spPr>
-        <p:txBody>
-          <a:bodyPr/>
-          <a:lstStyle/>
-          <a:p>
-            <a:endParaRPr lang="ru-RU"/>
-          </a:p>
-        </p:txBody>
       </p:sp>
       <p:sp>
         <p:nvSpPr>
@@ -12646,7 +12500,7 @@
           <a:bodyPr wrap="square" lIns="0" tIns="0" rIns="0" bIns="0" rtlCol="0" anchor="ctr"/>
           <a:lstStyle/>
           <a:p>
-            <a:pPr marL="0" indent="0">
+            <a:pPr indent="0" marL="0">
               <a:buNone/>
             </a:pPr>
             <a:r>
@@ -12682,7 +12536,7 @@
           <a:bodyPr wrap="square" lIns="0" tIns="0" rIns="0" bIns="0" rtlCol="0" anchor="t"/>
           <a:lstStyle/>
           <a:p>
-            <a:pPr marL="0" indent="0">
+            <a:pPr indent="0" marL="0">
               <a:buNone/>
             </a:pPr>
             <a:r>
@@ -12718,7 +12572,7 @@
           <a:bodyPr wrap="square" lIns="0" tIns="0" rIns="0" bIns="0" rtlCol="0" anchor="t"/>
           <a:lstStyle/>
           <a:p>
-            <a:pPr marL="0" indent="0">
+            <a:pPr indent="0" marL="0">
               <a:buNone/>
             </a:pPr>
             <a:r>
@@ -12753,7 +12607,7 @@
           </a:prstGeom>
           <a:extLst>
             <a:ext uri="{C572A759-6A51-4108-AA02-DFA0A04FC94B}">
-              <ma14:wrappingTextBoxFlag xmlns:ma14="http://schemas.microsoft.com/office/mac/drawingml/2011/main" xmlns="" val="0"/>
+              <ma14:wrappingTextBoxFlag xmlns:ma14="http://schemas.microsoft.com/office/mac/drawingml/2011/main" val="0"/>
             </a:ext>
           </a:extLst>
         </p:spPr>
@@ -12771,7 +12625,7 @@
           <a:p>
             <a:pPr algn="r"/>
             <a:fld id="{F7021451-1387-4CA6-816F-3879F97B5CBC}" type="slidenum">
-              <a:rPr lang="en-US" b="0"/>
+              <a:rPr b="0" lang="en-US"/>
               <a:t>7</a:t>
             </a:fld>
             <a:endParaRPr lang="en-US"/>
@@ -12806,11 +12660,9 @@
       <p:sp>
         <p:nvSpPr>
           <p:cNvPr id="2" name="Text 0"/>
-          <p:cNvSpPr>
-            <a:spLocks noGrp="1"/>
-          </p:cNvSpPr>
+          <p:cNvSpPr/>
           <p:nvPr>
-            <p:ph type="title" idx="100" hasCustomPrompt="1"/>
+            <p:ph idx="100" type="title" hasCustomPrompt="1"/>
           </p:nvPr>
         </p:nvSpPr>
         <p:spPr>
@@ -12828,7 +12680,7 @@
           <a:bodyPr wrap="square" lIns="0" tIns="0" rIns="0" bIns="0" rtlCol="0" anchor="ctr"/>
           <a:lstStyle/>
           <a:p>
-            <a:pPr marL="0" indent="0" algn="l">
+            <a:pPr algn="l" indent="0" marL="0">
               <a:buNone/>
             </a:pPr>
             <a:r>
@@ -12845,14 +12697,14 @@
       </p:sp>
       <p:pic>
         <p:nvPicPr>
-          <p:cNvPr id="3" name="Схема структуры модели" descr="/home/user/invest-project-eval/docs/img/b3-model.png"/>
+          <p:cNvPr id="3" name="Схема структуры модели" descr="/home/user/invest-project-eval/docs/img/b3-model.png">    </p:cNvPr>
           <p:cNvPicPr>
             <a:picLocks noChangeAspect="1"/>
           </p:cNvPicPr>
           <p:nvPr/>
         </p:nvPicPr>
         <p:blipFill>
-          <a:blip r:embed="rId3"/>
+          <a:blip r:embed="rId1"/>
           <a:stretch>
             <a:fillRect/>
           </a:stretch>
@@ -12888,7 +12740,7 @@
           <a:bodyPr wrap="square" lIns="0" tIns="0" rIns="0" bIns="0" rtlCol="0" anchor="t"/>
           <a:lstStyle/>
           <a:p>
-            <a:pPr marL="0" indent="0" algn="ctr">
+            <a:pPr algn="ctr" indent="0" marL="0">
               <a:buNone/>
             </a:pPr>
             <a:r>
@@ -12905,14 +12757,14 @@
       </p:sp>
       <p:pic>
         <p:nvPicPr>
-          <p:cNvPr id="5" name="Карточки показателей" descr="/tmp/claude-0/-home-user-invest-project-eval/cfb2f9eb-1ed1-598a-ae85-aefec36c7a96/scratchpad/shots/kpis.png"/>
+          <p:cNvPr id="5" name="Карточки показателей" descr="/tmp/claude-0/-home-user-invest-project-eval/cfb2f9eb-1ed1-598a-ae85-aefec36c7a96/scratchpad/shots/kpis.png">    </p:cNvPr>
           <p:cNvPicPr>
             <a:picLocks noChangeAspect="1"/>
           </p:cNvPicPr>
           <p:nvPr/>
         </p:nvPicPr>
         <p:blipFill>
-          <a:blip r:embed="rId4"/>
+          <a:blip r:embed="rId2"/>
           <a:stretch>
             <a:fillRect/>
           </a:stretch>
@@ -12926,7 +12778,7 @@
             <a:avLst/>
           </a:prstGeom>
           <a:effectLst>
-            <a:outerShdw blurRad="76200" dist="25400" dir="2700000" algn="bl" rotWithShape="0">
+            <a:outerShdw sx="100000" sy="100000" kx="0" ky="0" algn="bl" rotWithShape="0" blurRad="76200" dist="25400" dir="2700000">
               <a:srgbClr val="000000">
                 <a:alpha val="18000"/>
               </a:srgbClr>
@@ -12955,7 +12807,7 @@
           <a:bodyPr wrap="square" lIns="0" tIns="0" rIns="0" bIns="0" rtlCol="0" anchor="t"/>
           <a:lstStyle/>
           <a:p>
-            <a:pPr marL="0" indent="0">
+            <a:pPr indent="0" marL="0">
               <a:buNone/>
             </a:pPr>
             <a:r>
@@ -12991,7 +12843,7 @@
           <a:bodyPr wrap="square" lIns="0" tIns="0" rIns="0" bIns="0" rtlCol="0" anchor="t"/>
           <a:lstStyle/>
           <a:p>
-            <a:pPr marL="0" indent="0">
+            <a:pPr indent="0" marL="0">
               <a:buNone/>
             </a:pPr>
             <a:r>
@@ -13002,6 +12854,12 @@
               </a:rPr>
               <a:t>NPV — </a:t>
             </a:r>
+            <a:pPr indent="0" marL="0">
+              <a:spcAft>
+                <a:spcPts val="700"/>
+              </a:spcAft>
+              <a:buNone/>
+            </a:pPr>
             <a:r>
               <a:rPr lang="en-US" sz="1300" dirty="0">
                 <a:solidFill>
@@ -13013,7 +12871,7 @@
             <a:endParaRPr lang="en-US" sz="1300" dirty="0"/>
           </a:p>
           <a:p>
-            <a:pPr marL="0" indent="0">
+            <a:pPr indent="0" marL="0">
               <a:buNone/>
             </a:pPr>
             <a:r>
@@ -13024,6 +12882,12 @@
               </a:rPr>
               <a:t>IRR — </a:t>
             </a:r>
+            <a:pPr indent="0" marL="0">
+              <a:spcAft>
+                <a:spcPts val="700"/>
+              </a:spcAft>
+              <a:buNone/>
+            </a:pPr>
             <a:r>
               <a:rPr lang="en-US" sz="1300" dirty="0">
                 <a:solidFill>
@@ -13035,7 +12899,7 @@
             <a:endParaRPr lang="en-US" sz="1300" dirty="0"/>
           </a:p>
           <a:p>
-            <a:pPr marL="0" indent="0">
+            <a:pPr indent="0" marL="0">
               <a:buNone/>
             </a:pPr>
             <a:r>
@@ -13046,6 +12910,12 @@
               </a:rPr>
               <a:t>Срок окупаемости — </a:t>
             </a:r>
+            <a:pPr indent="0" marL="0">
+              <a:spcAft>
+                <a:spcPts val="700"/>
+              </a:spcAft>
+              <a:buNone/>
+            </a:pPr>
             <a:r>
               <a:rPr lang="en-US" sz="1300" dirty="0">
                 <a:solidFill>
@@ -13057,7 +12927,7 @@
             <a:endParaRPr lang="en-US" sz="1300" dirty="0"/>
           </a:p>
           <a:p>
-            <a:pPr marL="0" indent="0">
+            <a:pPr indent="0" marL="0">
               <a:buNone/>
             </a:pPr>
             <a:r>
@@ -13068,6 +12938,12 @@
               </a:rPr>
               <a:t>Потребность в деньгах — </a:t>
             </a:r>
+            <a:pPr indent="0" marL="0">
+              <a:spcAft>
+                <a:spcPts val="700"/>
+              </a:spcAft>
+              <a:buNone/>
+            </a:pPr>
             <a:r>
               <a:rPr lang="en-US" sz="1300" dirty="0">
                 <a:solidFill>
@@ -13079,7 +12955,7 @@
             <a:endParaRPr lang="en-US" sz="1300" dirty="0"/>
           </a:p>
           <a:p>
-            <a:pPr marL="0" indent="0">
+            <a:pPr indent="0" marL="0">
               <a:buNone/>
             </a:pPr>
             <a:r>
@@ -13090,6 +12966,12 @@
               </a:rPr>
               <a:t>DSCR — </a:t>
             </a:r>
+            <a:pPr indent="0" marL="0">
+              <a:spcAft>
+                <a:spcPts val="700"/>
+              </a:spcAft>
+              <a:buNone/>
+            </a:pPr>
             <a:r>
               <a:rPr lang="en-US" sz="1300" dirty="0">
                 <a:solidFill>
@@ -13097,6 +12979,34 @@
                 </a:solidFill>
               </a:rPr>
               <a:t>во сколько раз поток покрывает платежи по кредиту. Банки хотят не меньше 1,2.</a:t>
+            </a:r>
+            <a:endParaRPr lang="en-US" sz="1300" dirty="0"/>
+          </a:p>
+          <a:p>
+            <a:pPr indent="0" marL="0">
+              <a:buNone/>
+            </a:pPr>
+            <a:r>
+              <a:rPr lang="en-US" sz="1300" b="1" dirty="0">
+                <a:solidFill>
+                  <a:srgbClr val="16202C"/>
+                </a:solidFill>
+              </a:rPr>
+              <a:t>EVA — </a:t>
+            </a:r>
+            <a:pPr indent="0" marL="0">
+              <a:spcAft>
+                <a:spcPts val="700"/>
+              </a:spcAft>
+              <a:buNone/>
+            </a:pPr>
+            <a:r>
+              <a:rPr lang="en-US" sz="1300" dirty="0">
+                <a:solidFill>
+                  <a:schemeClr val="tx1"/>
+                </a:solidFill>
+              </a:rPr>
+              <a:t>сколько бизнес заработал сверх платы за весь капитал, свой и заёмный. Растёт — растёт и ценность компании.</a:t>
             </a:r>
             <a:endParaRPr lang="en-US" sz="1300" dirty="0"/>
           </a:p>
@@ -13122,7 +13032,7 @@
           </a:prstGeom>
           <a:extLst>
             <a:ext uri="{C572A759-6A51-4108-AA02-DFA0A04FC94B}">
-              <ma14:wrappingTextBoxFlag xmlns:ma14="http://schemas.microsoft.com/office/mac/drawingml/2011/main" xmlns="" val="0"/>
+              <ma14:wrappingTextBoxFlag xmlns:ma14="http://schemas.microsoft.com/office/mac/drawingml/2011/main" val="0"/>
             </a:ext>
           </a:extLst>
         </p:spPr>
@@ -13140,7 +13050,7 @@
           <a:p>
             <a:pPr algn="r"/>
             <a:fld id="{F7021451-1387-4CA6-816F-3879F97B5CBC}" type="slidenum">
-              <a:rPr lang="en-US" b="0"/>
+              <a:rPr b="0" lang="en-US"/>
               <a:t>8</a:t>
             </a:fld>
             <a:endParaRPr lang="en-US"/>
@@ -13175,11 +13085,9 @@
       <p:sp>
         <p:nvSpPr>
           <p:cNvPr id="2" name="Text 0"/>
-          <p:cNvSpPr>
-            <a:spLocks noGrp="1"/>
-          </p:cNvSpPr>
+          <p:cNvSpPr/>
           <p:nvPr>
-            <p:ph type="title" idx="100" hasCustomPrompt="1"/>
+            <p:ph idx="100" type="title" hasCustomPrompt="1"/>
           </p:nvPr>
         </p:nvSpPr>
         <p:spPr>
@@ -13197,7 +13105,7 @@
           <a:bodyPr wrap="square" lIns="0" tIns="0" rIns="0" bIns="0" rtlCol="0" anchor="ctr"/>
           <a:lstStyle/>
           <a:p>
-            <a:pPr marL="0" indent="0" algn="l">
+            <a:pPr algn="l" indent="0" marL="0">
               <a:buNone/>
             </a:pPr>
             <a:r>
@@ -13214,14 +13122,14 @@
       </p:sp>
       <p:pic>
         <p:nvPicPr>
-          <p:cNvPr id="3" name="Схема методов анализа рисков" descr="/home/user/invest-project-eval/docs/img/b4-risks.png"/>
+          <p:cNvPr id="3" name="Схема методов анализа рисков" descr="/home/user/invest-project-eval/docs/img/b4-risks.png">    </p:cNvPr>
           <p:cNvPicPr>
             <a:picLocks noChangeAspect="1"/>
           </p:cNvPicPr>
           <p:nvPr/>
         </p:nvPicPr>
         <p:blipFill>
-          <a:blip r:embed="rId3"/>
+          <a:blip r:embed="rId1"/>
           <a:stretch>
             <a:fillRect/>
           </a:stretch>
@@ -13238,14 +13146,14 @@
       </p:pic>
       <p:pic>
         <p:nvPicPr>
-          <p:cNvPr id="4" name="Результат Монте-Карло" descr="/tmp/claude-0/-home-user-invest-project-eval/cfb2f9eb-1ed1-598a-ae85-aefec36c7a96/scratchpad/shots/montecarlo.png"/>
+          <p:cNvPr id="4" name="Результат Монте-Карло" descr="/tmp/claude-0/-home-user-invest-project-eval/cfb2f9eb-1ed1-598a-ae85-aefec36c7a96/scratchpad/shots/montecarlo.png">    </p:cNvPr>
           <p:cNvPicPr>
             <a:picLocks noChangeAspect="1"/>
           </p:cNvPicPr>
           <p:nvPr/>
         </p:nvPicPr>
         <p:blipFill>
-          <a:blip r:embed="rId4"/>
+          <a:blip r:embed="rId2"/>
           <a:stretch>
             <a:fillRect/>
           </a:stretch>
@@ -13259,7 +13167,7 @@
             <a:avLst/>
           </a:prstGeom>
           <a:effectLst>
-            <a:outerShdw blurRad="76200" dist="25400" dir="2700000" algn="bl" rotWithShape="0">
+            <a:outerShdw sx="100000" sy="100000" kx="0" ky="0" algn="bl" rotWithShape="0" blurRad="76200" dist="25400" dir="2700000">
               <a:srgbClr val="000000">
                 <a:alpha val="18000"/>
               </a:srgbClr>
@@ -13288,7 +13196,7 @@
           <a:bodyPr wrap="square" lIns="0" tIns="0" rIns="0" bIns="0" rtlCol="0" anchor="t"/>
           <a:lstStyle/>
           <a:p>
-            <a:pPr marL="0" indent="0" algn="ctr">
+            <a:pPr algn="ctr" indent="0" marL="0">
               <a:buNone/>
             </a:pPr>
             <a:r>
@@ -13312,11 +13220,11 @@
         <p:spPr>
           <a:xfrm>
             <a:off x="5852160" y="1371600"/>
-            <a:ext cx="5790895" cy="1097280"/>
+            <a:ext cx="5790895" cy="1188720"/>
           </a:xfrm>
           <a:prstGeom prst="roundRect">
             <a:avLst>
-              <a:gd name="adj" fmla="val 10000"/>
+              <a:gd name="adj" fmla="val 9231"/>
             </a:avLst>
           </a:prstGeom>
           <a:solidFill>
@@ -13329,13 +13237,6 @@
             <a:prstDash val="solid"/>
           </a:ln>
         </p:spPr>
-        <p:txBody>
-          <a:bodyPr/>
-          <a:lstStyle/>
-          <a:p>
-            <a:endParaRPr lang="ru-RU"/>
-          </a:p>
-        </p:txBody>
       </p:sp>
       <p:sp>
         <p:nvSpPr>
@@ -13345,7 +13246,7 @@
         </p:nvSpPr>
         <p:spPr>
           <a:xfrm>
-            <a:off x="6080760" y="1388697"/>
+            <a:off x="6080760" y="1572768"/>
             <a:ext cx="5333695" cy="502920"/>
           </a:xfrm>
           <a:prstGeom prst="rect">
@@ -13358,7 +13259,7 @@
           <a:bodyPr wrap="square" lIns="0" tIns="0" rIns="0" bIns="0" rtlCol="0" anchor="ctr"/>
           <a:lstStyle/>
           <a:p>
-            <a:pPr marL="0" indent="0">
+            <a:pPr indent="0" marL="0">
               <a:buNone/>
             </a:pPr>
             <a:r>
@@ -13381,8 +13282,8 @@
         </p:nvSpPr>
         <p:spPr>
           <a:xfrm>
-            <a:off x="6080760" y="1964769"/>
-            <a:ext cx="5333695" cy="182880"/>
+            <a:off x="6080760" y="2148840"/>
+            <a:ext cx="5333695" cy="274320"/>
           </a:xfrm>
           <a:prstGeom prst="rect">
             <a:avLst/>
@@ -13394,7 +13295,7 @@
           <a:bodyPr wrap="square" lIns="0" tIns="0" rIns="0" bIns="0" rtlCol="0" anchor="t"/>
           <a:lstStyle/>
           <a:p>
-            <a:pPr marL="0" indent="0">
+            <a:pPr indent="0" marL="0">
               <a:buNone/>
             </a:pPr>
             <a:r>
@@ -13417,12 +13318,12 @@
         </p:nvSpPr>
         <p:spPr>
           <a:xfrm>
-            <a:off x="5852160" y="2587752"/>
-            <a:ext cx="5790895" cy="1097280"/>
+            <a:off x="5852160" y="2615184"/>
+            <a:ext cx="5790895" cy="1188720"/>
           </a:xfrm>
           <a:prstGeom prst="roundRect">
             <a:avLst>
-              <a:gd name="adj" fmla="val 10000"/>
+              <a:gd name="adj" fmla="val 9231"/>
             </a:avLst>
           </a:prstGeom>
           <a:solidFill>
@@ -13435,13 +13336,6 @@
             <a:prstDash val="solid"/>
           </a:ln>
         </p:spPr>
-        <p:txBody>
-          <a:bodyPr/>
-          <a:lstStyle/>
-          <a:p>
-            <a:endParaRPr lang="ru-RU"/>
-          </a:p>
-        </p:txBody>
       </p:sp>
       <p:sp>
         <p:nvSpPr>
@@ -13451,7 +13345,7 @@
         </p:nvSpPr>
         <p:spPr>
           <a:xfrm>
-            <a:off x="6080760" y="2604849"/>
+            <a:off x="6080760" y="2816352"/>
             <a:ext cx="5333695" cy="502920"/>
           </a:xfrm>
           <a:prstGeom prst="rect">
@@ -13464,7 +13358,7 @@
           <a:bodyPr wrap="square" lIns="0" tIns="0" rIns="0" bIns="0" rtlCol="0" anchor="ctr"/>
           <a:lstStyle/>
           <a:p>
-            <a:pPr marL="0" indent="0">
+            <a:pPr indent="0" marL="0">
               <a:buNone/>
             </a:pPr>
             <a:r>
@@ -13487,8 +13381,8 @@
         </p:nvSpPr>
         <p:spPr>
           <a:xfrm>
-            <a:off x="6080760" y="3180921"/>
-            <a:ext cx="5333695" cy="182880"/>
+            <a:off x="6080760" y="3392424"/>
+            <a:ext cx="5333695" cy="274320"/>
           </a:xfrm>
           <a:prstGeom prst="rect">
             <a:avLst/>
@@ -13500,7 +13394,7 @@
           <a:bodyPr wrap="square" lIns="0" tIns="0" rIns="0" bIns="0" rtlCol="0" anchor="t"/>
           <a:lstStyle/>
           <a:p>
-            <a:pPr marL="0" indent="0">
+            <a:pPr indent="0" marL="0">
               <a:buNone/>
             </a:pPr>
             <a:r>
@@ -13523,12 +13417,12 @@
         </p:nvSpPr>
         <p:spPr>
           <a:xfrm>
-            <a:off x="5852160" y="3803904"/>
-            <a:ext cx="5790895" cy="1097280"/>
+            <a:off x="5852160" y="3858768"/>
+            <a:ext cx="5790895" cy="1188720"/>
           </a:xfrm>
           <a:prstGeom prst="roundRect">
             <a:avLst>
-              <a:gd name="adj" fmla="val 10000"/>
+              <a:gd name="adj" fmla="val 9231"/>
             </a:avLst>
           </a:prstGeom>
           <a:solidFill>
@@ -13541,13 +13435,6 @@
             <a:prstDash val="solid"/>
           </a:ln>
         </p:spPr>
-        <p:txBody>
-          <a:bodyPr/>
-          <a:lstStyle/>
-          <a:p>
-            <a:endParaRPr lang="ru-RU"/>
-          </a:p>
-        </p:txBody>
       </p:sp>
       <p:sp>
         <p:nvSpPr>
@@ -13557,7 +13444,7 @@
         </p:nvSpPr>
         <p:spPr>
           <a:xfrm>
-            <a:off x="6080760" y="3821001"/>
+            <a:off x="6080760" y="4059936"/>
             <a:ext cx="5333695" cy="502920"/>
           </a:xfrm>
           <a:prstGeom prst="rect">
@@ -13570,7 +13457,7 @@
           <a:bodyPr wrap="square" lIns="0" tIns="0" rIns="0" bIns="0" rtlCol="0" anchor="ctr"/>
           <a:lstStyle/>
           <a:p>
-            <a:pPr marL="0" indent="0">
+            <a:pPr indent="0" marL="0">
               <a:buNone/>
             </a:pPr>
             <a:r>
@@ -13593,8 +13480,8 @@
         </p:nvSpPr>
         <p:spPr>
           <a:xfrm>
-            <a:off x="6080760" y="4397073"/>
-            <a:ext cx="5333695" cy="182880"/>
+            <a:off x="6080760" y="4636008"/>
+            <a:ext cx="5333695" cy="274320"/>
           </a:xfrm>
           <a:prstGeom prst="rect">
             <a:avLst/>
@@ -13606,7 +13493,7 @@
           <a:bodyPr wrap="square" lIns="0" tIns="0" rIns="0" bIns="0" rtlCol="0" anchor="t"/>
           <a:lstStyle/>
           <a:p>
-            <a:pPr marL="0" indent="0">
+            <a:pPr indent="0" marL="0">
               <a:buNone/>
             </a:pPr>
             <a:r>
@@ -13629,12 +13516,12 @@
         </p:nvSpPr>
         <p:spPr>
           <a:xfrm>
-            <a:off x="5852160" y="5020056"/>
-            <a:ext cx="5790895" cy="1097280"/>
+            <a:off x="5852160" y="5102352"/>
+            <a:ext cx="5790895" cy="1188720"/>
           </a:xfrm>
           <a:prstGeom prst="roundRect">
             <a:avLst>
-              <a:gd name="adj" fmla="val 10000"/>
+              <a:gd name="adj" fmla="val 9231"/>
             </a:avLst>
           </a:prstGeom>
           <a:solidFill>
@@ -13647,13 +13534,6 @@
             <a:prstDash val="solid"/>
           </a:ln>
         </p:spPr>
-        <p:txBody>
-          <a:bodyPr/>
-          <a:lstStyle/>
-          <a:p>
-            <a:endParaRPr lang="ru-RU"/>
-          </a:p>
-        </p:txBody>
       </p:sp>
       <p:sp>
         <p:nvSpPr>
@@ -13663,7 +13543,7 @@
         </p:nvSpPr>
         <p:spPr>
           <a:xfrm>
-            <a:off x="6080760" y="5037153"/>
+            <a:off x="6080760" y="5303520"/>
             <a:ext cx="5333695" cy="502920"/>
           </a:xfrm>
           <a:prstGeom prst="rect">
@@ -13676,7 +13556,7 @@
           <a:bodyPr wrap="square" lIns="0" tIns="0" rIns="0" bIns="0" rtlCol="0" anchor="ctr"/>
           <a:lstStyle/>
           <a:p>
-            <a:pPr marL="0" indent="0">
+            <a:pPr indent="0" marL="0">
               <a:buNone/>
             </a:pPr>
             <a:r>
@@ -13699,8 +13579,8 @@
         </p:nvSpPr>
         <p:spPr>
           <a:xfrm>
-            <a:off x="6080760" y="5613225"/>
-            <a:ext cx="5333695" cy="182880"/>
+            <a:off x="6080760" y="5879592"/>
+            <a:ext cx="5333695" cy="274320"/>
           </a:xfrm>
           <a:prstGeom prst="rect">
             <a:avLst/>
@@ -13712,7 +13592,7 @@
           <a:bodyPr wrap="square" lIns="0" tIns="0" rIns="0" bIns="0" rtlCol="0" anchor="t"/>
           <a:lstStyle/>
           <a:p>
-            <a:pPr marL="0" indent="0">
+            <a:pPr indent="0" marL="0">
               <a:buNone/>
             </a:pPr>
             <a:r>
@@ -13747,7 +13627,7 @@
           </a:prstGeom>
           <a:extLst>
             <a:ext uri="{C572A759-6A51-4108-AA02-DFA0A04FC94B}">
-              <ma14:wrappingTextBoxFlag xmlns:ma14="http://schemas.microsoft.com/office/mac/drawingml/2011/main" xmlns="" val="0"/>
+              <ma14:wrappingTextBoxFlag xmlns:ma14="http://schemas.microsoft.com/office/mac/drawingml/2011/main" val="0"/>
             </a:ext>
           </a:extLst>
         </p:spPr>
@@ -13765,7 +13645,7 @@
           <a:p>
             <a:pPr algn="r"/>
             <a:fld id="{F7021451-1387-4CA6-816F-3879F97B5CBC}" type="slidenum">
-              <a:rPr lang="en-US" b="0"/>
+              <a:rPr b="0" lang="en-US"/>
               <a:t>9</a:t>
             </a:fld>
             <a:endParaRPr lang="en-US"/>
@@ -14073,319 +13953,4 @@
     </a:ext>
   </a:extLst>
 </a:theme>
-</file>
-
-<file path=ppt/theme/theme2.xml><?xml version="1.0" encoding="utf-8"?>
-<a:theme xmlns:a="http://schemas.openxmlformats.org/drawingml/2006/main" name="Тема Office">
-  <a:themeElements>
-    <a:clrScheme name="Стандартная">
-      <a:dk1>
-        <a:sysClr val="windowText" lastClr="000000"/>
-      </a:dk1>
-      <a:lt1>
-        <a:sysClr val="window" lastClr="FFFFFF"/>
-      </a:lt1>
-      <a:dk2>
-        <a:srgbClr val="0E2841"/>
-      </a:dk2>
-      <a:lt2>
-        <a:srgbClr val="E8E8E8"/>
-      </a:lt2>
-      <a:accent1>
-        <a:srgbClr val="156082"/>
-      </a:accent1>
-      <a:accent2>
-        <a:srgbClr val="E97132"/>
-      </a:accent2>
-      <a:accent3>
-        <a:srgbClr val="196B24"/>
-      </a:accent3>
-      <a:accent4>
-        <a:srgbClr val="0F9ED5"/>
-      </a:accent4>
-      <a:accent5>
-        <a:srgbClr val="A02B93"/>
-      </a:accent5>
-      <a:accent6>
-        <a:srgbClr val="4EA72E"/>
-      </a:accent6>
-      <a:hlink>
-        <a:srgbClr val="467886"/>
-      </a:hlink>
-      <a:folHlink>
-        <a:srgbClr val="96607D"/>
-      </a:folHlink>
-    </a:clrScheme>
-    <a:fontScheme name="Стандартная">
-      <a:majorFont>
-        <a:latin typeface="Aptos Display" panose="02110004020202020204"/>
-        <a:ea typeface=""/>
-        <a:cs typeface=""/>
-        <a:font script="Jpan" typeface="游ゴシック Light"/>
-        <a:font script="Hang" typeface="맑은 고딕"/>
-        <a:font script="Hans" typeface="等线 Light"/>
-        <a:font script="Hant" typeface="新細明體"/>
-        <a:font script="Arab" typeface="Times New Roman"/>
-        <a:font script="Hebr" typeface="Times New Roman"/>
-        <a:font script="Thai" typeface="Angsana New"/>
-        <a:font script="Ethi" typeface="Nyala"/>
-        <a:font script="Beng" typeface="Vrinda"/>
-        <a:font script="Gujr" typeface="Shruti"/>
-        <a:font script="Khmr" typeface="MoolBoran"/>
-        <a:font script="Knda" typeface="Tunga"/>
-        <a:font script="Guru" typeface="Raavi"/>
-        <a:font script="Cans" typeface="Euphemia"/>
-        <a:font script="Cher" typeface="Plantagenet Cherokee"/>
-        <a:font script="Yiii" typeface="Microsoft Yi Baiti"/>
-        <a:font script="Tibt" typeface="Microsoft Himalaya"/>
-        <a:font script="Thaa" typeface="MV Boli"/>
-        <a:font script="Deva" typeface="Mangal"/>
-        <a:font script="Telu" typeface="Gautami"/>
-        <a:font script="Taml" typeface="Latha"/>
-        <a:font script="Syrc" typeface="Estrangelo Edessa"/>
-        <a:font script="Orya" typeface="Kalinga"/>
-        <a:font script="Mlym" typeface="Kartika"/>
-        <a:font script="Laoo" typeface="DokChampa"/>
-        <a:font script="Sinh" typeface="Iskoola Pota"/>
-        <a:font script="Mong" typeface="Mongolian Baiti"/>
-        <a:font script="Viet" typeface="Times New Roman"/>
-        <a:font script="Uigh" typeface="Microsoft Uighur"/>
-        <a:font script="Geor" typeface="Sylfaen"/>
-        <a:font script="Armn" typeface="Arial"/>
-        <a:font script="Bugi" typeface="Leelawadee UI"/>
-        <a:font script="Bopo" typeface="Microsoft JhengHei"/>
-        <a:font script="Java" typeface="Javanese Text"/>
-        <a:font script="Lisu" typeface="Segoe UI"/>
-        <a:font script="Mymr" typeface="Myanmar Text"/>
-        <a:font script="Nkoo" typeface="Ebrima"/>
-        <a:font script="Olck" typeface="Nirmala UI"/>
-        <a:font script="Osma" typeface="Ebrima"/>
-        <a:font script="Phag" typeface="Phagspa"/>
-        <a:font script="Syrn" typeface="Estrangelo Edessa"/>
-        <a:font script="Syrj" typeface="Estrangelo Edessa"/>
-        <a:font script="Syre" typeface="Estrangelo Edessa"/>
-        <a:font script="Sora" typeface="Nirmala UI"/>
-        <a:font script="Tale" typeface="Microsoft Tai Le"/>
-        <a:font script="Talu" typeface="Microsoft New Tai Lue"/>
-        <a:font script="Tfng" typeface="Ebrima"/>
-      </a:majorFont>
-      <a:minorFont>
-        <a:latin typeface="Aptos" panose="02110004020202020204"/>
-        <a:ea typeface=""/>
-        <a:cs typeface=""/>
-        <a:font script="Jpan" typeface="游ゴシック"/>
-        <a:font script="Hang" typeface="맑은 고딕"/>
-        <a:font script="Hans" typeface="等线"/>
-        <a:font script="Hant" typeface="新細明體"/>
-        <a:font script="Arab" typeface="Arial"/>
-        <a:font script="Hebr" typeface="Arial"/>
-        <a:font script="Thai" typeface="Cordia New"/>
-        <a:font script="Ethi" typeface="Nyala"/>
-        <a:font script="Beng" typeface="Vrinda"/>
-        <a:font script="Gujr" typeface="Shruti"/>
-        <a:font script="Khmr" typeface="DaunPenh"/>
-        <a:font script="Knda" typeface="Tunga"/>
-        <a:font script="Guru" typeface="Raavi"/>
-        <a:font script="Cans" typeface="Euphemia"/>
-        <a:font script="Cher" typeface="Plantagenet Cherokee"/>
-        <a:font script="Yiii" typeface="Microsoft Yi Baiti"/>
-        <a:font script="Tibt" typeface="Microsoft Himalaya"/>
-        <a:font script="Thaa" typeface="MV Boli"/>
-        <a:font script="Deva" typeface="Mangal"/>
-        <a:font script="Telu" typeface="Gautami"/>
-        <a:font script="Taml" typeface="Latha"/>
-        <a:font script="Syrc" typeface="Estrangelo Edessa"/>
-        <a:font script="Orya" typeface="Kalinga"/>
-        <a:font script="Mlym" typeface="Kartika"/>
-        <a:font script="Laoo" typeface="DokChampa"/>
-        <a:font script="Sinh" typeface="Iskoola Pota"/>
-        <a:font script="Mong" typeface="Mongolian Baiti"/>
-        <a:font script="Viet" typeface="Arial"/>
-        <a:font script="Uigh" typeface="Microsoft Uighur"/>
-        <a:font script="Geor" typeface="Sylfaen"/>
-        <a:font script="Armn" typeface="Arial"/>
-        <a:font script="Bugi" typeface="Leelawadee UI"/>
-        <a:font script="Bopo" typeface="Microsoft JhengHei"/>
-        <a:font script="Java" typeface="Javanese Text"/>
-        <a:font script="Lisu" typeface="Segoe UI"/>
-        <a:font script="Mymr" typeface="Myanmar Text"/>
-        <a:font script="Nkoo" typeface="Ebrima"/>
-        <a:font script="Olck" typeface="Nirmala UI"/>
-        <a:font script="Osma" typeface="Ebrima"/>
-        <a:font script="Phag" typeface="Phagspa"/>
-        <a:font script="Syrn" typeface="Estrangelo Edessa"/>
-        <a:font script="Syrj" typeface="Estrangelo Edessa"/>
-        <a:font script="Syre" typeface="Estrangelo Edessa"/>
-        <a:font script="Sora" typeface="Nirmala UI"/>
-        <a:font script="Tale" typeface="Microsoft Tai Le"/>
-        <a:font script="Talu" typeface="Microsoft New Tai Lue"/>
-        <a:font script="Tfng" typeface="Ebrima"/>
-      </a:minorFont>
-    </a:fontScheme>
-    <a:fmtScheme name="Стандартная">
-      <a:fillStyleLst>
-        <a:solidFill>
-          <a:schemeClr val="phClr"/>
-        </a:solidFill>
-        <a:gradFill rotWithShape="1">
-          <a:gsLst>
-            <a:gs pos="0">
-              <a:schemeClr val="phClr">
-                <a:lumMod val="110000"/>
-                <a:satMod val="105000"/>
-                <a:tint val="67000"/>
-              </a:schemeClr>
-            </a:gs>
-            <a:gs pos="50000">
-              <a:schemeClr val="phClr">
-                <a:lumMod val="105000"/>
-                <a:satMod val="103000"/>
-                <a:tint val="73000"/>
-              </a:schemeClr>
-            </a:gs>
-            <a:gs pos="100000">
-              <a:schemeClr val="phClr">
-                <a:lumMod val="105000"/>
-                <a:satMod val="109000"/>
-                <a:tint val="81000"/>
-              </a:schemeClr>
-            </a:gs>
-          </a:gsLst>
-          <a:lin ang="5400000" scaled="0"/>
-        </a:gradFill>
-        <a:gradFill rotWithShape="1">
-          <a:gsLst>
-            <a:gs pos="0">
-              <a:schemeClr val="phClr">
-                <a:satMod val="103000"/>
-                <a:lumMod val="102000"/>
-                <a:tint val="94000"/>
-              </a:schemeClr>
-            </a:gs>
-            <a:gs pos="50000">
-              <a:schemeClr val="phClr">
-                <a:satMod val="110000"/>
-                <a:lumMod val="100000"/>
-                <a:shade val="100000"/>
-              </a:schemeClr>
-            </a:gs>
-            <a:gs pos="100000">
-              <a:schemeClr val="phClr">
-                <a:lumMod val="99000"/>
-                <a:satMod val="120000"/>
-                <a:shade val="78000"/>
-              </a:schemeClr>
-            </a:gs>
-          </a:gsLst>
-          <a:lin ang="5400000" scaled="0"/>
-        </a:gradFill>
-      </a:fillStyleLst>
-      <a:lnStyleLst>
-        <a:ln w="12700" cap="flat" cmpd="sng" algn="ctr">
-          <a:solidFill>
-            <a:schemeClr val="phClr"/>
-          </a:solidFill>
-          <a:prstDash val="solid"/>
-          <a:miter lim="800000"/>
-        </a:ln>
-        <a:ln w="19050" cap="flat" cmpd="sng" algn="ctr">
-          <a:solidFill>
-            <a:schemeClr val="phClr"/>
-          </a:solidFill>
-          <a:prstDash val="solid"/>
-          <a:miter lim="800000"/>
-        </a:ln>
-        <a:ln w="25400" cap="flat" cmpd="sng" algn="ctr">
-          <a:solidFill>
-            <a:schemeClr val="phClr"/>
-          </a:solidFill>
-          <a:prstDash val="solid"/>
-          <a:miter lim="800000"/>
-        </a:ln>
-      </a:lnStyleLst>
-      <a:effectStyleLst>
-        <a:effectStyle>
-          <a:effectLst/>
-        </a:effectStyle>
-        <a:effectStyle>
-          <a:effectLst/>
-        </a:effectStyle>
-        <a:effectStyle>
-          <a:effectLst>
-            <a:outerShdw blurRad="57150" dist="19050" dir="5400000" algn="ctr" rotWithShape="0">
-              <a:srgbClr val="000000">
-                <a:alpha val="63000"/>
-              </a:srgbClr>
-            </a:outerShdw>
-          </a:effectLst>
-        </a:effectStyle>
-      </a:effectStyleLst>
-      <a:bgFillStyleLst>
-        <a:solidFill>
-          <a:schemeClr val="phClr"/>
-        </a:solidFill>
-        <a:solidFill>
-          <a:schemeClr val="phClr">
-            <a:tint val="95000"/>
-            <a:satMod val="170000"/>
-          </a:schemeClr>
-        </a:solidFill>
-        <a:gradFill rotWithShape="1">
-          <a:gsLst>
-            <a:gs pos="0">
-              <a:schemeClr val="phClr">
-                <a:tint val="93000"/>
-                <a:satMod val="150000"/>
-                <a:shade val="98000"/>
-                <a:lumMod val="102000"/>
-              </a:schemeClr>
-            </a:gs>
-            <a:gs pos="50000">
-              <a:schemeClr val="phClr">
-                <a:tint val="98000"/>
-                <a:satMod val="130000"/>
-                <a:shade val="90000"/>
-                <a:lumMod val="103000"/>
-              </a:schemeClr>
-            </a:gs>
-            <a:gs pos="100000">
-              <a:schemeClr val="phClr">
-                <a:shade val="63000"/>
-                <a:satMod val="120000"/>
-              </a:schemeClr>
-            </a:gs>
-          </a:gsLst>
-          <a:lin ang="5400000" scaled="0"/>
-        </a:gradFill>
-      </a:bgFillStyleLst>
-    </a:fmtScheme>
-  </a:themeElements>
-  <a:objectDefaults>
-    <a:lnDef>
-      <a:spPr/>
-      <a:bodyPr/>
-      <a:lstStyle/>
-      <a:style>
-        <a:lnRef idx="2">
-          <a:schemeClr val="accent1"/>
-        </a:lnRef>
-        <a:fillRef idx="0">
-          <a:schemeClr val="accent1"/>
-        </a:fillRef>
-        <a:effectRef idx="1">
-          <a:schemeClr val="accent1"/>
-        </a:effectRef>
-        <a:fontRef idx="minor">
-          <a:schemeClr val="tx1"/>
-        </a:fontRef>
-      </a:style>
-    </a:lnDef>
-  </a:objectDefaults>
-  <a:extraClrSchemeLst/>
-  <a:extLst>
-    <a:ext uri="{05A4C25C-085E-4340-85A3-A5531E510DB2}">
-      <thm15:themeFamily xmlns:thm15="http://schemas.microsoft.com/office/thememl/2012/main" name="Office Theme" id="{2E142A2C-CD16-42D6-873A-C26D2A0506FA}" vid="{1BDDFF52-6CD6-40A5-AB3C-68EB2F1E4D0A}"/>
-    </a:ext>
-  </a:extLst>
-</a:theme>
 </file>